--- a/modeles/masque_par_defaut.pptx
+++ b/modeles/masque_par_defaut.pptx
@@ -1,17 +1,26 @@
 
 <file path=ppt/presentation.xml><?xml version="1.0" encoding="utf-8"?>
-<p:presentation xmlns:a="http://schemas.openxmlformats.org/drawingml/2006/main" xmlns:r="http://schemas.openxmlformats.org/officeDocument/2006/relationships" xmlns:p="http://schemas.openxmlformats.org/presentationml/2006/main" saveSubsetFonts="1" autoCompressPictures="0">
+<p:presentation xmlns:a="http://schemas.openxmlformats.org/drawingml/2006/main" xmlns:r="http://schemas.openxmlformats.org/officeDocument/2006/relationships" xmlns:p="http://schemas.openxmlformats.org/presentationml/2006/main" showSpecialPlsOnTitleSld="0" saveSubsetFonts="1" bookmarkIdSeed="2">
   <p:sldMasterIdLst>
-    <p:sldMasterId id="2147483648" r:id="rId1"/>
+    <p:sldMasterId id="2147483764" r:id="rId1"/>
   </p:sldMasterIdLst>
-  <p:sldIdLst/>
-  <p:sldSz cx="12191695" cy="6858000" type="screen4x3"/>
+  <p:notesMasterIdLst>
+    <p:notesMasterId r:id="rId4"/>
+  </p:notesMasterIdLst>
+  <p:handoutMasterIdLst>
+    <p:handoutMasterId r:id="rId5"/>
+  </p:handoutMasterIdLst>
+  <p:sldIdLst>
+    <p:sldId id="256" r:id="rId2"/>
+    <p:sldId id="878" r:id="rId3"/>
+  </p:sldIdLst>
+  <p:sldSz cx="12192000" cy="6858000"/>
   <p:notesSz cx="6858000" cy="9144000"/>
   <p:defaultTextStyle>
     <a:defPPr>
-      <a:defRPr lang="en-US"/>
+      <a:defRPr lang="fr-FR"/>
     </a:defPPr>
-    <a:lvl1pPr marL="0" algn="l" defTabSz="457200" rtl="0" eaLnBrk="1" latinLnBrk="0" hangingPunct="1">
+    <a:lvl1pPr marL="0" algn="l" defTabSz="914400" rtl="0" eaLnBrk="1" latinLnBrk="0" hangingPunct="1">
       <a:defRPr sz="1800" kern="1200">
         <a:solidFill>
           <a:schemeClr val="tx1"/>
@@ -21,7 +30,7 @@
         <a:cs typeface="+mn-cs"/>
       </a:defRPr>
     </a:lvl1pPr>
-    <a:lvl2pPr marL="457200" algn="l" defTabSz="457200" rtl="0" eaLnBrk="1" latinLnBrk="0" hangingPunct="1">
+    <a:lvl2pPr marL="457200" algn="l" defTabSz="914400" rtl="0" eaLnBrk="1" latinLnBrk="0" hangingPunct="1">
       <a:defRPr sz="1800" kern="1200">
         <a:solidFill>
           <a:schemeClr val="tx1"/>
@@ -31,7 +40,7 @@
         <a:cs typeface="+mn-cs"/>
       </a:defRPr>
     </a:lvl2pPr>
-    <a:lvl3pPr marL="914400" algn="l" defTabSz="457200" rtl="0" eaLnBrk="1" latinLnBrk="0" hangingPunct="1">
+    <a:lvl3pPr marL="914400" algn="l" defTabSz="914400" rtl="0" eaLnBrk="1" latinLnBrk="0" hangingPunct="1">
       <a:defRPr sz="1800" kern="1200">
         <a:solidFill>
           <a:schemeClr val="tx1"/>
@@ -41,7 +50,7 @@
         <a:cs typeface="+mn-cs"/>
       </a:defRPr>
     </a:lvl3pPr>
-    <a:lvl4pPr marL="1371600" algn="l" defTabSz="457200" rtl="0" eaLnBrk="1" latinLnBrk="0" hangingPunct="1">
+    <a:lvl4pPr marL="1371600" algn="l" defTabSz="914400" rtl="0" eaLnBrk="1" latinLnBrk="0" hangingPunct="1">
       <a:defRPr sz="1800" kern="1200">
         <a:solidFill>
           <a:schemeClr val="tx1"/>
@@ -51,7 +60,7 @@
         <a:cs typeface="+mn-cs"/>
       </a:defRPr>
     </a:lvl4pPr>
-    <a:lvl5pPr marL="1828800" algn="l" defTabSz="457200" rtl="0" eaLnBrk="1" latinLnBrk="0" hangingPunct="1">
+    <a:lvl5pPr marL="1828800" algn="l" defTabSz="914400" rtl="0" eaLnBrk="1" latinLnBrk="0" hangingPunct="1">
       <a:defRPr sz="1800" kern="1200">
         <a:solidFill>
           <a:schemeClr val="tx1"/>
@@ -61,7 +70,7 @@
         <a:cs typeface="+mn-cs"/>
       </a:defRPr>
     </a:lvl5pPr>
-    <a:lvl6pPr marL="2286000" algn="l" defTabSz="457200" rtl="0" eaLnBrk="1" latinLnBrk="0" hangingPunct="1">
+    <a:lvl6pPr marL="2286000" algn="l" defTabSz="914400" rtl="0" eaLnBrk="1" latinLnBrk="0" hangingPunct="1">
       <a:defRPr sz="1800" kern="1200">
         <a:solidFill>
           <a:schemeClr val="tx1"/>
@@ -71,7 +80,7 @@
         <a:cs typeface="+mn-cs"/>
       </a:defRPr>
     </a:lvl6pPr>
-    <a:lvl7pPr marL="2743200" algn="l" defTabSz="457200" rtl="0" eaLnBrk="1" latinLnBrk="0" hangingPunct="1">
+    <a:lvl7pPr marL="2743200" algn="l" defTabSz="914400" rtl="0" eaLnBrk="1" latinLnBrk="0" hangingPunct="1">
       <a:defRPr sz="1800" kern="1200">
         <a:solidFill>
           <a:schemeClr val="tx1"/>
@@ -81,7 +90,7 @@
         <a:cs typeface="+mn-cs"/>
       </a:defRPr>
     </a:lvl7pPr>
-    <a:lvl8pPr marL="3200400" algn="l" defTabSz="457200" rtl="0" eaLnBrk="1" latinLnBrk="0" hangingPunct="1">
+    <a:lvl8pPr marL="3200400" algn="l" defTabSz="914400" rtl="0" eaLnBrk="1" latinLnBrk="0" hangingPunct="1">
       <a:defRPr sz="1800" kern="1200">
         <a:solidFill>
           <a:schemeClr val="tx1"/>
@@ -91,7 +100,7 @@
         <a:cs typeface="+mn-cs"/>
       </a:defRPr>
     </a:lvl8pPr>
-    <a:lvl9pPr marL="3657600" algn="l" defTabSz="457200" rtl="0" eaLnBrk="1" latinLnBrk="0" hangingPunct="1">
+    <a:lvl9pPr marL="3657600" algn="l" defTabSz="914400" rtl="0" eaLnBrk="1" latinLnBrk="0" hangingPunct="1">
       <a:defRPr sz="1800" kern="1200">
         <a:solidFill>
           <a:schemeClr val="tx1"/>
@@ -102,12 +111,47 @@
       </a:defRPr>
     </a:lvl9pPr>
   </p:defaultTextStyle>
+  <p:extLst>
+    <p:ext uri="{EFAFB233-063F-42B5-8137-9DF3F51BA10A}">
+      <p15:sldGuideLst xmlns:p15="http://schemas.microsoft.com/office/powerpoint/2012/main">
+        <p15:guide id="1" orient="horz" pos="2160" userDrawn="1">
+          <p15:clr>
+            <a:srgbClr val="A4A3A4"/>
+          </p15:clr>
+        </p15:guide>
+        <p15:guide id="2" pos="3840" userDrawn="1">
+          <p15:clr>
+            <a:srgbClr val="A4A3A4"/>
+          </p15:clr>
+        </p15:guide>
+      </p15:sldGuideLst>
+    </p:ext>
+    <p:ext uri="{2D200454-40CA-4A62-9FC3-DE9A4176ACB9}">
+      <p15:notesGuideLst xmlns:p15="http://schemas.microsoft.com/office/powerpoint/2012/main">
+        <p15:guide id="1" orient="horz" pos="2880">
+          <p15:clr>
+            <a:srgbClr val="A4A3A4"/>
+          </p15:clr>
+        </p15:guide>
+        <p15:guide id="2" pos="2160">
+          <p15:clr>
+            <a:srgbClr val="A4A3A4"/>
+          </p15:clr>
+        </p15:guide>
+      </p15:notesGuideLst>
+    </p:ext>
+  </p:extLst>
 </p:presentation>
 </file>
 
-<file path=ppt/slideLayouts/slideLayout1.xml><?xml version="1.0" encoding="utf-8"?>
-<p:sldLayout xmlns:a="http://schemas.openxmlformats.org/drawingml/2006/main" xmlns:r="http://schemas.openxmlformats.org/officeDocument/2006/relationships" xmlns:p="http://schemas.openxmlformats.org/presentationml/2006/main" type="title" preserve="1">
-  <p:cSld name="Title Slide">
+<file path=ppt/handoutMasters/handoutMaster1.xml><?xml version="1.0" encoding="utf-8"?>
+<p:handoutMaster xmlns:a="http://schemas.openxmlformats.org/drawingml/2006/main" xmlns:r="http://schemas.openxmlformats.org/officeDocument/2006/relationships" xmlns:p="http://schemas.openxmlformats.org/presentationml/2006/main">
+  <p:cSld>
+    <p:bg>
+      <p:bgRef idx="1001">
+        <a:schemeClr val="bg1"/>
+      </p:bgRef>
+    </p:bg>
     <p:spTree>
       <p:nvGrpSpPr>
         <p:cNvPr id="1" name=""/>
@@ -124,232 +168,158 @@
       </p:grpSpPr>
       <p:sp>
         <p:nvSpPr>
-          <p:cNvPr id="2" name="Title 1"/>
+          <p:cNvPr id="2" name="Espace réservé de l'en-tête 1"/>
           <p:cNvSpPr>
             <a:spLocks noGrp="1"/>
           </p:cNvSpPr>
           <p:nvPr>
-            <p:ph type="ctrTitle"/>
+            <p:ph type="hdr" sz="quarter"/>
           </p:nvPr>
         </p:nvSpPr>
         <p:spPr>
           <a:xfrm>
-            <a:off x="914377" y="2130425"/>
-            <a:ext cx="10362940" cy="1470025"/>
+            <a:off x="0" y="0"/>
+            <a:ext cx="2971800" cy="457200"/>
           </a:xfrm>
+          <a:prstGeom prst="rect">
+            <a:avLst/>
+          </a:prstGeom>
         </p:spPr>
         <p:txBody>
-          <a:bodyPr/>
-          <a:lstStyle/>
-          <a:p>
-            <a:r>
-              <a:rPr lang="en-US" smtClean="0"/>
-              <a:t>Click to edit Master title style</a:t>
-            </a:r>
-            <a:endParaRPr lang="en-US"/>
+          <a:bodyPr vert="horz" lIns="91440" tIns="45720" rIns="91440" bIns="45720" rtlCol="0"/>
+          <a:lstStyle>
+            <a:lvl1pPr algn="l">
+              <a:defRPr sz="1200"/>
+            </a:lvl1pPr>
+          </a:lstStyle>
+          <a:p>
+            <a:endParaRPr lang="fr-FR"/>
           </a:p>
         </p:txBody>
       </p:sp>
       <p:sp>
         <p:nvSpPr>
-          <p:cNvPr id="3" name="Subtitle 2"/>
+          <p:cNvPr id="3" name="Espace réservé de la date 2"/>
           <p:cNvSpPr>
             <a:spLocks noGrp="1"/>
           </p:cNvSpPr>
           <p:nvPr>
-            <p:ph type="subTitle" idx="1"/>
+            <p:ph type="dt" sz="quarter" idx="1"/>
           </p:nvPr>
         </p:nvSpPr>
         <p:spPr>
           <a:xfrm>
-            <a:off x="1828754" y="3886200"/>
-            <a:ext cx="8534186" cy="1752600"/>
+            <a:off x="3884613" y="0"/>
+            <a:ext cx="2971800" cy="457200"/>
           </a:xfrm>
+          <a:prstGeom prst="rect">
+            <a:avLst/>
+          </a:prstGeom>
         </p:spPr>
         <p:txBody>
-          <a:bodyPr/>
+          <a:bodyPr vert="horz" lIns="91440" tIns="45720" rIns="91440" bIns="45720" rtlCol="0"/>
           <a:lstStyle>
-            <a:lvl1pPr marL="0" indent="0" algn="ctr">
-              <a:buNone/>
-              <a:defRPr>
-                <a:solidFill>
-                  <a:schemeClr val="tx1">
-                    <a:tint val="75000"/>
-                  </a:schemeClr>
-                </a:solidFill>
-              </a:defRPr>
+            <a:lvl1pPr algn="r">
+              <a:defRPr sz="1200"/>
             </a:lvl1pPr>
-            <a:lvl2pPr marL="457200" indent="0" algn="ctr">
-              <a:buNone/>
-              <a:defRPr>
-                <a:solidFill>
-                  <a:schemeClr val="tx1">
-                    <a:tint val="75000"/>
-                  </a:schemeClr>
-                </a:solidFill>
-              </a:defRPr>
-            </a:lvl2pPr>
-            <a:lvl3pPr marL="914400" indent="0" algn="ctr">
-              <a:buNone/>
-              <a:defRPr>
-                <a:solidFill>
-                  <a:schemeClr val="tx1">
-                    <a:tint val="75000"/>
-                  </a:schemeClr>
-                </a:solidFill>
-              </a:defRPr>
-            </a:lvl3pPr>
-            <a:lvl4pPr marL="1371600" indent="0" algn="ctr">
-              <a:buNone/>
-              <a:defRPr>
-                <a:solidFill>
-                  <a:schemeClr val="tx1">
-                    <a:tint val="75000"/>
-                  </a:schemeClr>
-                </a:solidFill>
-              </a:defRPr>
-            </a:lvl4pPr>
-            <a:lvl5pPr marL="1828800" indent="0" algn="ctr">
-              <a:buNone/>
-              <a:defRPr>
-                <a:solidFill>
-                  <a:schemeClr val="tx1">
-                    <a:tint val="75000"/>
-                  </a:schemeClr>
-                </a:solidFill>
-              </a:defRPr>
-            </a:lvl5pPr>
-            <a:lvl6pPr marL="2286000" indent="0" algn="ctr">
-              <a:buNone/>
-              <a:defRPr>
-                <a:solidFill>
-                  <a:schemeClr val="tx1">
-                    <a:tint val="75000"/>
-                  </a:schemeClr>
-                </a:solidFill>
-              </a:defRPr>
-            </a:lvl6pPr>
-            <a:lvl7pPr marL="2743200" indent="0" algn="ctr">
-              <a:buNone/>
-              <a:defRPr>
-                <a:solidFill>
-                  <a:schemeClr val="tx1">
-                    <a:tint val="75000"/>
-                  </a:schemeClr>
-                </a:solidFill>
-              </a:defRPr>
-            </a:lvl7pPr>
-            <a:lvl8pPr marL="3200400" indent="0" algn="ctr">
-              <a:buNone/>
-              <a:defRPr>
-                <a:solidFill>
-                  <a:schemeClr val="tx1">
-                    <a:tint val="75000"/>
-                  </a:schemeClr>
-                </a:solidFill>
-              </a:defRPr>
-            </a:lvl8pPr>
-            <a:lvl9pPr marL="3657600" indent="0" algn="ctr">
-              <a:buNone/>
-              <a:defRPr>
-                <a:solidFill>
-                  <a:schemeClr val="tx1">
-                    <a:tint val="75000"/>
-                  </a:schemeClr>
-                </a:solidFill>
-              </a:defRPr>
-            </a:lvl9pPr>
           </a:lstStyle>
           <a:p>
-            <a:r>
-              <a:rPr lang="en-US" smtClean="0"/>
-              <a:t>Click to edit Master subtitle style</a:t>
-            </a:r>
-            <a:endParaRPr lang="en-US"/>
+            <a:fld id="{B162364C-AA5A-4038-B7B8-A068D259AA3D}" type="datetimeFigureOut">
+              <a:rPr lang="fr-FR" smtClean="0"/>
+              <a:pPr/>
+              <a:t>10/10/2026</a:t>
+            </a:fld>
+            <a:endParaRPr lang="fr-FR"/>
           </a:p>
         </p:txBody>
       </p:sp>
       <p:sp>
         <p:nvSpPr>
-          <p:cNvPr id="4" name="Date Placeholder 3"/>
+          <p:cNvPr id="4" name="Espace réservé du pied de page 3"/>
           <p:cNvSpPr>
             <a:spLocks noGrp="1"/>
           </p:cNvSpPr>
           <p:nvPr>
-            <p:ph type="dt" sz="half" idx="10"/>
+            <p:ph type="ftr" sz="quarter" idx="2"/>
           </p:nvPr>
         </p:nvSpPr>
-        <p:spPr/>
+        <p:spPr>
+          <a:xfrm>
+            <a:off x="0" y="8685213"/>
+            <a:ext cx="2971800" cy="457200"/>
+          </a:xfrm>
+          <a:prstGeom prst="rect">
+            <a:avLst/>
+          </a:prstGeom>
+        </p:spPr>
         <p:txBody>
-          <a:bodyPr/>
-          <a:lstStyle/>
-          <a:p>
-            <a:fld id="{5BCAD085-E8A6-8845-BD4E-CB4CCA059FC4}" type="datetimeFigureOut">
-              <a:rPr lang="en-US" smtClean="0"/>
-              <a:t>1/27/13</a:t>
-            </a:fld>
-            <a:endParaRPr lang="en-US"/>
+          <a:bodyPr vert="horz" lIns="91440" tIns="45720" rIns="91440" bIns="45720" rtlCol="0" anchor="b"/>
+          <a:lstStyle>
+            <a:lvl1pPr algn="l">
+              <a:defRPr sz="1200"/>
+            </a:lvl1pPr>
+          </a:lstStyle>
+          <a:p>
+            <a:endParaRPr lang="fr-FR"/>
           </a:p>
         </p:txBody>
       </p:sp>
       <p:sp>
         <p:nvSpPr>
-          <p:cNvPr id="5" name="Footer Placeholder 4"/>
+          <p:cNvPr id="5" name="Espace réservé du numéro de diapositive 4"/>
           <p:cNvSpPr>
             <a:spLocks noGrp="1"/>
           </p:cNvSpPr>
           <p:nvPr>
-            <p:ph type="ftr" sz="quarter" idx="11"/>
+            <p:ph type="sldNum" sz="quarter" idx="3"/>
           </p:nvPr>
         </p:nvSpPr>
-        <p:spPr/>
+        <p:spPr>
+          <a:xfrm>
+            <a:off x="3884613" y="8685213"/>
+            <a:ext cx="2971800" cy="457200"/>
+          </a:xfrm>
+          <a:prstGeom prst="rect">
+            <a:avLst/>
+          </a:prstGeom>
+        </p:spPr>
         <p:txBody>
-          <a:bodyPr/>
-          <a:lstStyle/>
-          <a:p>
-            <a:endParaRPr lang="en-US"/>
-          </a:p>
-        </p:txBody>
-      </p:sp>
-      <p:sp>
-        <p:nvSpPr>
-          <p:cNvPr id="6" name="Slide Number Placeholder 5"/>
-          <p:cNvSpPr>
-            <a:spLocks noGrp="1"/>
-          </p:cNvSpPr>
-          <p:nvPr>
-            <p:ph type="sldNum" sz="quarter" idx="12"/>
-          </p:nvPr>
-        </p:nvSpPr>
-        <p:spPr/>
-        <p:txBody>
-          <a:bodyPr/>
-          <a:lstStyle/>
-          <a:p>
-            <a:fld id="{C1FF6DA9-008F-8B48-92A6-B652298478BF}" type="slidenum">
-              <a:rPr lang="en-US" smtClean="0"/>
-              <a:t>‹#›</a:t>
+          <a:bodyPr vert="horz" lIns="91440" tIns="45720" rIns="91440" bIns="45720" rtlCol="0" anchor="b"/>
+          <a:lstStyle>
+            <a:lvl1pPr algn="r">
+              <a:defRPr sz="1200"/>
+            </a:lvl1pPr>
+          </a:lstStyle>
+          <a:p>
+            <a:fld id="{8AFAEB9F-FFF5-4347-9C48-399B4D4D7BA3}" type="slidenum">
+              <a:rPr lang="fr-FR" smtClean="0"/>
+              <a:pPr/>
+              <a:t>‹N°›</a:t>
             </a:fld>
-            <a:endParaRPr lang="en-US"/>
+            <a:endParaRPr lang="fr-FR"/>
           </a:p>
         </p:txBody>
       </p:sp>
     </p:spTree>
     <p:extLst>
       <p:ext uri="{BB962C8B-B14F-4D97-AF65-F5344CB8AC3E}">
-        <p14:creationId xmlns:p14="http://schemas.microsoft.com/office/powerpoint/2010/main" val="3168075583"/>
+        <p14:creationId xmlns:p14="http://schemas.microsoft.com/office/powerpoint/2010/main" val="3874329570"/>
       </p:ext>
     </p:extLst>
   </p:cSld>
-  <p:clrMapOvr>
-    <a:masterClrMapping/>
-  </p:clrMapOvr>
-</p:sldLayout>
+  <p:clrMap bg1="lt1" tx1="dk1" bg2="lt2" tx2="dk2" accent1="accent1" accent2="accent2" accent3="accent3" accent4="accent4" accent5="accent5" accent6="accent6" hlink="hlink" folHlink="folHlink"/>
+  <p:hf hdr="0" ftr="0" dt="0"/>
+</p:handoutMaster>
 </file>
 
-<file path=ppt/slideLayouts/slideLayout10.xml><?xml version="1.0" encoding="utf-8"?>
-<p:sldLayout xmlns:a="http://schemas.openxmlformats.org/drawingml/2006/main" xmlns:r="http://schemas.openxmlformats.org/officeDocument/2006/relationships" xmlns:p="http://schemas.openxmlformats.org/presentationml/2006/main" type="vertTx" preserve="1">
-  <p:cSld name="Title and Vertical Text">
+<file path=ppt/notesMasters/notesMaster1.xml><?xml version="1.0" encoding="utf-8"?>
+<p:notesMaster xmlns:a="http://schemas.openxmlformats.org/drawingml/2006/main" xmlns:r="http://schemas.openxmlformats.org/officeDocument/2006/relationships" xmlns:p="http://schemas.openxmlformats.org/presentationml/2006/main">
+  <p:cSld>
+    <p:bg>
+      <p:bgRef idx="1001">
+        <a:schemeClr val="bg1"/>
+      </p:bgRef>
+    </p:bg>
     <p:spTree>
       <p:nvGrpSpPr>
         <p:cNvPr id="1" name=""/>
@@ -366,160 +336,339 @@
       </p:grpSpPr>
       <p:sp>
         <p:nvSpPr>
-          <p:cNvPr id="2" name="Title 1"/>
+          <p:cNvPr id="2" name="Espace réservé de l'en-tête 1"/>
           <p:cNvSpPr>
             <a:spLocks noGrp="1"/>
           </p:cNvSpPr>
           <p:nvPr>
-            <p:ph type="title"/>
+            <p:ph type="hdr" sz="quarter"/>
           </p:nvPr>
         </p:nvSpPr>
-        <p:spPr/>
+        <p:spPr>
+          <a:xfrm>
+            <a:off x="0" y="0"/>
+            <a:ext cx="2971800" cy="457200"/>
+          </a:xfrm>
+          <a:prstGeom prst="rect">
+            <a:avLst/>
+          </a:prstGeom>
+        </p:spPr>
         <p:txBody>
-          <a:bodyPr/>
-          <a:lstStyle/>
-          <a:p>
-            <a:r>
-              <a:rPr lang="en-US" smtClean="0"/>
-              <a:t>Click to edit Master title style</a:t>
-            </a:r>
-            <a:endParaRPr lang="en-US"/>
+          <a:bodyPr vert="horz" lIns="91440" tIns="45720" rIns="91440" bIns="45720" rtlCol="0"/>
+          <a:lstStyle>
+            <a:lvl1pPr algn="l">
+              <a:defRPr sz="1200"/>
+            </a:lvl1pPr>
+          </a:lstStyle>
+          <a:p>
+            <a:endParaRPr lang="fr-FR"/>
           </a:p>
         </p:txBody>
       </p:sp>
       <p:sp>
         <p:nvSpPr>
-          <p:cNvPr id="3" name="Vertical Text Placeholder 2"/>
+          <p:cNvPr id="3" name="Espace réservé de la date 2"/>
           <p:cNvSpPr>
             <a:spLocks noGrp="1"/>
           </p:cNvSpPr>
           <p:nvPr>
-            <p:ph type="body" orient="vert" idx="1"/>
+            <p:ph type="dt" idx="1"/>
           </p:nvPr>
         </p:nvSpPr>
-        <p:spPr/>
+        <p:spPr>
+          <a:xfrm>
+            <a:off x="3884613" y="0"/>
+            <a:ext cx="2971800" cy="457200"/>
+          </a:xfrm>
+          <a:prstGeom prst="rect">
+            <a:avLst/>
+          </a:prstGeom>
+        </p:spPr>
         <p:txBody>
-          <a:bodyPr vert="eaVert"/>
-          <a:lstStyle/>
-          <a:p>
-            <a:pPr lvl="0"/>
-            <a:r>
-              <a:rPr lang="en-US" smtClean="0"/>
-              <a:t>Click to edit Master text styles</a:t>
-            </a:r>
-          </a:p>
-          <a:p>
-            <a:pPr lvl="1"/>
-            <a:r>
-              <a:rPr lang="en-US" smtClean="0"/>
-              <a:t>Second level</a:t>
-            </a:r>
-          </a:p>
-          <a:p>
-            <a:pPr lvl="2"/>
-            <a:r>
-              <a:rPr lang="en-US" smtClean="0"/>
-              <a:t>Third level</a:t>
-            </a:r>
-          </a:p>
-          <a:p>
-            <a:pPr lvl="3"/>
-            <a:r>
-              <a:rPr lang="en-US" smtClean="0"/>
-              <a:t>Fourth level</a:t>
-            </a:r>
-          </a:p>
-          <a:p>
-            <a:pPr lvl="4"/>
-            <a:r>
-              <a:rPr lang="en-US" smtClean="0"/>
-              <a:t>Fifth level</a:t>
-            </a:r>
-            <a:endParaRPr lang="en-US"/>
+          <a:bodyPr vert="horz" lIns="91440" tIns="45720" rIns="91440" bIns="45720" rtlCol="0"/>
+          <a:lstStyle>
+            <a:lvl1pPr algn="r">
+              <a:defRPr sz="1200"/>
+            </a:lvl1pPr>
+          </a:lstStyle>
+          <a:p>
+            <a:fld id="{2DA8C9FF-7B67-46F1-84FE-2136F3F760EE}" type="datetimeFigureOut">
+              <a:rPr lang="fr-FR" smtClean="0"/>
+              <a:pPr/>
+              <a:t>10/10/2026</a:t>
+            </a:fld>
+            <a:endParaRPr lang="fr-FR"/>
           </a:p>
         </p:txBody>
       </p:sp>
       <p:sp>
         <p:nvSpPr>
-          <p:cNvPr id="4" name="Date Placeholder 3"/>
+          <p:cNvPr id="4" name="Espace réservé de l'image des diapositives 3"/>
+          <p:cNvSpPr>
+            <a:spLocks noGrp="1" noRot="1" noChangeAspect="1"/>
+          </p:cNvSpPr>
+          <p:nvPr>
+            <p:ph type="sldImg" idx="2"/>
+          </p:nvPr>
+        </p:nvSpPr>
+        <p:spPr>
+          <a:xfrm>
+            <a:off x="381000" y="685800"/>
+            <a:ext cx="6096000" cy="3429000"/>
+          </a:xfrm>
+          <a:prstGeom prst="rect">
+            <a:avLst/>
+          </a:prstGeom>
+          <a:noFill/>
+          <a:ln w="12700">
+            <a:solidFill>
+              <a:prstClr val="black"/>
+            </a:solidFill>
+          </a:ln>
+        </p:spPr>
+        <p:txBody>
+          <a:bodyPr vert="horz" lIns="91440" tIns="45720" rIns="91440" bIns="45720" rtlCol="0" anchor="ctr"/>
+          <a:lstStyle/>
+          <a:p>
+            <a:endParaRPr lang="fr-FR"/>
+          </a:p>
+        </p:txBody>
+      </p:sp>
+      <p:sp>
+        <p:nvSpPr>
+          <p:cNvPr id="5" name="Espace réservé des commentaires 4"/>
           <p:cNvSpPr>
             <a:spLocks noGrp="1"/>
           </p:cNvSpPr>
           <p:nvPr>
-            <p:ph type="dt" sz="half" idx="10"/>
+            <p:ph type="body" sz="quarter" idx="3"/>
           </p:nvPr>
         </p:nvSpPr>
-        <p:spPr/>
+        <p:spPr>
+          <a:xfrm>
+            <a:off x="685800" y="4343400"/>
+            <a:ext cx="5486400" cy="4114800"/>
+          </a:xfrm>
+          <a:prstGeom prst="rect">
+            <a:avLst/>
+          </a:prstGeom>
+        </p:spPr>
         <p:txBody>
-          <a:bodyPr/>
+          <a:bodyPr vert="horz" lIns="91440" tIns="45720" rIns="91440" bIns="45720" rtlCol="0">
+            <a:normAutofit/>
+          </a:bodyPr>
           <a:lstStyle/>
           <a:p>
-            <a:fld id="{5BCAD085-E8A6-8845-BD4E-CB4CCA059FC4}" type="datetimeFigureOut">
-              <a:rPr lang="en-US" smtClean="0"/>
-              <a:t>1/27/13</a:t>
-            </a:fld>
-            <a:endParaRPr lang="en-US"/>
+            <a:pPr lvl="0"/>
+            <a:r>
+              <a:rPr lang="fr-FR"/>
+              <a:t>Cliquez pour modifier les styles du texte du masque</a:t>
+            </a:r>
+          </a:p>
+          <a:p>
+            <a:pPr lvl="1"/>
+            <a:r>
+              <a:rPr lang="fr-FR"/>
+              <a:t>Deuxième niveau</a:t>
+            </a:r>
+          </a:p>
+          <a:p>
+            <a:pPr lvl="2"/>
+            <a:r>
+              <a:rPr lang="fr-FR"/>
+              <a:t>Troisième niveau</a:t>
+            </a:r>
+          </a:p>
+          <a:p>
+            <a:pPr lvl="3"/>
+            <a:r>
+              <a:rPr lang="fr-FR"/>
+              <a:t>Quatrième niveau</a:t>
+            </a:r>
+          </a:p>
+          <a:p>
+            <a:pPr lvl="4"/>
+            <a:r>
+              <a:rPr lang="fr-FR"/>
+              <a:t>Cinquième niveau</a:t>
+            </a:r>
           </a:p>
         </p:txBody>
       </p:sp>
       <p:sp>
         <p:nvSpPr>
-          <p:cNvPr id="5" name="Footer Placeholder 4"/>
+          <p:cNvPr id="6" name="Espace réservé du pied de page 5"/>
           <p:cNvSpPr>
             <a:spLocks noGrp="1"/>
           </p:cNvSpPr>
           <p:nvPr>
-            <p:ph type="ftr" sz="quarter" idx="11"/>
+            <p:ph type="ftr" sz="quarter" idx="4"/>
           </p:nvPr>
         </p:nvSpPr>
-        <p:spPr/>
+        <p:spPr>
+          <a:xfrm>
+            <a:off x="0" y="8685213"/>
+            <a:ext cx="2971800" cy="457200"/>
+          </a:xfrm>
+          <a:prstGeom prst="rect">
+            <a:avLst/>
+          </a:prstGeom>
+        </p:spPr>
         <p:txBody>
-          <a:bodyPr/>
-          <a:lstStyle/>
-          <a:p>
-            <a:endParaRPr lang="en-US"/>
+          <a:bodyPr vert="horz" lIns="91440" tIns="45720" rIns="91440" bIns="45720" rtlCol="0" anchor="b"/>
+          <a:lstStyle>
+            <a:lvl1pPr algn="l">
+              <a:defRPr sz="1200"/>
+            </a:lvl1pPr>
+          </a:lstStyle>
+          <a:p>
+            <a:endParaRPr lang="fr-FR"/>
           </a:p>
         </p:txBody>
       </p:sp>
       <p:sp>
         <p:nvSpPr>
-          <p:cNvPr id="6" name="Slide Number Placeholder 5"/>
+          <p:cNvPr id="7" name="Espace réservé du numéro de diapositive 6"/>
           <p:cNvSpPr>
             <a:spLocks noGrp="1"/>
           </p:cNvSpPr>
           <p:nvPr>
-            <p:ph type="sldNum" sz="quarter" idx="12"/>
+            <p:ph type="sldNum" sz="quarter" idx="5"/>
           </p:nvPr>
         </p:nvSpPr>
-        <p:spPr/>
+        <p:spPr>
+          <a:xfrm>
+            <a:off x="3884613" y="8685213"/>
+            <a:ext cx="2971800" cy="457200"/>
+          </a:xfrm>
+          <a:prstGeom prst="rect">
+            <a:avLst/>
+          </a:prstGeom>
+        </p:spPr>
         <p:txBody>
-          <a:bodyPr/>
-          <a:lstStyle/>
-          <a:p>
-            <a:fld id="{C1FF6DA9-008F-8B48-92A6-B652298478BF}" type="slidenum">
-              <a:rPr lang="en-US" smtClean="0"/>
-              <a:t>‹#›</a:t>
+          <a:bodyPr vert="horz" lIns="91440" tIns="45720" rIns="91440" bIns="45720" rtlCol="0" anchor="b"/>
+          <a:lstStyle>
+            <a:lvl1pPr algn="r">
+              <a:defRPr sz="1200"/>
+            </a:lvl1pPr>
+          </a:lstStyle>
+          <a:p>
+            <a:fld id="{D10C5788-2875-482B-AE9E-D3D19DF58495}" type="slidenum">
+              <a:rPr lang="fr-FR" smtClean="0"/>
+              <a:pPr/>
+              <a:t>‹N°›</a:t>
             </a:fld>
-            <a:endParaRPr lang="en-US"/>
+            <a:endParaRPr lang="fr-FR"/>
           </a:p>
         </p:txBody>
       </p:sp>
     </p:spTree>
     <p:extLst>
       <p:ext uri="{BB962C8B-B14F-4D97-AF65-F5344CB8AC3E}">
-        <p14:creationId xmlns:p14="http://schemas.microsoft.com/office/powerpoint/2010/main" val="2910927964"/>
+        <p14:creationId xmlns:p14="http://schemas.microsoft.com/office/powerpoint/2010/main" val="2029624233"/>
       </p:ext>
     </p:extLst>
   </p:cSld>
-  <p:clrMapOvr>
-    <a:masterClrMapping/>
-  </p:clrMapOvr>
-</p:sldLayout>
+  <p:clrMap bg1="lt1" tx1="dk1" bg2="lt2" tx2="dk2" accent1="accent1" accent2="accent2" accent3="accent3" accent4="accent4" accent5="accent5" accent6="accent6" hlink="hlink" folHlink="folHlink"/>
+  <p:hf hdr="0" ftr="0" dt="0"/>
+  <p:notesStyle>
+    <a:lvl1pPr marL="0" algn="l" defTabSz="914400" rtl="0" eaLnBrk="1" latinLnBrk="0" hangingPunct="1">
+      <a:defRPr sz="1200" kern="1200">
+        <a:solidFill>
+          <a:schemeClr val="tx1"/>
+        </a:solidFill>
+        <a:latin typeface="+mn-lt"/>
+        <a:ea typeface="+mn-ea"/>
+        <a:cs typeface="+mn-cs"/>
+      </a:defRPr>
+    </a:lvl1pPr>
+    <a:lvl2pPr marL="457200" algn="l" defTabSz="914400" rtl="0" eaLnBrk="1" latinLnBrk="0" hangingPunct="1">
+      <a:defRPr sz="1200" kern="1200">
+        <a:solidFill>
+          <a:schemeClr val="tx1"/>
+        </a:solidFill>
+        <a:latin typeface="+mn-lt"/>
+        <a:ea typeface="+mn-ea"/>
+        <a:cs typeface="+mn-cs"/>
+      </a:defRPr>
+    </a:lvl2pPr>
+    <a:lvl3pPr marL="914400" algn="l" defTabSz="914400" rtl="0" eaLnBrk="1" latinLnBrk="0" hangingPunct="1">
+      <a:defRPr sz="1200" kern="1200">
+        <a:solidFill>
+          <a:schemeClr val="tx1"/>
+        </a:solidFill>
+        <a:latin typeface="+mn-lt"/>
+        <a:ea typeface="+mn-ea"/>
+        <a:cs typeface="+mn-cs"/>
+      </a:defRPr>
+    </a:lvl3pPr>
+    <a:lvl4pPr marL="1371600" algn="l" defTabSz="914400" rtl="0" eaLnBrk="1" latinLnBrk="0" hangingPunct="1">
+      <a:defRPr sz="1200" kern="1200">
+        <a:solidFill>
+          <a:schemeClr val="tx1"/>
+        </a:solidFill>
+        <a:latin typeface="+mn-lt"/>
+        <a:ea typeface="+mn-ea"/>
+        <a:cs typeface="+mn-cs"/>
+      </a:defRPr>
+    </a:lvl4pPr>
+    <a:lvl5pPr marL="1828800" algn="l" defTabSz="914400" rtl="0" eaLnBrk="1" latinLnBrk="0" hangingPunct="1">
+      <a:defRPr sz="1200" kern="1200">
+        <a:solidFill>
+          <a:schemeClr val="tx1"/>
+        </a:solidFill>
+        <a:latin typeface="+mn-lt"/>
+        <a:ea typeface="+mn-ea"/>
+        <a:cs typeface="+mn-cs"/>
+      </a:defRPr>
+    </a:lvl5pPr>
+    <a:lvl6pPr marL="2286000" algn="l" defTabSz="914400" rtl="0" eaLnBrk="1" latinLnBrk="0" hangingPunct="1">
+      <a:defRPr sz="1200" kern="1200">
+        <a:solidFill>
+          <a:schemeClr val="tx1"/>
+        </a:solidFill>
+        <a:latin typeface="+mn-lt"/>
+        <a:ea typeface="+mn-ea"/>
+        <a:cs typeface="+mn-cs"/>
+      </a:defRPr>
+    </a:lvl6pPr>
+    <a:lvl7pPr marL="2743200" algn="l" defTabSz="914400" rtl="0" eaLnBrk="1" latinLnBrk="0" hangingPunct="1">
+      <a:defRPr sz="1200" kern="1200">
+        <a:solidFill>
+          <a:schemeClr val="tx1"/>
+        </a:solidFill>
+        <a:latin typeface="+mn-lt"/>
+        <a:ea typeface="+mn-ea"/>
+        <a:cs typeface="+mn-cs"/>
+      </a:defRPr>
+    </a:lvl7pPr>
+    <a:lvl8pPr marL="3200400" algn="l" defTabSz="914400" rtl="0" eaLnBrk="1" latinLnBrk="0" hangingPunct="1">
+      <a:defRPr sz="1200" kern="1200">
+        <a:solidFill>
+          <a:schemeClr val="tx1"/>
+        </a:solidFill>
+        <a:latin typeface="+mn-lt"/>
+        <a:ea typeface="+mn-ea"/>
+        <a:cs typeface="+mn-cs"/>
+      </a:defRPr>
+    </a:lvl8pPr>
+    <a:lvl9pPr marL="3657600" algn="l" defTabSz="914400" rtl="0" eaLnBrk="1" latinLnBrk="0" hangingPunct="1">
+      <a:defRPr sz="1200" kern="1200">
+        <a:solidFill>
+          <a:schemeClr val="tx1"/>
+        </a:solidFill>
+        <a:latin typeface="+mn-lt"/>
+        <a:ea typeface="+mn-ea"/>
+        <a:cs typeface="+mn-cs"/>
+      </a:defRPr>
+    </a:lvl9pPr>
+  </p:notesStyle>
+</p:notesMaster>
 </file>
 
-<file path=ppt/slideLayouts/slideLayout11.xml><?xml version="1.0" encoding="utf-8"?>
-<p:sldLayout xmlns:a="http://schemas.openxmlformats.org/drawingml/2006/main" xmlns:r="http://schemas.openxmlformats.org/officeDocument/2006/relationships" xmlns:p="http://schemas.openxmlformats.org/presentationml/2006/main" type="vertTitleAndTx" preserve="1">
-  <p:cSld name="Vertical Title and Text">
+<file path=ppt/notesSlides/notesSlide1.xml><?xml version="1.0" encoding="utf-8"?>
+<p:notes xmlns:a="http://schemas.openxmlformats.org/drawingml/2006/main" xmlns:r="http://schemas.openxmlformats.org/officeDocument/2006/relationships" xmlns:p="http://schemas.openxmlformats.org/presentationml/2006/main">
+  <p:cSld>
     <p:spTree>
       <p:nvGrpSpPr>
         <p:cNvPr id="1" name=""/>
@@ -536,170 +685,245 @@
       </p:grpSpPr>
       <p:sp>
         <p:nvSpPr>
-          <p:cNvPr id="2" name="Vertical Title 1"/>
+          <p:cNvPr id="16385" name="Espace réservé du numéro de diapositive 6"/>
           <p:cNvSpPr>
             <a:spLocks noGrp="1"/>
           </p:cNvSpPr>
           <p:nvPr>
-            <p:ph type="title" orient="vert"/>
+            <p:ph type="sldNum" sz="quarter" idx="5"/>
           </p:nvPr>
         </p:nvSpPr>
-        <p:spPr>
-          <a:xfrm>
-            <a:off x="8838978" y="274638"/>
-            <a:ext cx="2743131" cy="5851525"/>
-          </a:xfrm>
+        <p:spPr bwMode="auto">
+          <a:noFill/>
+          <a:extLst>
+            <a:ext uri="{909E8E84-426E-40DD-AFC4-6F175D3DCCD1}">
+              <a14:hiddenFill xmlns:a14="http://schemas.microsoft.com/office/drawing/2010/main">
+                <a:solidFill>
+                  <a:srgbClr val="FFFFFF"/>
+                </a:solidFill>
+              </a14:hiddenFill>
+            </a:ext>
+            <a:ext uri="{91240B29-F687-4F45-9708-019B960494DF}">
+              <a14:hiddenLine xmlns:a14="http://schemas.microsoft.com/office/drawing/2010/main" w="9525">
+                <a:solidFill>
+                  <a:srgbClr val="000000"/>
+                </a:solidFill>
+                <a:miter lim="800000"/>
+                <a:headEnd/>
+                <a:tailEnd/>
+              </a14:hiddenLine>
+            </a:ext>
+          </a:extLst>
         </p:spPr>
         <p:txBody>
-          <a:bodyPr vert="eaVert"/>
-          <a:lstStyle/>
-          <a:p>
-            <a:r>
-              <a:rPr lang="en-US" smtClean="0"/>
-              <a:t>Click to edit Master title style</a:t>
-            </a:r>
-            <a:endParaRPr lang="en-US"/>
+          <a:bodyPr wrap="square" numCol="1" anchorCtr="0" compatLnSpc="1">
+            <a:prstTxWarp prst="textNoShape">
+              <a:avLst/>
+            </a:prstTxWarp>
+          </a:bodyPr>
+          <a:lstStyle>
+            <a:lvl1pPr>
+              <a:defRPr i="1">
+                <a:solidFill>
+                  <a:schemeClr val="tx1"/>
+                </a:solidFill>
+                <a:latin typeface="Arial" charset="0"/>
+              </a:defRPr>
+            </a:lvl1pPr>
+            <a:lvl2pPr marL="742950" indent="-285750">
+              <a:defRPr i="1">
+                <a:solidFill>
+                  <a:schemeClr val="tx1"/>
+                </a:solidFill>
+                <a:latin typeface="Arial" charset="0"/>
+              </a:defRPr>
+            </a:lvl2pPr>
+            <a:lvl3pPr marL="1143000" indent="-228600">
+              <a:defRPr i="1">
+                <a:solidFill>
+                  <a:schemeClr val="tx1"/>
+                </a:solidFill>
+                <a:latin typeface="Arial" charset="0"/>
+              </a:defRPr>
+            </a:lvl3pPr>
+            <a:lvl4pPr marL="1600200" indent="-228600">
+              <a:defRPr i="1">
+                <a:solidFill>
+                  <a:schemeClr val="tx1"/>
+                </a:solidFill>
+                <a:latin typeface="Arial" charset="0"/>
+              </a:defRPr>
+            </a:lvl4pPr>
+            <a:lvl5pPr marL="2057400" indent="-228600">
+              <a:defRPr i="1">
+                <a:solidFill>
+                  <a:schemeClr val="tx1"/>
+                </a:solidFill>
+                <a:latin typeface="Arial" charset="0"/>
+              </a:defRPr>
+            </a:lvl5pPr>
+            <a:lvl6pPr marL="2514600" indent="-228600" fontAlgn="base">
+              <a:spcBef>
+                <a:spcPct val="0"/>
+              </a:spcBef>
+              <a:spcAft>
+                <a:spcPct val="0"/>
+              </a:spcAft>
+              <a:defRPr i="1">
+                <a:solidFill>
+                  <a:schemeClr val="tx1"/>
+                </a:solidFill>
+                <a:latin typeface="Arial" charset="0"/>
+              </a:defRPr>
+            </a:lvl6pPr>
+            <a:lvl7pPr marL="2971800" indent="-228600" fontAlgn="base">
+              <a:spcBef>
+                <a:spcPct val="0"/>
+              </a:spcBef>
+              <a:spcAft>
+                <a:spcPct val="0"/>
+              </a:spcAft>
+              <a:defRPr i="1">
+                <a:solidFill>
+                  <a:schemeClr val="tx1"/>
+                </a:solidFill>
+                <a:latin typeface="Arial" charset="0"/>
+              </a:defRPr>
+            </a:lvl7pPr>
+            <a:lvl8pPr marL="3429000" indent="-228600" fontAlgn="base">
+              <a:spcBef>
+                <a:spcPct val="0"/>
+              </a:spcBef>
+              <a:spcAft>
+                <a:spcPct val="0"/>
+              </a:spcAft>
+              <a:defRPr i="1">
+                <a:solidFill>
+                  <a:schemeClr val="tx1"/>
+                </a:solidFill>
+                <a:latin typeface="Arial" charset="0"/>
+              </a:defRPr>
+            </a:lvl8pPr>
+            <a:lvl9pPr marL="3886200" indent="-228600" fontAlgn="base">
+              <a:spcBef>
+                <a:spcPct val="0"/>
+              </a:spcBef>
+              <a:spcAft>
+                <a:spcPct val="0"/>
+              </a:spcAft>
+              <a:defRPr i="1">
+                <a:solidFill>
+                  <a:schemeClr val="tx1"/>
+                </a:solidFill>
+                <a:latin typeface="Arial" charset="0"/>
+              </a:defRPr>
+            </a:lvl9pPr>
+          </a:lstStyle>
+          <a:p>
+            <a:fld id="{995476F7-E4E8-4764-8C2B-53C2800475FF}" type="slidenum">
+              <a:rPr lang="fr-FR" i="0" smtClean="0"/>
+              <a:pPr/>
+              <a:t>1</a:t>
+            </a:fld>
+            <a:endParaRPr lang="fr-FR" i="0" dirty="0"/>
           </a:p>
         </p:txBody>
       </p:sp>
       <p:sp>
         <p:nvSpPr>
-          <p:cNvPr id="3" name="Vertical Text Placeholder 2"/>
+          <p:cNvPr id="16386" name="Rectangle 2"/>
+          <p:cNvSpPr>
+            <a:spLocks noGrp="1" noRot="1" noChangeAspect="1" noTextEdit="1"/>
+          </p:cNvSpPr>
+          <p:nvPr>
+            <p:ph type="sldImg"/>
+          </p:nvPr>
+        </p:nvSpPr>
+        <p:spPr bwMode="auto">
+          <a:xfrm>
+            <a:off x="87313" y="744538"/>
+            <a:ext cx="6619875" cy="3724275"/>
+          </a:xfrm>
+          <a:noFill/>
+          <a:ln>
+            <a:solidFill>
+              <a:srgbClr val="000000"/>
+            </a:solidFill>
+            <a:miter lim="800000"/>
+            <a:headEnd/>
+            <a:tailEnd/>
+          </a:ln>
+          <a:extLst>
+            <a:ext uri="{909E8E84-426E-40DD-AFC4-6F175D3DCCD1}">
+              <a14:hiddenFill xmlns:a14="http://schemas.microsoft.com/office/drawing/2010/main">
+                <a:solidFill>
+                  <a:srgbClr val="FFFFFF"/>
+                </a:solidFill>
+              </a14:hiddenFill>
+            </a:ext>
+          </a:extLst>
+        </p:spPr>
+      </p:sp>
+      <p:sp>
+        <p:nvSpPr>
+          <p:cNvPr id="16387" name="Rectangle 3"/>
           <p:cNvSpPr>
             <a:spLocks noGrp="1"/>
           </p:cNvSpPr>
           <p:nvPr>
-            <p:ph type="body" orient="vert" idx="1"/>
+            <p:ph type="body" idx="1"/>
           </p:nvPr>
         </p:nvSpPr>
-        <p:spPr>
-          <a:xfrm>
-            <a:off x="609584" y="274638"/>
-            <a:ext cx="8026199" cy="5851525"/>
-          </a:xfrm>
+        <p:spPr bwMode="auto">
+          <a:noFill/>
+          <a:extLst>
+            <a:ext uri="{909E8E84-426E-40DD-AFC4-6F175D3DCCD1}">
+              <a14:hiddenFill xmlns:a14="http://schemas.microsoft.com/office/drawing/2010/main">
+                <a:solidFill>
+                  <a:srgbClr val="FFFFFF"/>
+                </a:solidFill>
+              </a14:hiddenFill>
+            </a:ext>
+            <a:ext uri="{91240B29-F687-4F45-9708-019B960494DF}">
+              <a14:hiddenLine xmlns:a14="http://schemas.microsoft.com/office/drawing/2010/main" w="9525">
+                <a:solidFill>
+                  <a:srgbClr val="000000"/>
+                </a:solidFill>
+                <a:miter lim="800000"/>
+                <a:headEnd/>
+                <a:tailEnd/>
+              </a14:hiddenLine>
+            </a:ext>
+          </a:extLst>
         </p:spPr>
         <p:txBody>
-          <a:bodyPr vert="eaVert"/>
+          <a:bodyPr wrap="square" numCol="1" anchor="t" anchorCtr="0" compatLnSpc="1">
+            <a:prstTxWarp prst="textNoShape">
+              <a:avLst/>
+            </a:prstTxWarp>
+          </a:bodyPr>
           <a:lstStyle/>
           <a:p>
-            <a:pPr lvl="0"/>
-            <a:r>
-              <a:rPr lang="en-US" smtClean="0"/>
-              <a:t>Click to edit Master text styles</a:t>
-            </a:r>
-          </a:p>
-          <a:p>
-            <a:pPr lvl="1"/>
-            <a:r>
-              <a:rPr lang="en-US" smtClean="0"/>
-              <a:t>Second level</a:t>
-            </a:r>
-          </a:p>
-          <a:p>
-            <a:pPr lvl="2"/>
-            <a:r>
-              <a:rPr lang="en-US" smtClean="0"/>
-              <a:t>Third level</a:t>
-            </a:r>
-          </a:p>
-          <a:p>
-            <a:pPr lvl="3"/>
-            <a:r>
-              <a:rPr lang="en-US" smtClean="0"/>
-              <a:t>Fourth level</a:t>
-            </a:r>
-          </a:p>
-          <a:p>
-            <a:pPr lvl="4"/>
-            <a:r>
-              <a:rPr lang="en-US" smtClean="0"/>
-              <a:t>Fifth level</a:t>
-            </a:r>
-            <a:endParaRPr lang="en-US"/>
-          </a:p>
-        </p:txBody>
-      </p:sp>
-      <p:sp>
-        <p:nvSpPr>
-          <p:cNvPr id="4" name="Date Placeholder 3"/>
-          <p:cNvSpPr>
-            <a:spLocks noGrp="1"/>
-          </p:cNvSpPr>
-          <p:nvPr>
-            <p:ph type="dt" sz="half" idx="10"/>
-          </p:nvPr>
-        </p:nvSpPr>
-        <p:spPr/>
-        <p:txBody>
-          <a:bodyPr/>
-          <a:lstStyle/>
-          <a:p>
-            <a:fld id="{5BCAD085-E8A6-8845-BD4E-CB4CCA059FC4}" type="datetimeFigureOut">
-              <a:rPr lang="en-US" smtClean="0"/>
-              <a:t>1/27/13</a:t>
-            </a:fld>
-            <a:endParaRPr lang="en-US"/>
-          </a:p>
-        </p:txBody>
-      </p:sp>
-      <p:sp>
-        <p:nvSpPr>
-          <p:cNvPr id="5" name="Footer Placeholder 4"/>
-          <p:cNvSpPr>
-            <a:spLocks noGrp="1"/>
-          </p:cNvSpPr>
-          <p:nvPr>
-            <p:ph type="ftr" sz="quarter" idx="11"/>
-          </p:nvPr>
-        </p:nvSpPr>
-        <p:spPr/>
-        <p:txBody>
-          <a:bodyPr/>
-          <a:lstStyle/>
-          <a:p>
-            <a:endParaRPr lang="en-US"/>
-          </a:p>
-        </p:txBody>
-      </p:sp>
-      <p:sp>
-        <p:nvSpPr>
-          <p:cNvPr id="6" name="Slide Number Placeholder 5"/>
-          <p:cNvSpPr>
-            <a:spLocks noGrp="1"/>
-          </p:cNvSpPr>
-          <p:nvPr>
-            <p:ph type="sldNum" sz="quarter" idx="12"/>
-          </p:nvPr>
-        </p:nvSpPr>
-        <p:spPr/>
-        <p:txBody>
-          <a:bodyPr/>
-          <a:lstStyle/>
-          <a:p>
-            <a:fld id="{C1FF6DA9-008F-8B48-92A6-B652298478BF}" type="slidenum">
-              <a:rPr lang="en-US" smtClean="0"/>
-              <a:t>‹#›</a:t>
-            </a:fld>
-            <a:endParaRPr lang="en-US"/>
+            <a:endParaRPr lang="fr-FR" dirty="0"/>
           </a:p>
         </p:txBody>
       </p:sp>
     </p:spTree>
     <p:extLst>
       <p:ext uri="{BB962C8B-B14F-4D97-AF65-F5344CB8AC3E}">
-        <p14:creationId xmlns:p14="http://schemas.microsoft.com/office/powerpoint/2010/main" val="3612223792"/>
+        <p14:creationId xmlns:p14="http://schemas.microsoft.com/office/powerpoint/2010/main" val="4286536377"/>
       </p:ext>
     </p:extLst>
   </p:cSld>
   <p:clrMapOvr>
     <a:masterClrMapping/>
   </p:clrMapOvr>
-</p:sldLayout>
+</p:notes>
 </file>
 
-<file path=ppt/slideLayouts/slideLayout2.xml><?xml version="1.0" encoding="utf-8"?>
-<p:sldLayout xmlns:a="http://schemas.openxmlformats.org/drawingml/2006/main" xmlns:r="http://schemas.openxmlformats.org/officeDocument/2006/relationships" xmlns:p="http://schemas.openxmlformats.org/presentationml/2006/main" type="obj" preserve="1">
-  <p:cSld name="Title and Content">
+<file path=ppt/slideLayouts/slideLayout1.xml><?xml version="1.0" encoding="utf-8"?>
+<p:sldLayout xmlns:a="http://schemas.openxmlformats.org/drawingml/2006/main" xmlns:r="http://schemas.openxmlformats.org/officeDocument/2006/relationships" xmlns:p="http://schemas.openxmlformats.org/presentationml/2006/main" showMasterSp="0" preserve="1" userDrawn="1">
+  <p:cSld name="Diapositive de titre">
     <p:spTree>
       <p:nvGrpSpPr>
         <p:cNvPr id="1" name=""/>
@@ -716,7 +940,49 @@
       </p:grpSpPr>
       <p:sp>
         <p:nvSpPr>
-          <p:cNvPr id="2" name="Title 1"/>
+          <p:cNvPr id="3" name="ZoneTexte 2"/>
+          <p:cNvSpPr txBox="1"/>
+          <p:nvPr userDrawn="1"/>
+        </p:nvSpPr>
+        <p:spPr>
+          <a:xfrm>
+            <a:off x="1678518" y="3735389"/>
+            <a:ext cx="8544983" cy="708025"/>
+          </a:xfrm>
+          <a:prstGeom prst="rect">
+            <a:avLst/>
+          </a:prstGeom>
+          <a:solidFill>
+            <a:schemeClr val="bg1"/>
+          </a:solidFill>
+        </p:spPr>
+        <p:txBody>
+          <a:bodyPr>
+            <a:spAutoFit/>
+          </a:bodyPr>
+          <a:lstStyle/>
+          <a:p>
+            <a:pPr algn="ctr">
+              <a:defRPr/>
+            </a:pPr>
+            <a:endParaRPr lang="fr-FR" sz="4000" b="1" i="0" dirty="0">
+              <a:solidFill>
+                <a:schemeClr val="bg1"/>
+              </a:solidFill>
+              <a:effectLst>
+                <a:outerShdw blurRad="38100" dist="38100" dir="2700000" algn="tl">
+                  <a:srgbClr val="000000">
+                    <a:alpha val="43137"/>
+                  </a:srgbClr>
+                </a:outerShdw>
+              </a:effectLst>
+            </a:endParaRPr>
+          </a:p>
+        </p:txBody>
+      </p:sp>
+      <p:sp>
+        <p:nvSpPr>
+          <p:cNvPr id="5" name="Titre 4"/>
           <p:cNvSpPr>
             <a:spLocks noGrp="1"/>
           </p:cNvSpPr>
@@ -730,134 +996,55 @@
           <a:lstStyle/>
           <a:p>
             <a:r>
-              <a:rPr lang="en-US" smtClean="0"/>
-              <a:t>Click to edit Master title style</a:t>
-            </a:r>
-            <a:endParaRPr lang="en-US"/>
+              <a:rPr lang="fr-FR"/>
+              <a:t>Modifiez le style du titre</a:t>
+            </a:r>
           </a:p>
         </p:txBody>
       </p:sp>
       <p:sp>
         <p:nvSpPr>
-          <p:cNvPr id="3" name="Content Placeholder 2"/>
+          <p:cNvPr id="4" name="Espace réservé du numéro de diapositive 2"/>
           <p:cNvSpPr>
             <a:spLocks noGrp="1"/>
           </p:cNvSpPr>
           <p:nvPr>
-            <p:ph idx="1"/>
+            <p:ph type="sldNum" sz="quarter" idx="10"/>
           </p:nvPr>
         </p:nvSpPr>
         <p:spPr/>
         <p:txBody>
           <a:bodyPr/>
-          <a:lstStyle/>
-          <a:p>
-            <a:pPr lvl="0"/>
-            <a:r>
-              <a:rPr lang="en-US" smtClean="0"/>
-              <a:t>Click to edit Master text styles</a:t>
-            </a:r>
-          </a:p>
-          <a:p>
-            <a:pPr lvl="1"/>
-            <a:r>
-              <a:rPr lang="en-US" smtClean="0"/>
-              <a:t>Second level</a:t>
-            </a:r>
-          </a:p>
-          <a:p>
-            <a:pPr lvl="2"/>
-            <a:r>
-              <a:rPr lang="en-US" smtClean="0"/>
-              <a:t>Third level</a:t>
-            </a:r>
-          </a:p>
-          <a:p>
-            <a:pPr lvl="3"/>
-            <a:r>
-              <a:rPr lang="en-US" smtClean="0"/>
-              <a:t>Fourth level</a:t>
-            </a:r>
-          </a:p>
-          <a:p>
-            <a:pPr lvl="4"/>
-            <a:r>
-              <a:rPr lang="en-US" smtClean="0"/>
-              <a:t>Fifth level</a:t>
-            </a:r>
-            <a:endParaRPr lang="en-US"/>
-          </a:p>
-        </p:txBody>
-      </p:sp>
-      <p:sp>
-        <p:nvSpPr>
-          <p:cNvPr id="4" name="Date Placeholder 3"/>
-          <p:cNvSpPr>
-            <a:spLocks noGrp="1"/>
-          </p:cNvSpPr>
-          <p:nvPr>
-            <p:ph type="dt" sz="half" idx="10"/>
-          </p:nvPr>
-        </p:nvSpPr>
-        <p:spPr/>
-        <p:txBody>
-          <a:bodyPr/>
-          <a:lstStyle/>
-          <a:p>
-            <a:fld id="{5BCAD085-E8A6-8845-BD4E-CB4CCA059FC4}" type="datetimeFigureOut">
-              <a:rPr lang="en-US" smtClean="0"/>
-              <a:t>1/27/13</a:t>
+          <a:lstStyle>
+            <a:lvl1pPr algn="r">
+              <a:defRPr sz="1200">
+                <a:solidFill>
+                  <a:schemeClr val="tx1">
+                    <a:tint val="75000"/>
+                  </a:schemeClr>
+                </a:solidFill>
+              </a:defRPr>
+            </a:lvl1pPr>
+          </a:lstStyle>
+          <a:p>
+            <a:pPr>
+              <a:defRPr/>
+            </a:pPr>
+            <a:fld id="{2546752C-645B-436C-A53C-1E62435E2FD0}" type="slidenum">
+              <a:rPr lang="fr-FR"/>
+              <a:pPr>
+                <a:defRPr/>
+              </a:pPr>
+              <a:t>‹N°›</a:t>
             </a:fld>
-            <a:endParaRPr lang="en-US"/>
-          </a:p>
-        </p:txBody>
-      </p:sp>
-      <p:sp>
-        <p:nvSpPr>
-          <p:cNvPr id="5" name="Footer Placeholder 4"/>
-          <p:cNvSpPr>
-            <a:spLocks noGrp="1"/>
-          </p:cNvSpPr>
-          <p:nvPr>
-            <p:ph type="ftr" sz="quarter" idx="11"/>
-          </p:nvPr>
-        </p:nvSpPr>
-        <p:spPr/>
-        <p:txBody>
-          <a:bodyPr/>
-          <a:lstStyle/>
-          <a:p>
-            <a:endParaRPr lang="en-US"/>
-          </a:p>
-        </p:txBody>
-      </p:sp>
-      <p:sp>
-        <p:nvSpPr>
-          <p:cNvPr id="6" name="Slide Number Placeholder 5"/>
-          <p:cNvSpPr>
-            <a:spLocks noGrp="1"/>
-          </p:cNvSpPr>
-          <p:nvPr>
-            <p:ph type="sldNum" sz="quarter" idx="12"/>
-          </p:nvPr>
-        </p:nvSpPr>
-        <p:spPr/>
-        <p:txBody>
-          <a:bodyPr/>
-          <a:lstStyle/>
-          <a:p>
-            <a:fld id="{C1FF6DA9-008F-8B48-92A6-B652298478BF}" type="slidenum">
-              <a:rPr lang="en-US" smtClean="0"/>
-              <a:t>‹#›</a:t>
-            </a:fld>
-            <a:endParaRPr lang="en-US"/>
+            <a:endParaRPr lang="fr-FR" dirty="0"/>
           </a:p>
         </p:txBody>
       </p:sp>
     </p:spTree>
     <p:extLst>
       <p:ext uri="{BB962C8B-B14F-4D97-AF65-F5344CB8AC3E}">
-        <p14:creationId xmlns:p14="http://schemas.microsoft.com/office/powerpoint/2010/main" val="2614314258"/>
+        <p14:creationId xmlns:p14="http://schemas.microsoft.com/office/powerpoint/2010/main" val="4160884766"/>
       </p:ext>
     </p:extLst>
   </p:cSld>
@@ -867,9 +1054,9 @@
 </p:sldLayout>
 </file>
 
-<file path=ppt/slideLayouts/slideLayout3.xml><?xml version="1.0" encoding="utf-8"?>
-<p:sldLayout xmlns:a="http://schemas.openxmlformats.org/drawingml/2006/main" xmlns:r="http://schemas.openxmlformats.org/officeDocument/2006/relationships" xmlns:p="http://schemas.openxmlformats.org/presentationml/2006/main" type="secHead" preserve="1">
-  <p:cSld name="Section Header">
+<file path=ppt/slideLayouts/slideLayout10.xml><?xml version="1.0" encoding="utf-8"?>
+<p:sldLayout xmlns:a="http://schemas.openxmlformats.org/drawingml/2006/main" xmlns:r="http://schemas.openxmlformats.org/officeDocument/2006/relationships" xmlns:p="http://schemas.openxmlformats.org/presentationml/2006/main" type="obj" preserve="1">
+  <p:cSld name="1_Titre et contenu">
     <p:spTree>
       <p:nvGrpSpPr>
         <p:cNvPr id="1" name=""/>
@@ -886,7 +1073,7 @@
       </p:grpSpPr>
       <p:sp>
         <p:nvSpPr>
-          <p:cNvPr id="2" name="Title 1"/>
+          <p:cNvPr id="2" name="Titre 1"/>
           <p:cNvSpPr>
             <a:spLocks noGrp="1"/>
           </p:cNvSpPr>
@@ -896,48 +1083,93 @@
         </p:nvSpPr>
         <p:spPr>
           <a:xfrm>
-            <a:off x="963059" y="4406900"/>
-            <a:ext cx="10362940" cy="1362075"/>
+            <a:off x="912284" y="115888"/>
+            <a:ext cx="10752667" cy="1143000"/>
           </a:xfrm>
         </p:spPr>
         <p:txBody>
-          <a:bodyPr anchor="t"/>
-          <a:lstStyle>
-            <a:lvl1pPr algn="l">
-              <a:defRPr sz="4000" b="1" cap="all"/>
-            </a:lvl1pPr>
-          </a:lstStyle>
-          <a:p>
-            <a:r>
-              <a:rPr lang="en-US" smtClean="0"/>
-              <a:t>Click to edit Master title style</a:t>
-            </a:r>
-            <a:endParaRPr lang="en-US"/>
+          <a:bodyPr/>
+          <a:lstStyle/>
+          <a:p>
+            <a:r>
+              <a:rPr lang="fr-FR"/>
+              <a:t>Modifiez le style du titre</a:t>
+            </a:r>
           </a:p>
         </p:txBody>
       </p:sp>
       <p:sp>
         <p:nvSpPr>
-          <p:cNvPr id="3" name="Text Placeholder 2"/>
+          <p:cNvPr id="3" name="Espace réservé du contenu 2"/>
           <p:cNvSpPr>
             <a:spLocks noGrp="1"/>
           </p:cNvSpPr>
           <p:nvPr>
-            <p:ph type="body" idx="1"/>
+            <p:ph idx="1"/>
           </p:nvPr>
         </p:nvSpPr>
         <p:spPr>
           <a:xfrm>
-            <a:off x="963059" y="2906713"/>
-            <a:ext cx="10362940" cy="1500187"/>
+            <a:off x="431800" y="1600201"/>
+            <a:ext cx="11150600" cy="4525963"/>
           </a:xfrm>
         </p:spPr>
         <p:txBody>
-          <a:bodyPr anchor="b"/>
+          <a:bodyPr/>
+          <a:lstStyle/>
+          <a:p>
+            <a:pPr lvl="0"/>
+            <a:r>
+              <a:rPr lang="fr-FR"/>
+              <a:t>Modifiez les styles du texte du masque</a:t>
+            </a:r>
+          </a:p>
+          <a:p>
+            <a:pPr lvl="1"/>
+            <a:r>
+              <a:rPr lang="fr-FR"/>
+              <a:t>Deuxième niveau</a:t>
+            </a:r>
+          </a:p>
+          <a:p>
+            <a:pPr lvl="2"/>
+            <a:r>
+              <a:rPr lang="fr-FR"/>
+              <a:t>Troisième niveau</a:t>
+            </a:r>
+          </a:p>
+          <a:p>
+            <a:pPr lvl="3"/>
+            <a:r>
+              <a:rPr lang="fr-FR"/>
+              <a:t>Quatrième niveau</a:t>
+            </a:r>
+          </a:p>
+          <a:p>
+            <a:pPr lvl="4"/>
+            <a:r>
+              <a:rPr lang="fr-FR"/>
+              <a:t>Cinquième niveau</a:t>
+            </a:r>
+          </a:p>
+        </p:txBody>
+      </p:sp>
+      <p:sp>
+        <p:nvSpPr>
+          <p:cNvPr id="4" name="Espace réservé du numéro de diapositive 2"/>
+          <p:cNvSpPr>
+            <a:spLocks noGrp="1"/>
+          </p:cNvSpPr>
+          <p:nvPr>
+            <p:ph type="sldNum" sz="quarter" idx="10"/>
+          </p:nvPr>
+        </p:nvSpPr>
+        <p:spPr/>
+        <p:txBody>
+          <a:bodyPr/>
           <a:lstStyle>
-            <a:lvl1pPr marL="0" indent="0">
-              <a:buNone/>
-              <a:defRPr sz="2000">
+            <a:lvl1pPr algn="r">
+              <a:defRPr sz="1200">
                 <a:solidFill>
                   <a:schemeClr val="tx1">
                     <a:tint val="75000"/>
@@ -945,165 +1177,26 @@
                 </a:solidFill>
               </a:defRPr>
             </a:lvl1pPr>
-            <a:lvl2pPr marL="457200" indent="0">
-              <a:buNone/>
-              <a:defRPr sz="1800">
-                <a:solidFill>
-                  <a:schemeClr val="tx1">
-                    <a:tint val="75000"/>
-                  </a:schemeClr>
-                </a:solidFill>
-              </a:defRPr>
-            </a:lvl2pPr>
-            <a:lvl3pPr marL="914400" indent="0">
-              <a:buNone/>
-              <a:defRPr sz="1600">
-                <a:solidFill>
-                  <a:schemeClr val="tx1">
-                    <a:tint val="75000"/>
-                  </a:schemeClr>
-                </a:solidFill>
-              </a:defRPr>
-            </a:lvl3pPr>
-            <a:lvl4pPr marL="1371600" indent="0">
-              <a:buNone/>
-              <a:defRPr sz="1400">
-                <a:solidFill>
-                  <a:schemeClr val="tx1">
-                    <a:tint val="75000"/>
-                  </a:schemeClr>
-                </a:solidFill>
-              </a:defRPr>
-            </a:lvl4pPr>
-            <a:lvl5pPr marL="1828800" indent="0">
-              <a:buNone/>
-              <a:defRPr sz="1400">
-                <a:solidFill>
-                  <a:schemeClr val="tx1">
-                    <a:tint val="75000"/>
-                  </a:schemeClr>
-                </a:solidFill>
-              </a:defRPr>
-            </a:lvl5pPr>
-            <a:lvl6pPr marL="2286000" indent="0">
-              <a:buNone/>
-              <a:defRPr sz="1400">
-                <a:solidFill>
-                  <a:schemeClr val="tx1">
-                    <a:tint val="75000"/>
-                  </a:schemeClr>
-                </a:solidFill>
-              </a:defRPr>
-            </a:lvl6pPr>
-            <a:lvl7pPr marL="2743200" indent="0">
-              <a:buNone/>
-              <a:defRPr sz="1400">
-                <a:solidFill>
-                  <a:schemeClr val="tx1">
-                    <a:tint val="75000"/>
-                  </a:schemeClr>
-                </a:solidFill>
-              </a:defRPr>
-            </a:lvl7pPr>
-            <a:lvl8pPr marL="3200400" indent="0">
-              <a:buNone/>
-              <a:defRPr sz="1400">
-                <a:solidFill>
-                  <a:schemeClr val="tx1">
-                    <a:tint val="75000"/>
-                  </a:schemeClr>
-                </a:solidFill>
-              </a:defRPr>
-            </a:lvl8pPr>
-            <a:lvl9pPr marL="3657600" indent="0">
-              <a:buNone/>
-              <a:defRPr sz="1400">
-                <a:solidFill>
-                  <a:schemeClr val="tx1">
-                    <a:tint val="75000"/>
-                  </a:schemeClr>
-                </a:solidFill>
-              </a:defRPr>
-            </a:lvl9pPr>
           </a:lstStyle>
           <a:p>
-            <a:pPr lvl="0"/>
-            <a:r>
-              <a:rPr lang="en-US" smtClean="0"/>
-              <a:t>Click to edit Master text styles</a:t>
-            </a:r>
-          </a:p>
-        </p:txBody>
-      </p:sp>
-      <p:sp>
-        <p:nvSpPr>
-          <p:cNvPr id="4" name="Date Placeholder 3"/>
-          <p:cNvSpPr>
-            <a:spLocks noGrp="1"/>
-          </p:cNvSpPr>
-          <p:nvPr>
-            <p:ph type="dt" sz="half" idx="10"/>
-          </p:nvPr>
-        </p:nvSpPr>
-        <p:spPr/>
-        <p:txBody>
-          <a:bodyPr/>
-          <a:lstStyle/>
-          <a:p>
-            <a:fld id="{5BCAD085-E8A6-8845-BD4E-CB4CCA059FC4}" type="datetimeFigureOut">
-              <a:rPr lang="en-US" smtClean="0"/>
-              <a:t>1/27/13</a:t>
+            <a:pPr>
+              <a:defRPr/>
+            </a:pPr>
+            <a:fld id="{7D45ACDA-E3C0-49CA-87E3-432B2DE71273}" type="slidenum">
+              <a:rPr lang="fr-FR"/>
+              <a:pPr>
+                <a:defRPr/>
+              </a:pPr>
+              <a:t>‹N°›</a:t>
             </a:fld>
-            <a:endParaRPr lang="en-US"/>
-          </a:p>
-        </p:txBody>
-      </p:sp>
-      <p:sp>
-        <p:nvSpPr>
-          <p:cNvPr id="5" name="Footer Placeholder 4"/>
-          <p:cNvSpPr>
-            <a:spLocks noGrp="1"/>
-          </p:cNvSpPr>
-          <p:nvPr>
-            <p:ph type="ftr" sz="quarter" idx="11"/>
-          </p:nvPr>
-        </p:nvSpPr>
-        <p:spPr/>
-        <p:txBody>
-          <a:bodyPr/>
-          <a:lstStyle/>
-          <a:p>
-            <a:endParaRPr lang="en-US"/>
-          </a:p>
-        </p:txBody>
-      </p:sp>
-      <p:sp>
-        <p:nvSpPr>
-          <p:cNvPr id="6" name="Slide Number Placeholder 5"/>
-          <p:cNvSpPr>
-            <a:spLocks noGrp="1"/>
-          </p:cNvSpPr>
-          <p:nvPr>
-            <p:ph type="sldNum" sz="quarter" idx="12"/>
-          </p:nvPr>
-        </p:nvSpPr>
-        <p:spPr/>
-        <p:txBody>
-          <a:bodyPr/>
-          <a:lstStyle/>
-          <a:p>
-            <a:fld id="{C1FF6DA9-008F-8B48-92A6-B652298478BF}" type="slidenum">
-              <a:rPr lang="en-US" smtClean="0"/>
-              <a:t>‹#›</a:t>
-            </a:fld>
-            <a:endParaRPr lang="en-US"/>
+            <a:endParaRPr lang="fr-FR" dirty="0"/>
           </a:p>
         </p:txBody>
       </p:sp>
     </p:spTree>
     <p:extLst>
       <p:ext uri="{BB962C8B-B14F-4D97-AF65-F5344CB8AC3E}">
-        <p14:creationId xmlns:p14="http://schemas.microsoft.com/office/powerpoint/2010/main" val="960648375"/>
+        <p14:creationId xmlns:p14="http://schemas.microsoft.com/office/powerpoint/2010/main" val="596340234"/>
       </p:ext>
     </p:extLst>
   </p:cSld>
@@ -1113,9 +1206,9 @@
 </p:sldLayout>
 </file>
 
-<file path=ppt/slideLayouts/slideLayout4.xml><?xml version="1.0" encoding="utf-8"?>
-<p:sldLayout xmlns:a="http://schemas.openxmlformats.org/drawingml/2006/main" xmlns:r="http://schemas.openxmlformats.org/officeDocument/2006/relationships" xmlns:p="http://schemas.openxmlformats.org/presentationml/2006/main" type="twoObj" preserve="1">
-  <p:cSld name="Two Content">
+<file path=ppt/slideLayouts/slideLayout11.xml><?xml version="1.0" encoding="utf-8"?>
+<p:sldLayout xmlns:a="http://schemas.openxmlformats.org/drawingml/2006/main" xmlns:r="http://schemas.openxmlformats.org/officeDocument/2006/relationships" xmlns:p="http://schemas.openxmlformats.org/presentationml/2006/main" type="blank" preserve="1">
+  <p:cSld name="1_Vide">
     <p:spTree>
       <p:nvGrpSpPr>
         <p:cNvPr id="1" name=""/>
@@ -1132,7 +1225,136 @@
       </p:grpSpPr>
       <p:sp>
         <p:nvSpPr>
-          <p:cNvPr id="2" name="Title 1"/>
+          <p:cNvPr id="2" name="Espace réservé du numéro de diapositive 2"/>
+          <p:cNvSpPr>
+            <a:spLocks noGrp="1"/>
+          </p:cNvSpPr>
+          <p:nvPr>
+            <p:ph type="sldNum" sz="quarter" idx="10"/>
+          </p:nvPr>
+        </p:nvSpPr>
+        <p:spPr/>
+        <p:txBody>
+          <a:bodyPr/>
+          <a:lstStyle>
+            <a:lvl1pPr algn="r">
+              <a:defRPr sz="1200">
+                <a:solidFill>
+                  <a:schemeClr val="tx1">
+                    <a:tint val="75000"/>
+                  </a:schemeClr>
+                </a:solidFill>
+              </a:defRPr>
+            </a:lvl1pPr>
+          </a:lstStyle>
+          <a:p>
+            <a:pPr>
+              <a:defRPr/>
+            </a:pPr>
+            <a:fld id="{3771911C-DE94-42AC-ABF9-8C8BDBABFD7D}" type="slidenum">
+              <a:rPr lang="fr-FR"/>
+              <a:pPr>
+                <a:defRPr/>
+              </a:pPr>
+              <a:t>‹N°›</a:t>
+            </a:fld>
+            <a:endParaRPr lang="fr-FR" dirty="0"/>
+          </a:p>
+        </p:txBody>
+      </p:sp>
+    </p:spTree>
+    <p:extLst>
+      <p:ext uri="{BB962C8B-B14F-4D97-AF65-F5344CB8AC3E}">
+        <p14:creationId xmlns:p14="http://schemas.microsoft.com/office/powerpoint/2010/main" val="2272861180"/>
+      </p:ext>
+    </p:extLst>
+  </p:cSld>
+  <p:clrMapOvr>
+    <a:masterClrMapping/>
+  </p:clrMapOvr>
+</p:sldLayout>
+</file>
+
+<file path=ppt/slideLayouts/slideLayout2.xml><?xml version="1.0" encoding="utf-8"?>
+<p:sldLayout xmlns:a="http://schemas.openxmlformats.org/drawingml/2006/main" xmlns:r="http://schemas.openxmlformats.org/officeDocument/2006/relationships" xmlns:p="http://schemas.openxmlformats.org/presentationml/2006/main" preserve="1" userDrawn="1">
+  <p:cSld name="Titre et contenu">
+    <p:spTree>
+      <p:nvGrpSpPr>
+        <p:cNvPr id="1" name=""/>
+        <p:cNvGrpSpPr/>
+        <p:nvPr/>
+      </p:nvGrpSpPr>
+      <p:grpSpPr>
+        <a:xfrm>
+          <a:off x="0" y="0"/>
+          <a:ext cx="0" cy="0"/>
+          <a:chOff x="0" y="0"/>
+          <a:chExt cx="0" cy="0"/>
+        </a:xfrm>
+      </p:grpSpPr>
+      <p:sp>
+        <p:nvSpPr>
+          <p:cNvPr id="3" name="Espace réservé du contenu 2"/>
+          <p:cNvSpPr>
+            <a:spLocks noGrp="1"/>
+          </p:cNvSpPr>
+          <p:nvPr>
+            <p:ph idx="1"/>
+          </p:nvPr>
+        </p:nvSpPr>
+        <p:spPr/>
+        <p:txBody>
+          <a:bodyPr/>
+          <a:lstStyle>
+            <a:lvl5pPr>
+              <a:defRPr/>
+            </a:lvl5pPr>
+          </a:lstStyle>
+          <a:p>
+            <a:pPr lvl="0"/>
+            <a:r>
+              <a:rPr lang="fr-FR" dirty="0"/>
+              <a:t>Modifiez les styles du texte du masque</a:t>
+            </a:r>
+          </a:p>
+          <a:p>
+            <a:pPr lvl="1"/>
+            <a:r>
+              <a:rPr lang="fr-FR" dirty="0"/>
+              <a:t>Deuxième niveau</a:t>
+            </a:r>
+          </a:p>
+          <a:p>
+            <a:pPr lvl="2"/>
+            <a:r>
+              <a:rPr lang="fr-FR" dirty="0"/>
+              <a:t>Troisième niveau</a:t>
+            </a:r>
+          </a:p>
+          <a:p>
+            <a:pPr lvl="3"/>
+            <a:r>
+              <a:rPr lang="fr-FR" dirty="0"/>
+              <a:t>Quatrième niveau</a:t>
+            </a:r>
+          </a:p>
+          <a:p>
+            <a:pPr lvl="4"/>
+            <a:r>
+              <a:rPr lang="fr-FR" dirty="0"/>
+              <a:t>Cinquième </a:t>
+            </a:r>
+            <a:r>
+              <a:rPr lang="fr-FR" dirty="0" err="1"/>
+              <a:t>niveaud</a:t>
+            </a:r>
+            <a:endParaRPr lang="fr-FR" dirty="0"/>
+          </a:p>
+        </p:txBody>
+      </p:sp>
+      <p:sp>
+        <p:nvSpPr>
+          <p:cNvPr id="7" name="Titre 6"/>
           <p:cNvSpPr>
             <a:spLocks noGrp="1"/>
           </p:cNvSpPr>
@@ -1146,16 +1368,271 @@
           <a:lstStyle/>
           <a:p>
             <a:r>
-              <a:rPr lang="en-US" smtClean="0"/>
-              <a:t>Click to edit Master title style</a:t>
-            </a:r>
-            <a:endParaRPr lang="en-US"/>
+              <a:rPr lang="fr-FR"/>
+              <a:t>Modifiez le style du titre</a:t>
+            </a:r>
           </a:p>
         </p:txBody>
       </p:sp>
       <p:sp>
         <p:nvSpPr>
-          <p:cNvPr id="3" name="Content Placeholder 2"/>
+          <p:cNvPr id="4" name="Espace réservé du numéro de diapositive 2"/>
+          <p:cNvSpPr>
+            <a:spLocks noGrp="1"/>
+          </p:cNvSpPr>
+          <p:nvPr>
+            <p:ph type="sldNum" sz="quarter" idx="10"/>
+          </p:nvPr>
+        </p:nvSpPr>
+        <p:spPr/>
+        <p:txBody>
+          <a:bodyPr/>
+          <a:lstStyle>
+            <a:lvl1pPr algn="r">
+              <a:defRPr sz="1200">
+                <a:solidFill>
+                  <a:schemeClr val="tx1">
+                    <a:tint val="75000"/>
+                  </a:schemeClr>
+                </a:solidFill>
+              </a:defRPr>
+            </a:lvl1pPr>
+          </a:lstStyle>
+          <a:p>
+            <a:pPr>
+              <a:defRPr/>
+            </a:pPr>
+            <a:fld id="{6BB614EE-82A8-47AD-879D-EF635CDEA14C}" type="slidenum">
+              <a:rPr lang="fr-FR"/>
+              <a:pPr>
+                <a:defRPr/>
+              </a:pPr>
+              <a:t>‹N°›</a:t>
+            </a:fld>
+            <a:endParaRPr lang="fr-FR" dirty="0"/>
+          </a:p>
+        </p:txBody>
+      </p:sp>
+    </p:spTree>
+    <p:extLst>
+      <p:ext uri="{BB962C8B-B14F-4D97-AF65-F5344CB8AC3E}">
+        <p14:creationId xmlns:p14="http://schemas.microsoft.com/office/powerpoint/2010/main" val="3031105570"/>
+      </p:ext>
+    </p:extLst>
+  </p:cSld>
+  <p:clrMapOvr>
+    <a:masterClrMapping/>
+  </p:clrMapOvr>
+</p:sldLayout>
+</file>
+
+<file path=ppt/slideLayouts/slideLayout3.xml><?xml version="1.0" encoding="utf-8"?>
+<p:sldLayout xmlns:a="http://schemas.openxmlformats.org/drawingml/2006/main" xmlns:r="http://schemas.openxmlformats.org/officeDocument/2006/relationships" xmlns:p="http://schemas.openxmlformats.org/presentationml/2006/main" type="secHead" preserve="1">
+  <p:cSld name="Titre de section">
+    <p:spTree>
+      <p:nvGrpSpPr>
+        <p:cNvPr id="1" name=""/>
+        <p:cNvGrpSpPr/>
+        <p:nvPr/>
+      </p:nvGrpSpPr>
+      <p:grpSpPr>
+        <a:xfrm>
+          <a:off x="0" y="0"/>
+          <a:ext cx="0" cy="0"/>
+          <a:chOff x="0" y="0"/>
+          <a:chExt cx="0" cy="0"/>
+        </a:xfrm>
+      </p:grpSpPr>
+      <p:sp>
+        <p:nvSpPr>
+          <p:cNvPr id="2" name="Titre 1"/>
+          <p:cNvSpPr>
+            <a:spLocks noGrp="1"/>
+          </p:cNvSpPr>
+          <p:nvPr>
+            <p:ph type="title"/>
+          </p:nvPr>
+        </p:nvSpPr>
+        <p:spPr>
+          <a:xfrm>
+            <a:off x="963084" y="4406901"/>
+            <a:ext cx="10363200" cy="1362075"/>
+          </a:xfrm>
+        </p:spPr>
+        <p:txBody>
+          <a:bodyPr anchor="t"/>
+          <a:lstStyle>
+            <a:lvl1pPr algn="l">
+              <a:defRPr sz="4000" b="1" cap="all"/>
+            </a:lvl1pPr>
+          </a:lstStyle>
+          <a:p>
+            <a:r>
+              <a:rPr lang="fr-FR"/>
+              <a:t>Modifiez le style du titre</a:t>
+            </a:r>
+          </a:p>
+        </p:txBody>
+      </p:sp>
+      <p:sp>
+        <p:nvSpPr>
+          <p:cNvPr id="3" name="Espace réservé du texte 2"/>
+          <p:cNvSpPr>
+            <a:spLocks noGrp="1"/>
+          </p:cNvSpPr>
+          <p:nvPr>
+            <p:ph type="body" idx="1"/>
+          </p:nvPr>
+        </p:nvSpPr>
+        <p:spPr>
+          <a:xfrm>
+            <a:off x="963084" y="2906713"/>
+            <a:ext cx="10363200" cy="1500187"/>
+          </a:xfrm>
+        </p:spPr>
+        <p:txBody>
+          <a:bodyPr anchor="b"/>
+          <a:lstStyle>
+            <a:lvl1pPr marL="0" indent="0">
+              <a:buNone/>
+              <a:defRPr sz="2000"/>
+            </a:lvl1pPr>
+            <a:lvl2pPr marL="457200" indent="0">
+              <a:buNone/>
+              <a:defRPr sz="1800"/>
+            </a:lvl2pPr>
+            <a:lvl3pPr marL="914400" indent="0">
+              <a:buNone/>
+              <a:defRPr sz="1600"/>
+            </a:lvl3pPr>
+            <a:lvl4pPr marL="1371600" indent="0">
+              <a:buNone/>
+              <a:defRPr sz="1400"/>
+            </a:lvl4pPr>
+            <a:lvl5pPr marL="1828800" indent="0">
+              <a:buNone/>
+              <a:defRPr sz="1400"/>
+            </a:lvl5pPr>
+            <a:lvl6pPr marL="2286000" indent="0">
+              <a:buNone/>
+              <a:defRPr sz="1400"/>
+            </a:lvl6pPr>
+            <a:lvl7pPr marL="2743200" indent="0">
+              <a:buNone/>
+              <a:defRPr sz="1400"/>
+            </a:lvl7pPr>
+            <a:lvl8pPr marL="3200400" indent="0">
+              <a:buNone/>
+              <a:defRPr sz="1400"/>
+            </a:lvl8pPr>
+            <a:lvl9pPr marL="3657600" indent="0">
+              <a:buNone/>
+              <a:defRPr sz="1400"/>
+            </a:lvl9pPr>
+          </a:lstStyle>
+          <a:p>
+            <a:pPr lvl="0"/>
+            <a:r>
+              <a:rPr lang="fr-FR"/>
+              <a:t>Modifiez les styles du texte du masque</a:t>
+            </a:r>
+          </a:p>
+        </p:txBody>
+      </p:sp>
+      <p:sp>
+        <p:nvSpPr>
+          <p:cNvPr id="4" name="Espace réservé du numéro de diapositive 2"/>
+          <p:cNvSpPr>
+            <a:spLocks noGrp="1"/>
+          </p:cNvSpPr>
+          <p:nvPr>
+            <p:ph type="sldNum" sz="quarter" idx="10"/>
+          </p:nvPr>
+        </p:nvSpPr>
+        <p:spPr/>
+        <p:txBody>
+          <a:bodyPr/>
+          <a:lstStyle>
+            <a:lvl1pPr algn="r">
+              <a:defRPr sz="1200">
+                <a:solidFill>
+                  <a:schemeClr val="tx1">
+                    <a:tint val="75000"/>
+                  </a:schemeClr>
+                </a:solidFill>
+              </a:defRPr>
+            </a:lvl1pPr>
+          </a:lstStyle>
+          <a:p>
+            <a:pPr>
+              <a:defRPr/>
+            </a:pPr>
+            <a:fld id="{8A61CB1C-BAEF-46F6-A1CE-C05F03B2D881}" type="slidenum">
+              <a:rPr lang="fr-FR"/>
+              <a:pPr>
+                <a:defRPr/>
+              </a:pPr>
+              <a:t>‹N°›</a:t>
+            </a:fld>
+            <a:endParaRPr lang="fr-FR" dirty="0"/>
+          </a:p>
+        </p:txBody>
+      </p:sp>
+    </p:spTree>
+    <p:extLst>
+      <p:ext uri="{BB962C8B-B14F-4D97-AF65-F5344CB8AC3E}">
+        <p14:creationId xmlns:p14="http://schemas.microsoft.com/office/powerpoint/2010/main" val="287284268"/>
+      </p:ext>
+    </p:extLst>
+  </p:cSld>
+  <p:clrMapOvr>
+    <a:masterClrMapping/>
+  </p:clrMapOvr>
+</p:sldLayout>
+</file>
+
+<file path=ppt/slideLayouts/slideLayout4.xml><?xml version="1.0" encoding="utf-8"?>
+<p:sldLayout xmlns:a="http://schemas.openxmlformats.org/drawingml/2006/main" xmlns:r="http://schemas.openxmlformats.org/officeDocument/2006/relationships" xmlns:p="http://schemas.openxmlformats.org/presentationml/2006/main" type="twoObj" preserve="1">
+  <p:cSld name="Deux contenus">
+    <p:spTree>
+      <p:nvGrpSpPr>
+        <p:cNvPr id="1" name=""/>
+        <p:cNvGrpSpPr/>
+        <p:nvPr/>
+      </p:nvGrpSpPr>
+      <p:grpSpPr>
+        <a:xfrm>
+          <a:off x="0" y="0"/>
+          <a:ext cx="0" cy="0"/>
+          <a:chOff x="0" y="0"/>
+          <a:chExt cx="0" cy="0"/>
+        </a:xfrm>
+      </p:grpSpPr>
+      <p:sp>
+        <p:nvSpPr>
+          <p:cNvPr id="2" name="Titre 1"/>
+          <p:cNvSpPr>
+            <a:spLocks noGrp="1"/>
+          </p:cNvSpPr>
+          <p:nvPr>
+            <p:ph type="title"/>
+          </p:nvPr>
+        </p:nvSpPr>
+        <p:spPr/>
+        <p:txBody>
+          <a:bodyPr/>
+          <a:lstStyle/>
+          <a:p>
+            <a:r>
+              <a:rPr lang="fr-FR"/>
+              <a:t>Modifiez le style du titre</a:t>
+            </a:r>
+          </a:p>
+        </p:txBody>
+      </p:sp>
+      <p:sp>
+        <p:nvSpPr>
+          <p:cNvPr id="3" name="Espace réservé du contenu 2"/>
           <p:cNvSpPr>
             <a:spLocks noGrp="1"/>
           </p:cNvSpPr>
@@ -1165,8 +1642,8 @@
         </p:nvSpPr>
         <p:spPr>
           <a:xfrm>
-            <a:off x="609584" y="1600200"/>
-            <a:ext cx="5384665" cy="4525963"/>
+            <a:off x="431801" y="1600201"/>
+            <a:ext cx="5473700" cy="4525963"/>
           </a:xfrm>
         </p:spPr>
         <p:txBody>
@@ -1203,44 +1680,43 @@
           <a:p>
             <a:pPr lvl="0"/>
             <a:r>
-              <a:rPr lang="en-US" smtClean="0"/>
-              <a:t>Click to edit Master text styles</a:t>
+              <a:rPr lang="fr-FR"/>
+              <a:t>Modifiez les styles du texte du masque</a:t>
             </a:r>
           </a:p>
           <a:p>
             <a:pPr lvl="1"/>
             <a:r>
-              <a:rPr lang="en-US" smtClean="0"/>
-              <a:t>Second level</a:t>
+              <a:rPr lang="fr-FR"/>
+              <a:t>Deuxième niveau</a:t>
             </a:r>
           </a:p>
           <a:p>
             <a:pPr lvl="2"/>
             <a:r>
-              <a:rPr lang="en-US" smtClean="0"/>
-              <a:t>Third level</a:t>
+              <a:rPr lang="fr-FR"/>
+              <a:t>Troisième niveau</a:t>
             </a:r>
           </a:p>
           <a:p>
             <a:pPr lvl="3"/>
             <a:r>
-              <a:rPr lang="en-US" smtClean="0"/>
-              <a:t>Fourth level</a:t>
+              <a:rPr lang="fr-FR"/>
+              <a:t>Quatrième niveau</a:t>
             </a:r>
           </a:p>
           <a:p>
             <a:pPr lvl="4"/>
             <a:r>
-              <a:rPr lang="en-US" smtClean="0"/>
-              <a:t>Fifth level</a:t>
-            </a:r>
-            <a:endParaRPr lang="en-US"/>
+              <a:rPr lang="fr-FR"/>
+              <a:t>Cinquième niveau</a:t>
+            </a:r>
           </a:p>
         </p:txBody>
       </p:sp>
       <p:sp>
         <p:nvSpPr>
-          <p:cNvPr id="4" name="Content Placeholder 3"/>
+          <p:cNvPr id="4" name="Espace réservé du contenu 3"/>
           <p:cNvSpPr>
             <a:spLocks noGrp="1"/>
           </p:cNvSpPr>
@@ -1250,8 +1726,8 @@
         </p:nvSpPr>
         <p:spPr>
           <a:xfrm>
-            <a:off x="6197444" y="1600200"/>
-            <a:ext cx="5384665" cy="4525963"/>
+            <a:off x="6108701" y="1600201"/>
+            <a:ext cx="5473700" cy="4525963"/>
           </a:xfrm>
         </p:spPr>
         <p:txBody>
@@ -1288,110 +1764,83 @@
           <a:p>
             <a:pPr lvl="0"/>
             <a:r>
-              <a:rPr lang="en-US" smtClean="0"/>
-              <a:t>Click to edit Master text styles</a:t>
+              <a:rPr lang="fr-FR"/>
+              <a:t>Modifiez les styles du texte du masque</a:t>
             </a:r>
           </a:p>
           <a:p>
             <a:pPr lvl="1"/>
             <a:r>
-              <a:rPr lang="en-US" smtClean="0"/>
-              <a:t>Second level</a:t>
+              <a:rPr lang="fr-FR"/>
+              <a:t>Deuxième niveau</a:t>
             </a:r>
           </a:p>
           <a:p>
             <a:pPr lvl="2"/>
             <a:r>
-              <a:rPr lang="en-US" smtClean="0"/>
-              <a:t>Third level</a:t>
+              <a:rPr lang="fr-FR"/>
+              <a:t>Troisième niveau</a:t>
             </a:r>
           </a:p>
           <a:p>
             <a:pPr lvl="3"/>
             <a:r>
-              <a:rPr lang="en-US" smtClean="0"/>
-              <a:t>Fourth level</a:t>
+              <a:rPr lang="fr-FR"/>
+              <a:t>Quatrième niveau</a:t>
             </a:r>
           </a:p>
           <a:p>
             <a:pPr lvl="4"/>
             <a:r>
-              <a:rPr lang="en-US" smtClean="0"/>
-              <a:t>Fifth level</a:t>
-            </a:r>
-            <a:endParaRPr lang="en-US"/>
+              <a:rPr lang="fr-FR"/>
+              <a:t>Cinquième niveau</a:t>
+            </a:r>
           </a:p>
         </p:txBody>
       </p:sp>
       <p:sp>
         <p:nvSpPr>
-          <p:cNvPr id="5" name="Date Placeholder 4"/>
+          <p:cNvPr id="5" name="Espace réservé du numéro de diapositive 2"/>
           <p:cNvSpPr>
             <a:spLocks noGrp="1"/>
           </p:cNvSpPr>
           <p:nvPr>
-            <p:ph type="dt" sz="half" idx="10"/>
+            <p:ph type="sldNum" sz="quarter" idx="10"/>
           </p:nvPr>
         </p:nvSpPr>
         <p:spPr/>
         <p:txBody>
           <a:bodyPr/>
-          <a:lstStyle/>
-          <a:p>
-            <a:fld id="{5BCAD085-E8A6-8845-BD4E-CB4CCA059FC4}" type="datetimeFigureOut">
-              <a:rPr lang="en-US" smtClean="0"/>
-              <a:t>1/27/13</a:t>
+          <a:lstStyle>
+            <a:lvl1pPr algn="r">
+              <a:defRPr sz="1200">
+                <a:solidFill>
+                  <a:schemeClr val="tx1">
+                    <a:tint val="75000"/>
+                  </a:schemeClr>
+                </a:solidFill>
+              </a:defRPr>
+            </a:lvl1pPr>
+          </a:lstStyle>
+          <a:p>
+            <a:pPr>
+              <a:defRPr/>
+            </a:pPr>
+            <a:fld id="{E95707C6-F947-4E29-BF65-2360533EF3F6}" type="slidenum">
+              <a:rPr lang="fr-FR"/>
+              <a:pPr>
+                <a:defRPr/>
+              </a:pPr>
+              <a:t>‹N°›</a:t>
             </a:fld>
-            <a:endParaRPr lang="en-US"/>
-          </a:p>
-        </p:txBody>
-      </p:sp>
-      <p:sp>
-        <p:nvSpPr>
-          <p:cNvPr id="6" name="Footer Placeholder 5"/>
-          <p:cNvSpPr>
-            <a:spLocks noGrp="1"/>
-          </p:cNvSpPr>
-          <p:nvPr>
-            <p:ph type="ftr" sz="quarter" idx="11"/>
-          </p:nvPr>
-        </p:nvSpPr>
-        <p:spPr/>
-        <p:txBody>
-          <a:bodyPr/>
-          <a:lstStyle/>
-          <a:p>
-            <a:endParaRPr lang="en-US"/>
-          </a:p>
-        </p:txBody>
-      </p:sp>
-      <p:sp>
-        <p:nvSpPr>
-          <p:cNvPr id="7" name="Slide Number Placeholder 6"/>
-          <p:cNvSpPr>
-            <a:spLocks noGrp="1"/>
-          </p:cNvSpPr>
-          <p:nvPr>
-            <p:ph type="sldNum" sz="quarter" idx="12"/>
-          </p:nvPr>
-        </p:nvSpPr>
-        <p:spPr/>
-        <p:txBody>
-          <a:bodyPr/>
-          <a:lstStyle/>
-          <a:p>
-            <a:fld id="{C1FF6DA9-008F-8B48-92A6-B652298478BF}" type="slidenum">
-              <a:rPr lang="en-US" smtClean="0"/>
-              <a:t>‹#›</a:t>
-            </a:fld>
-            <a:endParaRPr lang="en-US"/>
+            <a:endParaRPr lang="fr-FR" dirty="0"/>
           </a:p>
         </p:txBody>
       </p:sp>
     </p:spTree>
     <p:extLst>
       <p:ext uri="{BB962C8B-B14F-4D97-AF65-F5344CB8AC3E}">
-        <p14:creationId xmlns:p14="http://schemas.microsoft.com/office/powerpoint/2010/main" val="2782244947"/>
+        <p14:creationId xmlns:p14="http://schemas.microsoft.com/office/powerpoint/2010/main" val="270938541"/>
       </p:ext>
     </p:extLst>
   </p:cSld>
@@ -1403,7 +1852,7 @@
 
 <file path=ppt/slideLayouts/slideLayout5.xml><?xml version="1.0" encoding="utf-8"?>
 <p:sldLayout xmlns:a="http://schemas.openxmlformats.org/drawingml/2006/main" xmlns:r="http://schemas.openxmlformats.org/officeDocument/2006/relationships" xmlns:p="http://schemas.openxmlformats.org/presentationml/2006/main" type="twoTxTwoObj" preserve="1">
-  <p:cSld name="Comparison">
+  <p:cSld name="Comparaison">
     <p:spTree>
       <p:nvGrpSpPr>
         <p:cNvPr id="1" name=""/>
@@ -1420,7 +1869,7 @@
       </p:grpSpPr>
       <p:sp>
         <p:nvSpPr>
-          <p:cNvPr id="2" name="Title 1"/>
+          <p:cNvPr id="2" name="Titre 1"/>
           <p:cNvSpPr>
             <a:spLocks noGrp="1"/>
           </p:cNvSpPr>
@@ -1428,7 +1877,12 @@
             <p:ph type="title"/>
           </p:nvPr>
         </p:nvSpPr>
-        <p:spPr/>
+        <p:spPr>
+          <a:xfrm>
+            <a:off x="609600" y="274638"/>
+            <a:ext cx="10972800" cy="1143000"/>
+          </a:xfrm>
+        </p:spPr>
         <p:txBody>
           <a:bodyPr/>
           <a:lstStyle>
@@ -1438,16 +1892,15 @@
           </a:lstStyle>
           <a:p>
             <a:r>
-              <a:rPr lang="en-US" smtClean="0"/>
-              <a:t>Click to edit Master title style</a:t>
-            </a:r>
-            <a:endParaRPr lang="en-US"/>
+              <a:rPr lang="fr-FR"/>
+              <a:t>Modifiez le style du titre</a:t>
+            </a:r>
           </a:p>
         </p:txBody>
       </p:sp>
       <p:sp>
         <p:nvSpPr>
-          <p:cNvPr id="3" name="Text Placeholder 2"/>
+          <p:cNvPr id="3" name="Espace réservé du texte 2"/>
           <p:cNvSpPr>
             <a:spLocks noGrp="1"/>
           </p:cNvSpPr>
@@ -1457,8 +1910,8 @@
         </p:nvSpPr>
         <p:spPr>
           <a:xfrm>
-            <a:off x="609584" y="1535113"/>
-            <a:ext cx="5386782" cy="639762"/>
+            <a:off x="609600" y="1535113"/>
+            <a:ext cx="5386917" cy="639762"/>
           </a:xfrm>
         </p:spPr>
         <p:txBody>
@@ -1504,15 +1957,15 @@
           <a:p>
             <a:pPr lvl="0"/>
             <a:r>
-              <a:rPr lang="en-US" smtClean="0"/>
-              <a:t>Click to edit Master text styles</a:t>
+              <a:rPr lang="fr-FR"/>
+              <a:t>Modifiez les styles du texte du masque</a:t>
             </a:r>
           </a:p>
         </p:txBody>
       </p:sp>
       <p:sp>
         <p:nvSpPr>
-          <p:cNvPr id="4" name="Content Placeholder 3"/>
+          <p:cNvPr id="4" name="Espace réservé du contenu 3"/>
           <p:cNvSpPr>
             <a:spLocks noGrp="1"/>
           </p:cNvSpPr>
@@ -1522,8 +1975,8 @@
         </p:nvSpPr>
         <p:spPr>
           <a:xfrm>
-            <a:off x="609584" y="2174875"/>
-            <a:ext cx="5386782" cy="3951288"/>
+            <a:off x="609600" y="2174875"/>
+            <a:ext cx="5386917" cy="3951288"/>
           </a:xfrm>
         </p:spPr>
         <p:txBody>
@@ -1560,44 +2013,43 @@
           <a:p>
             <a:pPr lvl="0"/>
             <a:r>
-              <a:rPr lang="en-US" smtClean="0"/>
-              <a:t>Click to edit Master text styles</a:t>
+              <a:rPr lang="fr-FR"/>
+              <a:t>Modifiez les styles du texte du masque</a:t>
             </a:r>
           </a:p>
           <a:p>
             <a:pPr lvl="1"/>
             <a:r>
-              <a:rPr lang="en-US" smtClean="0"/>
-              <a:t>Second level</a:t>
+              <a:rPr lang="fr-FR"/>
+              <a:t>Deuxième niveau</a:t>
             </a:r>
           </a:p>
           <a:p>
             <a:pPr lvl="2"/>
             <a:r>
-              <a:rPr lang="en-US" smtClean="0"/>
-              <a:t>Third level</a:t>
+              <a:rPr lang="fr-FR"/>
+              <a:t>Troisième niveau</a:t>
             </a:r>
           </a:p>
           <a:p>
             <a:pPr lvl="3"/>
             <a:r>
-              <a:rPr lang="en-US" smtClean="0"/>
-              <a:t>Fourth level</a:t>
+              <a:rPr lang="fr-FR"/>
+              <a:t>Quatrième niveau</a:t>
             </a:r>
           </a:p>
           <a:p>
             <a:pPr lvl="4"/>
             <a:r>
-              <a:rPr lang="en-US" smtClean="0"/>
-              <a:t>Fifth level</a:t>
-            </a:r>
-            <a:endParaRPr lang="en-US"/>
+              <a:rPr lang="fr-FR"/>
+              <a:t>Cinquième niveau</a:t>
+            </a:r>
           </a:p>
         </p:txBody>
       </p:sp>
       <p:sp>
         <p:nvSpPr>
-          <p:cNvPr id="5" name="Text Placeholder 4"/>
+          <p:cNvPr id="5" name="Espace réservé du texte 4"/>
           <p:cNvSpPr>
             <a:spLocks noGrp="1"/>
           </p:cNvSpPr>
@@ -1607,8 +2059,8 @@
         </p:nvSpPr>
         <p:spPr>
           <a:xfrm>
-            <a:off x="6193211" y="1535113"/>
-            <a:ext cx="5388898" cy="639762"/>
+            <a:off x="6193368" y="1535113"/>
+            <a:ext cx="5389033" cy="639762"/>
           </a:xfrm>
         </p:spPr>
         <p:txBody>
@@ -1654,15 +2106,15 @@
           <a:p>
             <a:pPr lvl="0"/>
             <a:r>
-              <a:rPr lang="en-US" smtClean="0"/>
-              <a:t>Click to edit Master text styles</a:t>
+              <a:rPr lang="fr-FR"/>
+              <a:t>Modifiez les styles du texte du masque</a:t>
             </a:r>
           </a:p>
         </p:txBody>
       </p:sp>
       <p:sp>
         <p:nvSpPr>
-          <p:cNvPr id="6" name="Content Placeholder 5"/>
+          <p:cNvPr id="6" name="Espace réservé du contenu 5"/>
           <p:cNvSpPr>
             <a:spLocks noGrp="1"/>
           </p:cNvSpPr>
@@ -1672,8 +2124,8 @@
         </p:nvSpPr>
         <p:spPr>
           <a:xfrm>
-            <a:off x="6193211" y="2174875"/>
-            <a:ext cx="5388898" cy="3951288"/>
+            <a:off x="6193368" y="2174875"/>
+            <a:ext cx="5389033" cy="3951288"/>
           </a:xfrm>
         </p:spPr>
         <p:txBody>
@@ -1710,110 +2162,83 @@
           <a:p>
             <a:pPr lvl="0"/>
             <a:r>
-              <a:rPr lang="en-US" smtClean="0"/>
-              <a:t>Click to edit Master text styles</a:t>
+              <a:rPr lang="fr-FR"/>
+              <a:t>Modifiez les styles du texte du masque</a:t>
             </a:r>
           </a:p>
           <a:p>
             <a:pPr lvl="1"/>
             <a:r>
-              <a:rPr lang="en-US" smtClean="0"/>
-              <a:t>Second level</a:t>
+              <a:rPr lang="fr-FR"/>
+              <a:t>Deuxième niveau</a:t>
             </a:r>
           </a:p>
           <a:p>
             <a:pPr lvl="2"/>
             <a:r>
-              <a:rPr lang="en-US" smtClean="0"/>
-              <a:t>Third level</a:t>
+              <a:rPr lang="fr-FR"/>
+              <a:t>Troisième niveau</a:t>
             </a:r>
           </a:p>
           <a:p>
             <a:pPr lvl="3"/>
             <a:r>
-              <a:rPr lang="en-US" smtClean="0"/>
-              <a:t>Fourth level</a:t>
+              <a:rPr lang="fr-FR"/>
+              <a:t>Quatrième niveau</a:t>
             </a:r>
           </a:p>
           <a:p>
             <a:pPr lvl="4"/>
             <a:r>
-              <a:rPr lang="en-US" smtClean="0"/>
-              <a:t>Fifth level</a:t>
-            </a:r>
-            <a:endParaRPr lang="en-US"/>
+              <a:rPr lang="fr-FR"/>
+              <a:t>Cinquième niveau</a:t>
+            </a:r>
           </a:p>
         </p:txBody>
       </p:sp>
       <p:sp>
         <p:nvSpPr>
-          <p:cNvPr id="7" name="Date Placeholder 6"/>
+          <p:cNvPr id="7" name="Espace réservé du numéro de diapositive 2"/>
           <p:cNvSpPr>
             <a:spLocks noGrp="1"/>
           </p:cNvSpPr>
           <p:nvPr>
-            <p:ph type="dt" sz="half" idx="10"/>
+            <p:ph type="sldNum" sz="quarter" idx="10"/>
           </p:nvPr>
         </p:nvSpPr>
         <p:spPr/>
         <p:txBody>
           <a:bodyPr/>
-          <a:lstStyle/>
-          <a:p>
-            <a:fld id="{5BCAD085-E8A6-8845-BD4E-CB4CCA059FC4}" type="datetimeFigureOut">
-              <a:rPr lang="en-US" smtClean="0"/>
-              <a:t>1/27/13</a:t>
+          <a:lstStyle>
+            <a:lvl1pPr algn="r">
+              <a:defRPr sz="1200">
+                <a:solidFill>
+                  <a:schemeClr val="tx1">
+                    <a:tint val="75000"/>
+                  </a:schemeClr>
+                </a:solidFill>
+              </a:defRPr>
+            </a:lvl1pPr>
+          </a:lstStyle>
+          <a:p>
+            <a:pPr>
+              <a:defRPr/>
+            </a:pPr>
+            <a:fld id="{CB3D3F91-660C-468B-9ADD-0124C63BE31D}" type="slidenum">
+              <a:rPr lang="fr-FR"/>
+              <a:pPr>
+                <a:defRPr/>
+              </a:pPr>
+              <a:t>‹N°›</a:t>
             </a:fld>
-            <a:endParaRPr lang="en-US"/>
-          </a:p>
-        </p:txBody>
-      </p:sp>
-      <p:sp>
-        <p:nvSpPr>
-          <p:cNvPr id="8" name="Footer Placeholder 7"/>
-          <p:cNvSpPr>
-            <a:spLocks noGrp="1"/>
-          </p:cNvSpPr>
-          <p:nvPr>
-            <p:ph type="ftr" sz="quarter" idx="11"/>
-          </p:nvPr>
-        </p:nvSpPr>
-        <p:spPr/>
-        <p:txBody>
-          <a:bodyPr/>
-          <a:lstStyle/>
-          <a:p>
-            <a:endParaRPr lang="en-US"/>
-          </a:p>
-        </p:txBody>
-      </p:sp>
-      <p:sp>
-        <p:nvSpPr>
-          <p:cNvPr id="9" name="Slide Number Placeholder 8"/>
-          <p:cNvSpPr>
-            <a:spLocks noGrp="1"/>
-          </p:cNvSpPr>
-          <p:nvPr>
-            <p:ph type="sldNum" sz="quarter" idx="12"/>
-          </p:nvPr>
-        </p:nvSpPr>
-        <p:spPr/>
-        <p:txBody>
-          <a:bodyPr/>
-          <a:lstStyle/>
-          <a:p>
-            <a:fld id="{C1FF6DA9-008F-8B48-92A6-B652298478BF}" type="slidenum">
-              <a:rPr lang="en-US" smtClean="0"/>
-              <a:t>‹#›</a:t>
-            </a:fld>
-            <a:endParaRPr lang="en-US"/>
+            <a:endParaRPr lang="fr-FR" dirty="0"/>
           </a:p>
         </p:txBody>
       </p:sp>
     </p:spTree>
     <p:extLst>
       <p:ext uri="{BB962C8B-B14F-4D97-AF65-F5344CB8AC3E}">
-        <p14:creationId xmlns:p14="http://schemas.microsoft.com/office/powerpoint/2010/main" val="990158736"/>
+        <p14:creationId xmlns:p14="http://schemas.microsoft.com/office/powerpoint/2010/main" val="2935313540"/>
       </p:ext>
     </p:extLst>
   </p:cSld>
@@ -1825,7 +2250,7 @@
 
 <file path=ppt/slideLayouts/slideLayout6.xml><?xml version="1.0" encoding="utf-8"?>
 <p:sldLayout xmlns:a="http://schemas.openxmlformats.org/drawingml/2006/main" xmlns:r="http://schemas.openxmlformats.org/officeDocument/2006/relationships" xmlns:p="http://schemas.openxmlformats.org/presentationml/2006/main" type="titleOnly" preserve="1">
-  <p:cSld name="Title Only">
+  <p:cSld name="Titre seul">
     <p:spTree>
       <p:nvGrpSpPr>
         <p:cNvPr id="1" name=""/>
@@ -1842,7 +2267,7 @@
       </p:grpSpPr>
       <p:sp>
         <p:nvSpPr>
-          <p:cNvPr id="2" name="Title 1"/>
+          <p:cNvPr id="2" name="Titre 1"/>
           <p:cNvSpPr>
             <a:spLocks noGrp="1"/>
           </p:cNvSpPr>
@@ -1856,82 +2281,55 @@
           <a:lstStyle/>
           <a:p>
             <a:r>
-              <a:rPr lang="en-US" smtClean="0"/>
-              <a:t>Click to edit Master title style</a:t>
-            </a:r>
-            <a:endParaRPr lang="en-US"/>
+              <a:rPr lang="fr-FR"/>
+              <a:t>Modifiez le style du titre</a:t>
+            </a:r>
           </a:p>
         </p:txBody>
       </p:sp>
       <p:sp>
         <p:nvSpPr>
-          <p:cNvPr id="3" name="Date Placeholder 2"/>
+          <p:cNvPr id="3" name="Espace réservé du numéro de diapositive 2"/>
           <p:cNvSpPr>
             <a:spLocks noGrp="1"/>
           </p:cNvSpPr>
           <p:nvPr>
-            <p:ph type="dt" sz="half" idx="10"/>
+            <p:ph type="sldNum" sz="quarter" idx="10"/>
           </p:nvPr>
         </p:nvSpPr>
         <p:spPr/>
         <p:txBody>
           <a:bodyPr/>
-          <a:lstStyle/>
-          <a:p>
-            <a:fld id="{5BCAD085-E8A6-8845-BD4E-CB4CCA059FC4}" type="datetimeFigureOut">
-              <a:rPr lang="en-US" smtClean="0"/>
-              <a:t>1/27/13</a:t>
+          <a:lstStyle>
+            <a:lvl1pPr algn="r">
+              <a:defRPr sz="1200">
+                <a:solidFill>
+                  <a:schemeClr val="tx1">
+                    <a:tint val="75000"/>
+                  </a:schemeClr>
+                </a:solidFill>
+              </a:defRPr>
+            </a:lvl1pPr>
+          </a:lstStyle>
+          <a:p>
+            <a:pPr>
+              <a:defRPr/>
+            </a:pPr>
+            <a:fld id="{BA1450A5-1EEC-47D5-A615-A7E08954C401}" type="slidenum">
+              <a:rPr lang="fr-FR"/>
+              <a:pPr>
+                <a:defRPr/>
+              </a:pPr>
+              <a:t>‹N°›</a:t>
             </a:fld>
-            <a:endParaRPr lang="en-US"/>
-          </a:p>
-        </p:txBody>
-      </p:sp>
-      <p:sp>
-        <p:nvSpPr>
-          <p:cNvPr id="4" name="Footer Placeholder 3"/>
-          <p:cNvSpPr>
-            <a:spLocks noGrp="1"/>
-          </p:cNvSpPr>
-          <p:nvPr>
-            <p:ph type="ftr" sz="quarter" idx="11"/>
-          </p:nvPr>
-        </p:nvSpPr>
-        <p:spPr/>
-        <p:txBody>
-          <a:bodyPr/>
-          <a:lstStyle/>
-          <a:p>
-            <a:endParaRPr lang="en-US"/>
-          </a:p>
-        </p:txBody>
-      </p:sp>
-      <p:sp>
-        <p:nvSpPr>
-          <p:cNvPr id="5" name="Slide Number Placeholder 4"/>
-          <p:cNvSpPr>
-            <a:spLocks noGrp="1"/>
-          </p:cNvSpPr>
-          <p:nvPr>
-            <p:ph type="sldNum" sz="quarter" idx="12"/>
-          </p:nvPr>
-        </p:nvSpPr>
-        <p:spPr/>
-        <p:txBody>
-          <a:bodyPr/>
-          <a:lstStyle/>
-          <a:p>
-            <a:fld id="{C1FF6DA9-008F-8B48-92A6-B652298478BF}" type="slidenum">
-              <a:rPr lang="en-US" smtClean="0"/>
-              <a:t>‹#›</a:t>
-            </a:fld>
-            <a:endParaRPr lang="en-US"/>
+            <a:endParaRPr lang="fr-FR" dirty="0"/>
           </a:p>
         </p:txBody>
       </p:sp>
     </p:spTree>
     <p:extLst>
       <p:ext uri="{BB962C8B-B14F-4D97-AF65-F5344CB8AC3E}">
-        <p14:creationId xmlns:p14="http://schemas.microsoft.com/office/powerpoint/2010/main" val="727027711"/>
+        <p14:creationId xmlns:p14="http://schemas.microsoft.com/office/powerpoint/2010/main" val="2835412836"/>
       </p:ext>
     </p:extLst>
   </p:cSld>
@@ -1943,7 +2341,7 @@
 
 <file path=ppt/slideLayouts/slideLayout7.xml><?xml version="1.0" encoding="utf-8"?>
 <p:sldLayout xmlns:a="http://schemas.openxmlformats.org/drawingml/2006/main" xmlns:r="http://schemas.openxmlformats.org/officeDocument/2006/relationships" xmlns:p="http://schemas.openxmlformats.org/presentationml/2006/main" type="blank" preserve="1">
-  <p:cSld name="Blank">
+  <p:cSld name="Vide">
     <p:spTree>
       <p:nvGrpSpPr>
         <p:cNvPr id="1" name=""/>
@@ -1960,73 +2358,169 @@
       </p:grpSpPr>
       <p:sp>
         <p:nvSpPr>
-          <p:cNvPr id="2" name="Date Placeholder 1"/>
-          <p:cNvSpPr>
-            <a:spLocks noGrp="1"/>
+          <p:cNvPr id="2" name="Espace réservé du numéro de diapositive 2"/>
+          <p:cNvSpPr txBox="1">
+            <a:spLocks/>
           </p:cNvSpPr>
-          <p:nvPr>
-            <p:ph type="dt" sz="half" idx="10"/>
-          </p:nvPr>
+          <p:nvPr userDrawn="1"/>
         </p:nvSpPr>
-        <p:spPr/>
+        <p:spPr>
+          <a:xfrm>
+            <a:off x="11408834" y="6665913"/>
+            <a:ext cx="814917" cy="201612"/>
+          </a:xfrm>
+          <a:prstGeom prst="rect">
+            <a:avLst/>
+          </a:prstGeom>
+        </p:spPr>
         <p:txBody>
-          <a:bodyPr/>
-          <a:lstStyle/>
-          <a:p>
-            <a:fld id="{5BCAD085-E8A6-8845-BD4E-CB4CCA059FC4}" type="datetimeFigureOut">
-              <a:rPr lang="en-US" smtClean="0"/>
-              <a:t>1/27/13</a:t>
+          <a:bodyPr anchor="ctr"/>
+          <a:lstStyle>
+            <a:defPPr>
+              <a:defRPr lang="fr-FR"/>
+            </a:defPPr>
+            <a:lvl1pPr algn="r" rtl="0" fontAlgn="base">
+              <a:spcBef>
+                <a:spcPct val="0"/>
+              </a:spcBef>
+              <a:spcAft>
+                <a:spcPct val="0"/>
+              </a:spcAft>
+              <a:defRPr sz="1200" kern="1200">
+                <a:solidFill>
+                  <a:schemeClr val="tx1">
+                    <a:tint val="75000"/>
+                  </a:schemeClr>
+                </a:solidFill>
+                <a:latin typeface="Arial" charset="0"/>
+                <a:ea typeface="+mn-ea"/>
+                <a:cs typeface="+mn-cs"/>
+              </a:defRPr>
+            </a:lvl1pPr>
+            <a:lvl2pPr marL="457200" algn="l" rtl="0" fontAlgn="base">
+              <a:spcBef>
+                <a:spcPct val="0"/>
+              </a:spcBef>
+              <a:spcAft>
+                <a:spcPct val="0"/>
+              </a:spcAft>
+              <a:defRPr kern="1200">
+                <a:solidFill>
+                  <a:schemeClr val="tx1"/>
+                </a:solidFill>
+                <a:latin typeface="Arial" charset="0"/>
+                <a:ea typeface="+mn-ea"/>
+                <a:cs typeface="+mn-cs"/>
+              </a:defRPr>
+            </a:lvl2pPr>
+            <a:lvl3pPr marL="914400" algn="l" rtl="0" fontAlgn="base">
+              <a:spcBef>
+                <a:spcPct val="0"/>
+              </a:spcBef>
+              <a:spcAft>
+                <a:spcPct val="0"/>
+              </a:spcAft>
+              <a:defRPr kern="1200">
+                <a:solidFill>
+                  <a:schemeClr val="tx1"/>
+                </a:solidFill>
+                <a:latin typeface="Arial" charset="0"/>
+                <a:ea typeface="+mn-ea"/>
+                <a:cs typeface="+mn-cs"/>
+              </a:defRPr>
+            </a:lvl3pPr>
+            <a:lvl4pPr marL="1371600" algn="l" rtl="0" fontAlgn="base">
+              <a:spcBef>
+                <a:spcPct val="0"/>
+              </a:spcBef>
+              <a:spcAft>
+                <a:spcPct val="0"/>
+              </a:spcAft>
+              <a:defRPr kern="1200">
+                <a:solidFill>
+                  <a:schemeClr val="tx1"/>
+                </a:solidFill>
+                <a:latin typeface="Arial" charset="0"/>
+                <a:ea typeface="+mn-ea"/>
+                <a:cs typeface="+mn-cs"/>
+              </a:defRPr>
+            </a:lvl4pPr>
+            <a:lvl5pPr marL="1828800" algn="l" rtl="0" fontAlgn="base">
+              <a:spcBef>
+                <a:spcPct val="0"/>
+              </a:spcBef>
+              <a:spcAft>
+                <a:spcPct val="0"/>
+              </a:spcAft>
+              <a:defRPr kern="1200">
+                <a:solidFill>
+                  <a:schemeClr val="tx1"/>
+                </a:solidFill>
+                <a:latin typeface="Arial" charset="0"/>
+                <a:ea typeface="+mn-ea"/>
+                <a:cs typeface="+mn-cs"/>
+              </a:defRPr>
+            </a:lvl5pPr>
+            <a:lvl6pPr marL="2286000" algn="l" defTabSz="914400" rtl="0" eaLnBrk="1" latinLnBrk="0" hangingPunct="1">
+              <a:defRPr kern="1200">
+                <a:solidFill>
+                  <a:schemeClr val="tx1"/>
+                </a:solidFill>
+                <a:latin typeface="Arial" charset="0"/>
+                <a:ea typeface="+mn-ea"/>
+                <a:cs typeface="+mn-cs"/>
+              </a:defRPr>
+            </a:lvl6pPr>
+            <a:lvl7pPr marL="2743200" algn="l" defTabSz="914400" rtl="0" eaLnBrk="1" latinLnBrk="0" hangingPunct="1">
+              <a:defRPr kern="1200">
+                <a:solidFill>
+                  <a:schemeClr val="tx1"/>
+                </a:solidFill>
+                <a:latin typeface="Arial" charset="0"/>
+                <a:ea typeface="+mn-ea"/>
+                <a:cs typeface="+mn-cs"/>
+              </a:defRPr>
+            </a:lvl7pPr>
+            <a:lvl8pPr marL="3200400" algn="l" defTabSz="914400" rtl="0" eaLnBrk="1" latinLnBrk="0" hangingPunct="1">
+              <a:defRPr kern="1200">
+                <a:solidFill>
+                  <a:schemeClr val="tx1"/>
+                </a:solidFill>
+                <a:latin typeface="Arial" charset="0"/>
+                <a:ea typeface="+mn-ea"/>
+                <a:cs typeface="+mn-cs"/>
+              </a:defRPr>
+            </a:lvl8pPr>
+            <a:lvl9pPr marL="3657600" algn="l" defTabSz="914400" rtl="0" eaLnBrk="1" latinLnBrk="0" hangingPunct="1">
+              <a:defRPr kern="1200">
+                <a:solidFill>
+                  <a:schemeClr val="tx1"/>
+                </a:solidFill>
+                <a:latin typeface="Arial" charset="0"/>
+                <a:ea typeface="+mn-ea"/>
+                <a:cs typeface="+mn-cs"/>
+              </a:defRPr>
+            </a:lvl9pPr>
+          </a:lstStyle>
+          <a:p>
+            <a:pPr>
+              <a:defRPr/>
+            </a:pPr>
+            <a:fld id="{8ED25636-9CEA-45F9-9B85-1276420EB31C}" type="slidenum">
+              <a:rPr lang="fr-FR" sz="1200" i="0" smtClean="0"/>
+              <a:pPr>
+                <a:defRPr/>
+              </a:pPr>
+              <a:t>‹N°›</a:t>
             </a:fld>
-            <a:endParaRPr lang="en-US"/>
-          </a:p>
-        </p:txBody>
-      </p:sp>
-      <p:sp>
-        <p:nvSpPr>
-          <p:cNvPr id="3" name="Footer Placeholder 2"/>
-          <p:cNvSpPr>
-            <a:spLocks noGrp="1"/>
-          </p:cNvSpPr>
-          <p:nvPr>
-            <p:ph type="ftr" sz="quarter" idx="11"/>
-          </p:nvPr>
-        </p:nvSpPr>
-        <p:spPr/>
-        <p:txBody>
-          <a:bodyPr/>
-          <a:lstStyle/>
-          <a:p>
-            <a:endParaRPr lang="en-US"/>
-          </a:p>
-        </p:txBody>
-      </p:sp>
-      <p:sp>
-        <p:nvSpPr>
-          <p:cNvPr id="4" name="Slide Number Placeholder 3"/>
-          <p:cNvSpPr>
-            <a:spLocks noGrp="1"/>
-          </p:cNvSpPr>
-          <p:nvPr>
-            <p:ph type="sldNum" sz="quarter" idx="12"/>
-          </p:nvPr>
-        </p:nvSpPr>
-        <p:spPr/>
-        <p:txBody>
-          <a:bodyPr/>
-          <a:lstStyle/>
-          <a:p>
-            <a:fld id="{C1FF6DA9-008F-8B48-92A6-B652298478BF}" type="slidenum">
-              <a:rPr lang="en-US" smtClean="0"/>
-              <a:t>‹#›</a:t>
-            </a:fld>
-            <a:endParaRPr lang="en-US"/>
+            <a:endParaRPr lang="fr-FR" sz="1200" i="0" dirty="0"/>
           </a:p>
         </p:txBody>
       </p:sp>
     </p:spTree>
     <p:extLst>
       <p:ext uri="{BB962C8B-B14F-4D97-AF65-F5344CB8AC3E}">
-        <p14:creationId xmlns:p14="http://schemas.microsoft.com/office/powerpoint/2010/main" val="1212999818"/>
+        <p14:creationId xmlns:p14="http://schemas.microsoft.com/office/powerpoint/2010/main" val="1565466351"/>
       </p:ext>
     </p:extLst>
   </p:cSld>
@@ -2037,8 +2531,8 @@
 </file>
 
 <file path=ppt/slideLayouts/slideLayout8.xml><?xml version="1.0" encoding="utf-8"?>
-<p:sldLayout xmlns:a="http://schemas.openxmlformats.org/drawingml/2006/main" xmlns:r="http://schemas.openxmlformats.org/officeDocument/2006/relationships" xmlns:p="http://schemas.openxmlformats.org/presentationml/2006/main" type="objTx" preserve="1">
-  <p:cSld name="Content with Caption">
+<p:sldLayout xmlns:a="http://schemas.openxmlformats.org/drawingml/2006/main" xmlns:r="http://schemas.openxmlformats.org/officeDocument/2006/relationships" xmlns:p="http://schemas.openxmlformats.org/presentationml/2006/main" preserve="1" userDrawn="1">
+  <p:cSld name="Contenu avec légende">
     <p:spTree>
       <p:nvGrpSpPr>
         <p:cNvPr id="1" name=""/>
@@ -2055,39 +2549,7 @@
       </p:grpSpPr>
       <p:sp>
         <p:nvSpPr>
-          <p:cNvPr id="2" name="Title 1"/>
-          <p:cNvSpPr>
-            <a:spLocks noGrp="1"/>
-          </p:cNvSpPr>
-          <p:nvPr>
-            <p:ph type="title"/>
-          </p:nvPr>
-        </p:nvSpPr>
-        <p:spPr>
-          <a:xfrm>
-            <a:off x="609584" y="273050"/>
-            <a:ext cx="4010983" cy="1162050"/>
-          </a:xfrm>
-        </p:spPr>
-        <p:txBody>
-          <a:bodyPr anchor="b"/>
-          <a:lstStyle>
-            <a:lvl1pPr algn="l">
-              <a:defRPr sz="2000" b="1"/>
-            </a:lvl1pPr>
-          </a:lstStyle>
-          <a:p>
-            <a:r>
-              <a:rPr lang="en-US" smtClean="0"/>
-              <a:t>Click to edit Master title style</a:t>
-            </a:r>
-            <a:endParaRPr lang="en-US"/>
-          </a:p>
-        </p:txBody>
-      </p:sp>
-      <p:sp>
-        <p:nvSpPr>
-          <p:cNvPr id="3" name="Content Placeholder 2"/>
+          <p:cNvPr id="3" name="Espace réservé du contenu 2"/>
           <p:cNvSpPr>
             <a:spLocks noGrp="1"/>
           </p:cNvSpPr>
@@ -2097,8 +2559,8 @@
         </p:nvSpPr>
         <p:spPr>
           <a:xfrm>
-            <a:off x="4766614" y="273050"/>
-            <a:ext cx="6815496" cy="5853113"/>
+            <a:off x="4766733" y="273051"/>
+            <a:ext cx="6815667" cy="5853113"/>
           </a:xfrm>
         </p:spPr>
         <p:txBody>
@@ -2135,44 +2597,43 @@
           <a:p>
             <a:pPr lvl="0"/>
             <a:r>
-              <a:rPr lang="en-US" smtClean="0"/>
-              <a:t>Click to edit Master text styles</a:t>
+              <a:rPr lang="fr-FR"/>
+              <a:t>Modifiez les styles du texte du masque</a:t>
             </a:r>
           </a:p>
           <a:p>
             <a:pPr lvl="1"/>
             <a:r>
-              <a:rPr lang="en-US" smtClean="0"/>
-              <a:t>Second level</a:t>
+              <a:rPr lang="fr-FR"/>
+              <a:t>Deuxième niveau</a:t>
             </a:r>
           </a:p>
           <a:p>
             <a:pPr lvl="2"/>
             <a:r>
-              <a:rPr lang="en-US" smtClean="0"/>
-              <a:t>Third level</a:t>
+              <a:rPr lang="fr-FR"/>
+              <a:t>Troisième niveau</a:t>
             </a:r>
           </a:p>
           <a:p>
             <a:pPr lvl="3"/>
             <a:r>
-              <a:rPr lang="en-US" smtClean="0"/>
-              <a:t>Fourth level</a:t>
+              <a:rPr lang="fr-FR"/>
+              <a:t>Quatrième niveau</a:t>
             </a:r>
           </a:p>
           <a:p>
             <a:pPr lvl="4"/>
             <a:r>
-              <a:rPr lang="en-US" smtClean="0"/>
-              <a:t>Fifth level</a:t>
-            </a:r>
-            <a:endParaRPr lang="en-US"/>
+              <a:rPr lang="fr-FR"/>
+              <a:t>Cinquième niveau</a:t>
+            </a:r>
           </a:p>
         </p:txBody>
       </p:sp>
       <p:sp>
         <p:nvSpPr>
-          <p:cNvPr id="4" name="Text Placeholder 3"/>
+          <p:cNvPr id="4" name="Espace réservé du texte 3"/>
           <p:cNvSpPr>
             <a:spLocks noGrp="1"/>
           </p:cNvSpPr>
@@ -2182,8 +2643,8 @@
         </p:nvSpPr>
         <p:spPr>
           <a:xfrm>
-            <a:off x="609584" y="1435100"/>
-            <a:ext cx="4010983" cy="4691063"/>
+            <a:off x="609601" y="1435101"/>
+            <a:ext cx="4011084" cy="4691063"/>
           </a:xfrm>
         </p:spPr>
         <p:txBody>
@@ -2229,81 +2690,55 @@
           <a:p>
             <a:pPr lvl="0"/>
             <a:r>
-              <a:rPr lang="en-US" smtClean="0"/>
-              <a:t>Click to edit Master text styles</a:t>
+              <a:rPr lang="fr-FR"/>
+              <a:t>Modifiez les styles du texte du masque</a:t>
             </a:r>
           </a:p>
         </p:txBody>
       </p:sp>
       <p:sp>
         <p:nvSpPr>
-          <p:cNvPr id="5" name="Date Placeholder 4"/>
+          <p:cNvPr id="5" name="Espace réservé du numéro de diapositive 2"/>
           <p:cNvSpPr>
             <a:spLocks noGrp="1"/>
           </p:cNvSpPr>
           <p:nvPr>
-            <p:ph type="dt" sz="half" idx="10"/>
+            <p:ph type="sldNum" sz="quarter" idx="10"/>
           </p:nvPr>
         </p:nvSpPr>
         <p:spPr/>
         <p:txBody>
           <a:bodyPr/>
-          <a:lstStyle/>
-          <a:p>
-            <a:fld id="{5BCAD085-E8A6-8845-BD4E-CB4CCA059FC4}" type="datetimeFigureOut">
-              <a:rPr lang="en-US" smtClean="0"/>
-              <a:t>1/27/13</a:t>
+          <a:lstStyle>
+            <a:lvl1pPr algn="r">
+              <a:defRPr sz="1200">
+                <a:solidFill>
+                  <a:schemeClr val="tx1">
+                    <a:tint val="75000"/>
+                  </a:schemeClr>
+                </a:solidFill>
+              </a:defRPr>
+            </a:lvl1pPr>
+          </a:lstStyle>
+          <a:p>
+            <a:pPr>
+              <a:defRPr/>
+            </a:pPr>
+            <a:fld id="{12CC10B9-0A5B-4AE0-93E6-DA6E2C023748}" type="slidenum">
+              <a:rPr lang="fr-FR"/>
+              <a:pPr>
+                <a:defRPr/>
+              </a:pPr>
+              <a:t>‹N°›</a:t>
             </a:fld>
-            <a:endParaRPr lang="en-US"/>
-          </a:p>
-        </p:txBody>
-      </p:sp>
-      <p:sp>
-        <p:nvSpPr>
-          <p:cNvPr id="6" name="Footer Placeholder 5"/>
-          <p:cNvSpPr>
-            <a:spLocks noGrp="1"/>
-          </p:cNvSpPr>
-          <p:nvPr>
-            <p:ph type="ftr" sz="quarter" idx="11"/>
-          </p:nvPr>
-        </p:nvSpPr>
-        <p:spPr/>
-        <p:txBody>
-          <a:bodyPr/>
-          <a:lstStyle/>
-          <a:p>
-            <a:endParaRPr lang="en-US"/>
-          </a:p>
-        </p:txBody>
-      </p:sp>
-      <p:sp>
-        <p:nvSpPr>
-          <p:cNvPr id="7" name="Slide Number Placeholder 6"/>
-          <p:cNvSpPr>
-            <a:spLocks noGrp="1"/>
-          </p:cNvSpPr>
-          <p:nvPr>
-            <p:ph type="sldNum" sz="quarter" idx="12"/>
-          </p:nvPr>
-        </p:nvSpPr>
-        <p:spPr/>
-        <p:txBody>
-          <a:bodyPr/>
-          <a:lstStyle/>
-          <a:p>
-            <a:fld id="{C1FF6DA9-008F-8B48-92A6-B652298478BF}" type="slidenum">
-              <a:rPr lang="en-US" smtClean="0"/>
-              <a:t>‹#›</a:t>
-            </a:fld>
-            <a:endParaRPr lang="en-US"/>
+            <a:endParaRPr lang="fr-FR" dirty="0"/>
           </a:p>
         </p:txBody>
       </p:sp>
     </p:spTree>
     <p:extLst>
       <p:ext uri="{BB962C8B-B14F-4D97-AF65-F5344CB8AC3E}">
-        <p14:creationId xmlns:p14="http://schemas.microsoft.com/office/powerpoint/2010/main" val="1840726560"/>
+        <p14:creationId xmlns:p14="http://schemas.microsoft.com/office/powerpoint/2010/main" val="4002034019"/>
       </p:ext>
     </p:extLst>
   </p:cSld>
@@ -2315,7 +2750,7 @@
 
 <file path=ppt/slideLayouts/slideLayout9.xml><?xml version="1.0" encoding="utf-8"?>
 <p:sldLayout xmlns:a="http://schemas.openxmlformats.org/drawingml/2006/main" xmlns:r="http://schemas.openxmlformats.org/officeDocument/2006/relationships" xmlns:p="http://schemas.openxmlformats.org/presentationml/2006/main" type="picTx" preserve="1">
-  <p:cSld name="Picture with Caption">
+  <p:cSld name="Image avec légende">
     <p:spTree>
       <p:nvGrpSpPr>
         <p:cNvPr id="1" name=""/>
@@ -2332,7 +2767,7 @@
       </p:grpSpPr>
       <p:sp>
         <p:nvSpPr>
-          <p:cNvPr id="2" name="Title 1"/>
+          <p:cNvPr id="2" name="Titre 1"/>
           <p:cNvSpPr>
             <a:spLocks noGrp="1"/>
           </p:cNvSpPr>
@@ -2342,8 +2777,8 @@
         </p:nvSpPr>
         <p:spPr>
           <a:xfrm>
-            <a:off x="2389657" y="4800600"/>
-            <a:ext cx="7315016" cy="566738"/>
+            <a:off x="2389717" y="4800600"/>
+            <a:ext cx="7315200" cy="566738"/>
           </a:xfrm>
         </p:spPr>
         <p:txBody>
@@ -2355,16 +2790,15 @@
           </a:lstStyle>
           <a:p>
             <a:r>
-              <a:rPr lang="en-US" smtClean="0"/>
-              <a:t>Click to edit Master title style</a:t>
-            </a:r>
-            <a:endParaRPr lang="en-US"/>
+              <a:rPr lang="fr-FR"/>
+              <a:t>Modifiez le style du titre</a:t>
+            </a:r>
           </a:p>
         </p:txBody>
       </p:sp>
       <p:sp>
         <p:nvSpPr>
-          <p:cNvPr id="3" name="Picture Placeholder 2"/>
+          <p:cNvPr id="3" name="Espace réservé pour une image  2"/>
           <p:cNvSpPr>
             <a:spLocks noGrp="1"/>
           </p:cNvSpPr>
@@ -2374,8 +2808,8 @@
         </p:nvSpPr>
         <p:spPr>
           <a:xfrm>
-            <a:off x="2389657" y="612775"/>
-            <a:ext cx="7315016" cy="4114800"/>
+            <a:off x="2389717" y="612775"/>
+            <a:ext cx="7315200" cy="4114800"/>
           </a:xfrm>
         </p:spPr>
         <p:txBody>
@@ -2419,13 +2853,14 @@
             </a:lvl9pPr>
           </a:lstStyle>
           <a:p>
-            <a:endParaRPr lang="en-US"/>
+            <a:pPr lvl="0"/>
+            <a:endParaRPr lang="fr-FR" noProof="0" dirty="0"/>
           </a:p>
         </p:txBody>
       </p:sp>
       <p:sp>
         <p:nvSpPr>
-          <p:cNvPr id="4" name="Text Placeholder 3"/>
+          <p:cNvPr id="4" name="Espace réservé du texte 3"/>
           <p:cNvSpPr>
             <a:spLocks noGrp="1"/>
           </p:cNvSpPr>
@@ -2435,8 +2870,8 @@
         </p:nvSpPr>
         <p:spPr>
           <a:xfrm>
-            <a:off x="2389657" y="5367338"/>
-            <a:ext cx="7315016" cy="804862"/>
+            <a:off x="2389717" y="5367338"/>
+            <a:ext cx="7315200" cy="804862"/>
           </a:xfrm>
         </p:spPr>
         <p:txBody>
@@ -2482,81 +2917,55 @@
           <a:p>
             <a:pPr lvl="0"/>
             <a:r>
-              <a:rPr lang="en-US" smtClean="0"/>
-              <a:t>Click to edit Master text styles</a:t>
+              <a:rPr lang="fr-FR"/>
+              <a:t>Modifiez les styles du texte du masque</a:t>
             </a:r>
           </a:p>
         </p:txBody>
       </p:sp>
       <p:sp>
         <p:nvSpPr>
-          <p:cNvPr id="5" name="Date Placeholder 4"/>
+          <p:cNvPr id="5" name="Espace réservé du numéro de diapositive 2"/>
           <p:cNvSpPr>
             <a:spLocks noGrp="1"/>
           </p:cNvSpPr>
           <p:nvPr>
-            <p:ph type="dt" sz="half" idx="10"/>
+            <p:ph type="sldNum" sz="quarter" idx="10"/>
           </p:nvPr>
         </p:nvSpPr>
         <p:spPr/>
         <p:txBody>
           <a:bodyPr/>
-          <a:lstStyle/>
-          <a:p>
-            <a:fld id="{5BCAD085-E8A6-8845-BD4E-CB4CCA059FC4}" type="datetimeFigureOut">
-              <a:rPr lang="en-US" smtClean="0"/>
-              <a:t>1/27/13</a:t>
+          <a:lstStyle>
+            <a:lvl1pPr algn="r">
+              <a:defRPr sz="1200">
+                <a:solidFill>
+                  <a:schemeClr val="tx1">
+                    <a:tint val="75000"/>
+                  </a:schemeClr>
+                </a:solidFill>
+              </a:defRPr>
+            </a:lvl1pPr>
+          </a:lstStyle>
+          <a:p>
+            <a:pPr>
+              <a:defRPr/>
+            </a:pPr>
+            <a:fld id="{41FDD577-7F93-48FD-AD5D-9924CCBB1C41}" type="slidenum">
+              <a:rPr lang="fr-FR"/>
+              <a:pPr>
+                <a:defRPr/>
+              </a:pPr>
+              <a:t>‹N°›</a:t>
             </a:fld>
-            <a:endParaRPr lang="en-US"/>
-          </a:p>
-        </p:txBody>
-      </p:sp>
-      <p:sp>
-        <p:nvSpPr>
-          <p:cNvPr id="6" name="Footer Placeholder 5"/>
-          <p:cNvSpPr>
-            <a:spLocks noGrp="1"/>
-          </p:cNvSpPr>
-          <p:nvPr>
-            <p:ph type="ftr" sz="quarter" idx="11"/>
-          </p:nvPr>
-        </p:nvSpPr>
-        <p:spPr/>
-        <p:txBody>
-          <a:bodyPr/>
-          <a:lstStyle/>
-          <a:p>
-            <a:endParaRPr lang="en-US"/>
-          </a:p>
-        </p:txBody>
-      </p:sp>
-      <p:sp>
-        <p:nvSpPr>
-          <p:cNvPr id="7" name="Slide Number Placeholder 6"/>
-          <p:cNvSpPr>
-            <a:spLocks noGrp="1"/>
-          </p:cNvSpPr>
-          <p:nvPr>
-            <p:ph type="sldNum" sz="quarter" idx="12"/>
-          </p:nvPr>
-        </p:nvSpPr>
-        <p:spPr/>
-        <p:txBody>
-          <a:bodyPr/>
-          <a:lstStyle/>
-          <a:p>
-            <a:fld id="{C1FF6DA9-008F-8B48-92A6-B652298478BF}" type="slidenum">
-              <a:rPr lang="en-US" smtClean="0"/>
-              <a:t>‹#›</a:t>
-            </a:fld>
-            <a:endParaRPr lang="en-US"/>
+            <a:endParaRPr lang="fr-FR" dirty="0"/>
           </a:p>
         </p:txBody>
       </p:sp>
     </p:spTree>
     <p:extLst>
       <p:ext uri="{BB962C8B-B14F-4D97-AF65-F5344CB8AC3E}">
-        <p14:creationId xmlns:p14="http://schemas.microsoft.com/office/powerpoint/2010/main" val="3889236939"/>
+        <p14:creationId xmlns:p14="http://schemas.microsoft.com/office/powerpoint/2010/main" val="2326620426"/>
       </p:ext>
     </p:extLst>
   </p:cSld>
@@ -2567,12 +2976,15 @@
 </file>
 
 <file path=ppt/slideMasters/slideMaster1.xml><?xml version="1.0" encoding="utf-8"?>
-<p:sldMaster xmlns:a="http://schemas.openxmlformats.org/drawingml/2006/main" xmlns:r="http://schemas.openxmlformats.org/officeDocument/2006/relationships" xmlns:p="http://schemas.openxmlformats.org/presentationml/2006/main">
+<p:sldMaster xmlns:a="http://schemas.openxmlformats.org/drawingml/2006/main" xmlns:r="http://schemas.openxmlformats.org/officeDocument/2006/relationships" xmlns:p="http://schemas.openxmlformats.org/presentationml/2006/main" preserve="1">
   <p:cSld>
     <p:bg>
-      <p:bgRef idx="1001">
-        <a:schemeClr val="bg1"/>
-      </p:bgRef>
+      <p:bgPr>
+        <a:solidFill>
+          <a:schemeClr val="bg1"/>
+        </a:solidFill>
+        <a:effectLst/>
+      </p:bgPr>
     </p:bg>
     <p:spTree>
       <p:nvGrpSpPr>
@@ -2590,143 +3002,205 @@
       </p:grpSpPr>
       <p:sp>
         <p:nvSpPr>
-          <p:cNvPr id="2" name="Title Placeholder 1"/>
+          <p:cNvPr id="1026" name="Rectangle 2"/>
           <p:cNvSpPr>
-            <a:spLocks noGrp="1"/>
+            <a:spLocks noGrp="1" noChangeArrowheads="1"/>
           </p:cNvSpPr>
           <p:nvPr>
             <p:ph type="title"/>
           </p:nvPr>
         </p:nvSpPr>
-        <p:spPr>
+        <p:spPr bwMode="auto">
           <a:xfrm>
-            <a:off x="609584" y="274638"/>
-            <a:ext cx="10972525" cy="1143000"/>
+            <a:off x="912284" y="115888"/>
+            <a:ext cx="10752667" cy="1143000"/>
           </a:xfrm>
           <a:prstGeom prst="rect">
             <a:avLst/>
           </a:prstGeom>
+          <a:noFill/>
+          <a:ln>
+            <a:noFill/>
+          </a:ln>
+          <a:extLst>
+            <a:ext uri="{909E8E84-426E-40DD-AFC4-6F175D3DCCD1}">
+              <a14:hiddenFill xmlns:a14="http://schemas.microsoft.com/office/drawing/2010/main">
+                <a:solidFill>
+                  <a:srgbClr val="FFFFFF"/>
+                </a:solidFill>
+              </a14:hiddenFill>
+            </a:ext>
+            <a:ext uri="{91240B29-F687-4F45-9708-019B960494DF}">
+              <a14:hiddenLine xmlns:a14="http://schemas.microsoft.com/office/drawing/2010/main" w="9525">
+                <a:solidFill>
+                  <a:srgbClr val="000000"/>
+                </a:solidFill>
+                <a:miter lim="800000"/>
+                <a:headEnd/>
+                <a:tailEnd/>
+              </a14:hiddenLine>
+            </a:ext>
+          </a:extLst>
         </p:spPr>
         <p:txBody>
-          <a:bodyPr vert="horz" lIns="91440" tIns="45720" rIns="91440" bIns="45720" rtlCol="0" anchor="ctr">
-            <a:normAutofit/>
+          <a:bodyPr vert="horz" wrap="square" lIns="91440" tIns="45720" rIns="91440" bIns="45720" numCol="1" anchor="ctr" anchorCtr="0" compatLnSpc="1">
+            <a:prstTxWarp prst="textNoShape">
+              <a:avLst/>
+            </a:prstTxWarp>
           </a:bodyPr>
           <a:lstStyle/>
           <a:p>
-            <a:r>
-              <a:rPr lang="en-US" smtClean="0"/>
-              <a:t>Click to edit Master title style</a:t>
-            </a:r>
-            <a:endParaRPr lang="en-US"/>
+            <a:pPr lvl="0"/>
+            <a:r>
+              <a:rPr lang="fr-FR"/>
+              <a:t>Cliquez pour modifier le style du titre</a:t>
+            </a:r>
           </a:p>
         </p:txBody>
       </p:sp>
       <p:sp>
         <p:nvSpPr>
-          <p:cNvPr id="3" name="Text Placeholder 2"/>
+          <p:cNvPr id="1027" name="Rectangle 3"/>
           <p:cNvSpPr>
-            <a:spLocks noGrp="1"/>
+            <a:spLocks noGrp="1" noChangeArrowheads="1"/>
           </p:cNvSpPr>
           <p:nvPr>
             <p:ph type="body" idx="1"/>
           </p:nvPr>
         </p:nvSpPr>
-        <p:spPr>
+        <p:spPr bwMode="auto">
           <a:xfrm>
-            <a:off x="609584" y="1600200"/>
-            <a:ext cx="10972525" cy="4525963"/>
+            <a:off x="431800" y="1600201"/>
+            <a:ext cx="11150600" cy="4525963"/>
           </a:xfrm>
           <a:prstGeom prst="rect">
             <a:avLst/>
           </a:prstGeom>
+          <a:noFill/>
+          <a:ln>
+            <a:noFill/>
+          </a:ln>
+          <a:extLst>
+            <a:ext uri="{909E8E84-426E-40DD-AFC4-6F175D3DCCD1}">
+              <a14:hiddenFill xmlns:a14="http://schemas.microsoft.com/office/drawing/2010/main">
+                <a:solidFill>
+                  <a:srgbClr val="FFFFFF"/>
+                </a:solidFill>
+              </a14:hiddenFill>
+            </a:ext>
+            <a:ext uri="{91240B29-F687-4F45-9708-019B960494DF}">
+              <a14:hiddenLine xmlns:a14="http://schemas.microsoft.com/office/drawing/2010/main" w="9525">
+                <a:solidFill>
+                  <a:srgbClr val="000000"/>
+                </a:solidFill>
+                <a:miter lim="800000"/>
+                <a:headEnd/>
+                <a:tailEnd/>
+              </a14:hiddenLine>
+            </a:ext>
+          </a:extLst>
         </p:spPr>
         <p:txBody>
-          <a:bodyPr vert="horz" lIns="91440" tIns="45720" rIns="91440" bIns="45720" rtlCol="0">
-            <a:normAutofit/>
+          <a:bodyPr vert="horz" wrap="square" lIns="91440" tIns="45720" rIns="91440" bIns="45720" numCol="1" anchor="t" anchorCtr="0" compatLnSpc="1">
+            <a:prstTxWarp prst="textNoShape">
+              <a:avLst/>
+            </a:prstTxWarp>
           </a:bodyPr>
           <a:lstStyle/>
           <a:p>
             <a:pPr lvl="0"/>
             <a:r>
-              <a:rPr lang="en-US" smtClean="0"/>
-              <a:t>Click to edit Master text styles</a:t>
+              <a:rPr lang="fr-FR"/>
+              <a:t>Cliquez pour modifier les styles du texte du masque</a:t>
             </a:r>
           </a:p>
           <a:p>
             <a:pPr lvl="1"/>
             <a:r>
-              <a:rPr lang="en-US" smtClean="0"/>
-              <a:t>Second level</a:t>
+              <a:rPr lang="fr-FR"/>
+              <a:t>Deuxième niveau</a:t>
             </a:r>
           </a:p>
           <a:p>
             <a:pPr lvl="2"/>
             <a:r>
-              <a:rPr lang="en-US" smtClean="0"/>
-              <a:t>Third level</a:t>
+              <a:rPr lang="fr-FR"/>
+              <a:t>Troisième niveau</a:t>
             </a:r>
           </a:p>
           <a:p>
             <a:pPr lvl="3"/>
             <a:r>
-              <a:rPr lang="en-US" smtClean="0"/>
-              <a:t>Fourth level</a:t>
+              <a:rPr lang="fr-FR"/>
+              <a:t>Quatrième niveau</a:t>
             </a:r>
           </a:p>
           <a:p>
             <a:pPr lvl="4"/>
             <a:r>
-              <a:rPr lang="en-US" smtClean="0"/>
-              <a:t>Fifth level</a:t>
-            </a:r>
-            <a:endParaRPr lang="en-US"/>
+              <a:rPr lang="fr-FR"/>
+              <a:t>Cinquième niveau</a:t>
+            </a:r>
           </a:p>
         </p:txBody>
       </p:sp>
-      <p:sp>
-        <p:nvSpPr>
-          <p:cNvPr id="4" name="Date Placeholder 3"/>
-          <p:cNvSpPr>
-            <a:spLocks noGrp="1"/>
-          </p:cNvSpPr>
-          <p:nvPr>
-            <p:ph type="dt" sz="half" idx="2"/>
-          </p:nvPr>
-        </p:nvSpPr>
-        <p:spPr>
+      <p:pic>
+        <p:nvPicPr>
+          <p:cNvPr id="1028" name="Picture 25"/>
+          <p:cNvPicPr>
+            <a:picLocks noChangeAspect="1" noChangeArrowheads="1"/>
+          </p:cNvPicPr>
+          <p:nvPr userDrawn="1"/>
+        </p:nvPicPr>
+        <p:blipFill>
+          <a:blip r:embed="rId13">
+            <a:extLst>
+              <a:ext uri="{28A0092B-C50C-407E-A947-70E740481C1C}">
+                <a14:useLocalDpi xmlns:a14="http://schemas.microsoft.com/office/drawing/2010/main" val="0"/>
+              </a:ext>
+            </a:extLst>
+          </a:blip>
+          <a:srcRect/>
+          <a:stretch>
+            <a:fillRect/>
+          </a:stretch>
+        </p:blipFill>
+        <p:spPr bwMode="auto">
           <a:xfrm>
-            <a:off x="609584" y="6356350"/>
-            <a:ext cx="2844728" cy="365125"/>
+            <a:off x="0" y="1341438"/>
+            <a:ext cx="12192000" cy="144462"/>
           </a:xfrm>
           <a:prstGeom prst="rect">
             <a:avLst/>
           </a:prstGeom>
+          <a:noFill/>
+          <a:ln>
+            <a:noFill/>
+          </a:ln>
+          <a:extLst>
+            <a:ext uri="{909E8E84-426E-40DD-AFC4-6F175D3DCCD1}">
+              <a14:hiddenFill xmlns:a14="http://schemas.microsoft.com/office/drawing/2010/main">
+                <a:solidFill>
+                  <a:srgbClr val="FFFFFF"/>
+                </a:solidFill>
+              </a14:hiddenFill>
+            </a:ext>
+            <a:ext uri="{91240B29-F687-4F45-9708-019B960494DF}">
+              <a14:hiddenLine xmlns:a14="http://schemas.microsoft.com/office/drawing/2010/main" w="9525">
+                <a:solidFill>
+                  <a:srgbClr val="000000"/>
+                </a:solidFill>
+                <a:miter lim="800000"/>
+                <a:headEnd/>
+                <a:tailEnd/>
+              </a14:hiddenLine>
+            </a:ext>
+          </a:extLst>
         </p:spPr>
-        <p:txBody>
-          <a:bodyPr vert="horz" lIns="91440" tIns="45720" rIns="91440" bIns="45720" rtlCol="0" anchor="ctr"/>
-          <a:lstStyle>
-            <a:lvl1pPr algn="l">
-              <a:defRPr sz="1200">
-                <a:solidFill>
-                  <a:schemeClr val="tx1">
-                    <a:tint val="75000"/>
-                  </a:schemeClr>
-                </a:solidFill>
-              </a:defRPr>
-            </a:lvl1pPr>
-          </a:lstStyle>
-          <a:p>
-            <a:fld id="{5BCAD085-E8A6-8845-BD4E-CB4CCA059FC4}" type="datetimeFigureOut">
-              <a:rPr lang="en-US" smtClean="0"/>
-              <a:t>1/27/13</a:t>
-            </a:fld>
-            <a:endParaRPr lang="en-US"/>
-          </a:p>
-        </p:txBody>
-      </p:sp>
+      </p:pic>
       <p:sp>
         <p:nvSpPr>
-          <p:cNvPr id="5" name="Footer Placeholder 4"/>
+          <p:cNvPr id="2" name="Espace réservé du pied de page 1"/>
           <p:cNvSpPr>
             <a:spLocks noGrp="1"/>
           </p:cNvSpPr>
@@ -2736,8 +3210,8 @@
         </p:nvSpPr>
         <p:spPr>
           <a:xfrm>
-            <a:off x="4165495" y="6356350"/>
-            <a:ext cx="3860703" cy="365125"/>
+            <a:off x="4165600" y="6356351"/>
+            <a:ext cx="3860800" cy="365125"/>
           </a:xfrm>
           <a:prstGeom prst="rect">
             <a:avLst/>
@@ -2747,7 +3221,7 @@
           <a:bodyPr vert="horz" lIns="91440" tIns="45720" rIns="91440" bIns="45720" rtlCol="0" anchor="ctr"/>
           <a:lstStyle>
             <a:lvl1pPr algn="ctr">
-              <a:defRPr sz="1200">
+              <a:defRPr sz="1200" i="0">
                 <a:solidFill>
                   <a:schemeClr val="tx1">
                     <a:tint val="75000"/>
@@ -2757,13 +3231,16 @@
             </a:lvl1pPr>
           </a:lstStyle>
           <a:p>
-            <a:endParaRPr lang="en-US"/>
+            <a:pPr>
+              <a:defRPr/>
+            </a:pPr>
+            <a:endParaRPr lang="fr-FR" dirty="0"/>
           </a:p>
         </p:txBody>
       </p:sp>
       <p:sp>
         <p:nvSpPr>
-          <p:cNvPr id="6" name="Slide Number Placeholder 5"/>
+          <p:cNvPr id="3" name="Espace réservé du numéro de diapositive 2"/>
           <p:cNvSpPr>
             <a:spLocks noGrp="1"/>
           </p:cNvSpPr>
@@ -2773,8 +3250,8 @@
         </p:nvSpPr>
         <p:spPr>
           <a:xfrm>
-            <a:off x="8737381" y="6356350"/>
-            <a:ext cx="2844728" cy="365125"/>
+            <a:off x="11408834" y="6665913"/>
+            <a:ext cx="814917" cy="201612"/>
           </a:xfrm>
           <a:prstGeom prst="rect">
             <a:avLst/>
@@ -2784,7 +3261,7 @@
           <a:bodyPr vert="horz" lIns="91440" tIns="45720" rIns="91440" bIns="45720" rtlCol="0" anchor="ctr"/>
           <a:lstStyle>
             <a:lvl1pPr algn="r">
-              <a:defRPr sz="1200">
+              <a:defRPr sz="1200" i="0">
                 <a:solidFill>
                   <a:schemeClr val="tx1">
                     <a:tint val="75000"/>
@@ -2794,280 +3271,317 @@
             </a:lvl1pPr>
           </a:lstStyle>
           <a:p>
-            <a:fld id="{C1FF6DA9-008F-8B48-92A6-B652298478BF}" type="slidenum">
-              <a:rPr lang="en-US" smtClean="0"/>
-              <a:t>‹#›</a:t>
+            <a:pPr>
+              <a:defRPr/>
+            </a:pPr>
+            <a:fld id="{E3866BA0-F420-4781-A880-5DE075555499}" type="slidenum">
+              <a:rPr lang="fr-FR"/>
+              <a:pPr>
+                <a:defRPr/>
+              </a:pPr>
+              <a:t>‹N°›</a:t>
             </a:fld>
-            <a:endParaRPr lang="en-US"/>
-          </a:p>
-        </p:txBody>
-      </p:sp>
-      <p:sp>
-        <p:nvSpPr>
-          <p:cNvPr id="2" name="Rectangle 1"/>
-          <p:cNvSpPr/>
-          <p:nvPr/>
-        </p:nvSpPr>
-        <p:spPr>
-          <a:xfrm>
-            <a:off x="0" y="0"/>
-            <a:ext cx="12191695" cy="164592"/>
-          </a:xfrm>
-          <a:prstGeom prst="rect">
-            <a:avLst/>
-          </a:prstGeom>
-          <a:solidFill>
-            <a:srgbClr val="1F4E79"/>
-          </a:solidFill>
-          <a:ln>
-            <a:noFill/>
-          </a:ln>
-        </p:spPr>
-        <p:style>
-          <a:lnRef idx="1">
-            <a:schemeClr val="accent1"/>
-          </a:lnRef>
-          <a:fillRef idx="3">
-            <a:schemeClr val="accent1"/>
-          </a:fillRef>
-          <a:effectRef idx="2">
-            <a:schemeClr val="accent1"/>
-          </a:effectRef>
-          <a:fontRef idx="minor">
-            <a:schemeClr val="lt1"/>
-          </a:fontRef>
-        </p:style>
-        <p:txBody>
-          <a:bodyPr rtlCol="0" anchor="ctr"/>
-          <a:lstStyle/>
-          <a:p>
-            <a:pPr algn="ctr"/>
-          </a:p>
-        </p:txBody>
-      </p:sp>
-      <p:sp>
-        <p:nvSpPr>
-          <p:cNvPr id="3" name="Rectangle 2"/>
-          <p:cNvSpPr/>
-          <p:nvPr/>
-        </p:nvSpPr>
-        <p:spPr>
-          <a:xfrm>
-            <a:off x="457200" y="6446520"/>
-            <a:ext cx="11277295" cy="12700"/>
-          </a:xfrm>
-          <a:prstGeom prst="rect">
-            <a:avLst/>
-          </a:prstGeom>
-          <a:solidFill>
-            <a:srgbClr val="A6A6A6"/>
-          </a:solidFill>
-          <a:ln>
-            <a:noFill/>
-          </a:ln>
-        </p:spPr>
-        <p:style>
-          <a:lnRef idx="1">
-            <a:schemeClr val="accent1"/>
-          </a:lnRef>
-          <a:fillRef idx="3">
-            <a:schemeClr val="accent1"/>
-          </a:fillRef>
-          <a:effectRef idx="2">
-            <a:schemeClr val="accent1"/>
-          </a:effectRef>
-          <a:fontRef idx="minor">
-            <a:schemeClr val="lt1"/>
-          </a:fontRef>
-        </p:style>
-        <p:txBody>
-          <a:bodyPr rtlCol="0" anchor="ctr"/>
-          <a:lstStyle/>
-          <a:p>
-            <a:pPr algn="ctr"/>
+            <a:endParaRPr lang="fr-FR" dirty="0"/>
           </a:p>
         </p:txBody>
       </p:sp>
     </p:spTree>
     <p:extLst>
       <p:ext uri="{BB962C8B-B14F-4D97-AF65-F5344CB8AC3E}">
-        <p14:creationId xmlns:p14="http://schemas.microsoft.com/office/powerpoint/2010/main" val="2209977519"/>
+        <p14:creationId xmlns:p14="http://schemas.microsoft.com/office/powerpoint/2010/main" val="2468050781"/>
       </p:ext>
     </p:extLst>
   </p:cSld>
   <p:clrMap bg1="lt1" tx1="dk1" bg2="lt2" tx2="dk2" accent1="accent1" accent2="accent2" accent3="accent3" accent4="accent4" accent5="accent5" accent6="accent6" hlink="hlink" folHlink="folHlink"/>
   <p:sldLayoutIdLst>
-    <p:sldLayoutId id="2147483649" r:id="rId1"/>
-    <p:sldLayoutId id="2147483650" r:id="rId2"/>
-    <p:sldLayoutId id="2147483651" r:id="rId3"/>
-    <p:sldLayoutId id="2147483652" r:id="rId4"/>
-    <p:sldLayoutId id="2147483653" r:id="rId5"/>
-    <p:sldLayoutId id="2147483654" r:id="rId6"/>
-    <p:sldLayoutId id="2147483655" r:id="rId7"/>
-    <p:sldLayoutId id="2147483656" r:id="rId8"/>
-    <p:sldLayoutId id="2147483657" r:id="rId9"/>
-    <p:sldLayoutId id="2147483658" r:id="rId10"/>
-    <p:sldLayoutId id="2147483659" r:id="rId11"/>
+    <p:sldLayoutId id="2147483765" r:id="rId1"/>
+    <p:sldLayoutId id="2147483766" r:id="rId2"/>
+    <p:sldLayoutId id="2147483767" r:id="rId3"/>
+    <p:sldLayoutId id="2147483768" r:id="rId4"/>
+    <p:sldLayoutId id="2147483769" r:id="rId5"/>
+    <p:sldLayoutId id="2147483770" r:id="rId6"/>
+    <p:sldLayoutId id="2147483771" r:id="rId7"/>
+    <p:sldLayoutId id="2147483772" r:id="rId8"/>
+    <p:sldLayoutId id="2147483773" r:id="rId9"/>
+    <p:sldLayoutId id="2147483774" r:id="rId10"/>
+    <p:sldLayoutId id="2147483775" r:id="rId11"/>
   </p:sldLayoutIdLst>
+  <p:hf hdr="0" ftr="0" dt="0"/>
   <p:txStyles>
     <p:titleStyle>
-      <a:lvl1pPr algn="ctr" defTabSz="457200" rtl="0" eaLnBrk="1" latinLnBrk="0" hangingPunct="1">
+      <a:lvl1pPr algn="ctr" rtl="0" eaLnBrk="0" fontAlgn="base" hangingPunct="0">
         <a:spcBef>
           <a:spcPct val="0"/>
         </a:spcBef>
-        <a:buNone/>
-        <a:defRPr sz="3200" kern="1200">
+        <a:spcAft>
+          <a:spcPct val="0"/>
+        </a:spcAft>
+        <a:defRPr sz="3600">
           <a:solidFill>
-            <a:srgbClr val="1F4E79"/>
+            <a:srgbClr val="136FC3"/>
           </a:solidFill>
           <a:latin typeface="+mj-lt"/>
           <a:ea typeface="+mj-ea"/>
           <a:cs typeface="+mj-cs"/>
         </a:defRPr>
       </a:lvl1pPr>
+      <a:lvl2pPr algn="ctr" rtl="0" eaLnBrk="0" fontAlgn="base" hangingPunct="0">
+        <a:spcBef>
+          <a:spcPct val="0"/>
+        </a:spcBef>
+        <a:spcAft>
+          <a:spcPct val="0"/>
+        </a:spcAft>
+        <a:defRPr sz="3600">
+          <a:solidFill>
+            <a:srgbClr val="136FC3"/>
+          </a:solidFill>
+          <a:latin typeface="Arial" charset="0"/>
+        </a:defRPr>
+      </a:lvl2pPr>
+      <a:lvl3pPr algn="ctr" rtl="0" eaLnBrk="0" fontAlgn="base" hangingPunct="0">
+        <a:spcBef>
+          <a:spcPct val="0"/>
+        </a:spcBef>
+        <a:spcAft>
+          <a:spcPct val="0"/>
+        </a:spcAft>
+        <a:defRPr sz="3600">
+          <a:solidFill>
+            <a:srgbClr val="136FC3"/>
+          </a:solidFill>
+          <a:latin typeface="Arial" charset="0"/>
+        </a:defRPr>
+      </a:lvl3pPr>
+      <a:lvl4pPr algn="ctr" rtl="0" eaLnBrk="0" fontAlgn="base" hangingPunct="0">
+        <a:spcBef>
+          <a:spcPct val="0"/>
+        </a:spcBef>
+        <a:spcAft>
+          <a:spcPct val="0"/>
+        </a:spcAft>
+        <a:defRPr sz="3600">
+          <a:solidFill>
+            <a:srgbClr val="136FC3"/>
+          </a:solidFill>
+          <a:latin typeface="Arial" charset="0"/>
+        </a:defRPr>
+      </a:lvl4pPr>
+      <a:lvl5pPr algn="ctr" rtl="0" eaLnBrk="0" fontAlgn="base" hangingPunct="0">
+        <a:spcBef>
+          <a:spcPct val="0"/>
+        </a:spcBef>
+        <a:spcAft>
+          <a:spcPct val="0"/>
+        </a:spcAft>
+        <a:defRPr sz="3600">
+          <a:solidFill>
+            <a:srgbClr val="136FC3"/>
+          </a:solidFill>
+          <a:latin typeface="Arial" charset="0"/>
+        </a:defRPr>
+      </a:lvl5pPr>
+      <a:lvl6pPr marL="457200" algn="ctr" rtl="0" fontAlgn="base">
+        <a:spcBef>
+          <a:spcPct val="0"/>
+        </a:spcBef>
+        <a:spcAft>
+          <a:spcPct val="0"/>
+        </a:spcAft>
+        <a:defRPr sz="3600">
+          <a:solidFill>
+            <a:srgbClr val="136FC3"/>
+          </a:solidFill>
+          <a:latin typeface="Arial" charset="0"/>
+        </a:defRPr>
+      </a:lvl6pPr>
+      <a:lvl7pPr marL="914400" algn="ctr" rtl="0" fontAlgn="base">
+        <a:spcBef>
+          <a:spcPct val="0"/>
+        </a:spcBef>
+        <a:spcAft>
+          <a:spcPct val="0"/>
+        </a:spcAft>
+        <a:defRPr sz="3600">
+          <a:solidFill>
+            <a:srgbClr val="136FC3"/>
+          </a:solidFill>
+          <a:latin typeface="Arial" charset="0"/>
+        </a:defRPr>
+      </a:lvl7pPr>
+      <a:lvl8pPr marL="1371600" algn="ctr" rtl="0" fontAlgn="base">
+        <a:spcBef>
+          <a:spcPct val="0"/>
+        </a:spcBef>
+        <a:spcAft>
+          <a:spcPct val="0"/>
+        </a:spcAft>
+        <a:defRPr sz="3600">
+          <a:solidFill>
+            <a:srgbClr val="136FC3"/>
+          </a:solidFill>
+          <a:latin typeface="Arial" charset="0"/>
+        </a:defRPr>
+      </a:lvl8pPr>
+      <a:lvl9pPr marL="1828800" algn="ctr" rtl="0" fontAlgn="base">
+        <a:spcBef>
+          <a:spcPct val="0"/>
+        </a:spcBef>
+        <a:spcAft>
+          <a:spcPct val="0"/>
+        </a:spcAft>
+        <a:defRPr sz="3600">
+          <a:solidFill>
+            <a:srgbClr val="136FC3"/>
+          </a:solidFill>
+          <a:latin typeface="Arial" charset="0"/>
+        </a:defRPr>
+      </a:lvl9pPr>
     </p:titleStyle>
     <p:bodyStyle>
-      <a:lvl1pPr marL="342900" indent="-342900" algn="l" defTabSz="457200" rtl="0" eaLnBrk="1" latinLnBrk="0" hangingPunct="1">
+      <a:lvl1pPr marL="342900" indent="-342900" algn="l" rtl="0" eaLnBrk="0" fontAlgn="base" hangingPunct="0">
         <a:spcBef>
           <a:spcPct val="20000"/>
         </a:spcBef>
-        <a:buFont typeface="Arial"/>
+        <a:spcAft>
+          <a:spcPct val="0"/>
+        </a:spcAft>
         <a:buChar char="•"/>
-        <a:defRPr sz="3200" kern="1200">
+        <a:defRPr sz="2400">
           <a:solidFill>
-            <a:schemeClr val="tx1"/>
+            <a:schemeClr val="accent2"/>
           </a:solidFill>
           <a:latin typeface="+mn-lt"/>
           <a:ea typeface="+mn-ea"/>
           <a:cs typeface="+mn-cs"/>
         </a:defRPr>
       </a:lvl1pPr>
-      <a:lvl2pPr marL="742950" indent="-285750" algn="l" defTabSz="457200" rtl="0" eaLnBrk="1" latinLnBrk="0" hangingPunct="1">
+      <a:lvl2pPr marL="742950" indent="-285750" algn="l" rtl="0" eaLnBrk="0" fontAlgn="base" hangingPunct="0">
         <a:spcBef>
           <a:spcPct val="20000"/>
         </a:spcBef>
-        <a:buFont typeface="Arial"/>
+        <a:spcAft>
+          <a:spcPct val="0"/>
+        </a:spcAft>
         <a:buChar char="–"/>
-        <a:defRPr sz="2800" kern="1200">
+        <a:defRPr sz="2000">
           <a:solidFill>
-            <a:schemeClr val="tx1"/>
+            <a:srgbClr val="3366CC"/>
           </a:solidFill>
           <a:latin typeface="+mn-lt"/>
-          <a:ea typeface="+mn-ea"/>
-          <a:cs typeface="+mn-cs"/>
         </a:defRPr>
       </a:lvl2pPr>
-      <a:lvl3pPr marL="1143000" indent="-228600" algn="l" defTabSz="457200" rtl="0" eaLnBrk="1" latinLnBrk="0" hangingPunct="1">
+      <a:lvl3pPr marL="1143000" indent="-228600" algn="l" rtl="0" eaLnBrk="0" fontAlgn="base" hangingPunct="0">
         <a:spcBef>
           <a:spcPct val="20000"/>
         </a:spcBef>
-        <a:buFont typeface="Arial"/>
+        <a:spcAft>
+          <a:spcPct val="0"/>
+        </a:spcAft>
         <a:buChar char="•"/>
-        <a:defRPr sz="2400" kern="1200">
+        <a:defRPr>
           <a:solidFill>
-            <a:schemeClr val="tx1"/>
+            <a:srgbClr val="006699"/>
           </a:solidFill>
           <a:latin typeface="+mn-lt"/>
-          <a:ea typeface="+mn-ea"/>
-          <a:cs typeface="+mn-cs"/>
         </a:defRPr>
       </a:lvl3pPr>
-      <a:lvl4pPr marL="1600200" indent="-228600" algn="l" defTabSz="457200" rtl="0" eaLnBrk="1" latinLnBrk="0" hangingPunct="1">
+      <a:lvl4pPr marL="1600200" indent="-228600" algn="l" rtl="0" eaLnBrk="0" fontAlgn="base" hangingPunct="0">
         <a:spcBef>
           <a:spcPct val="20000"/>
         </a:spcBef>
-        <a:buFont typeface="Arial"/>
+        <a:spcAft>
+          <a:spcPct val="0"/>
+        </a:spcAft>
         <a:buChar char="–"/>
-        <a:defRPr sz="2000" kern="1200">
+        <a:defRPr sz="1600">
           <a:solidFill>
-            <a:schemeClr val="tx1"/>
+            <a:srgbClr val="0099FF"/>
           </a:solidFill>
           <a:latin typeface="+mn-lt"/>
-          <a:ea typeface="+mn-ea"/>
-          <a:cs typeface="+mn-cs"/>
         </a:defRPr>
       </a:lvl4pPr>
-      <a:lvl5pPr marL="2057400" indent="-228600" algn="l" defTabSz="457200" rtl="0" eaLnBrk="1" latinLnBrk="0" hangingPunct="1">
+      <a:lvl5pPr marL="2057400" indent="-228600" algn="l" rtl="0" eaLnBrk="0" fontAlgn="base" hangingPunct="0">
         <a:spcBef>
           <a:spcPct val="20000"/>
         </a:spcBef>
-        <a:buFont typeface="Arial"/>
+        <a:spcAft>
+          <a:spcPct val="0"/>
+        </a:spcAft>
         <a:buChar char="»"/>
-        <a:defRPr sz="2000" kern="1200">
+        <a:defRPr sz="1600">
           <a:solidFill>
-            <a:schemeClr val="tx1"/>
+            <a:srgbClr val="000066"/>
           </a:solidFill>
           <a:latin typeface="+mn-lt"/>
-          <a:ea typeface="+mn-ea"/>
-          <a:cs typeface="+mn-cs"/>
         </a:defRPr>
       </a:lvl5pPr>
-      <a:lvl6pPr marL="2514600" indent="-228600" algn="l" defTabSz="457200" rtl="0" eaLnBrk="1" latinLnBrk="0" hangingPunct="1">
+      <a:lvl6pPr marL="2514600" indent="-228600" algn="l" rtl="0" fontAlgn="base">
         <a:spcBef>
           <a:spcPct val="20000"/>
         </a:spcBef>
-        <a:buFont typeface="Arial"/>
-        <a:buChar char="•"/>
-        <a:defRPr sz="2000" kern="1200">
+        <a:spcAft>
+          <a:spcPct val="0"/>
+        </a:spcAft>
+        <a:buChar char="»"/>
+        <a:defRPr sz="1600">
           <a:solidFill>
-            <a:schemeClr val="tx1"/>
+            <a:srgbClr val="000066"/>
           </a:solidFill>
           <a:latin typeface="+mn-lt"/>
-          <a:ea typeface="+mn-ea"/>
-          <a:cs typeface="+mn-cs"/>
         </a:defRPr>
       </a:lvl6pPr>
-      <a:lvl7pPr marL="2971800" indent="-228600" algn="l" defTabSz="457200" rtl="0" eaLnBrk="1" latinLnBrk="0" hangingPunct="1">
+      <a:lvl7pPr marL="2971800" indent="-228600" algn="l" rtl="0" fontAlgn="base">
         <a:spcBef>
           <a:spcPct val="20000"/>
         </a:spcBef>
-        <a:buFont typeface="Arial"/>
-        <a:buChar char="•"/>
-        <a:defRPr sz="2000" kern="1200">
+        <a:spcAft>
+          <a:spcPct val="0"/>
+        </a:spcAft>
+        <a:buChar char="»"/>
+        <a:defRPr sz="1600">
           <a:solidFill>
-            <a:schemeClr val="tx1"/>
+            <a:srgbClr val="000066"/>
           </a:solidFill>
           <a:latin typeface="+mn-lt"/>
-          <a:ea typeface="+mn-ea"/>
-          <a:cs typeface="+mn-cs"/>
         </a:defRPr>
       </a:lvl7pPr>
-      <a:lvl8pPr marL="3429000" indent="-228600" algn="l" defTabSz="457200" rtl="0" eaLnBrk="1" latinLnBrk="0" hangingPunct="1">
+      <a:lvl8pPr marL="3429000" indent="-228600" algn="l" rtl="0" fontAlgn="base">
         <a:spcBef>
           <a:spcPct val="20000"/>
         </a:spcBef>
-        <a:buFont typeface="Arial"/>
-        <a:buChar char="•"/>
-        <a:defRPr sz="2000" kern="1200">
+        <a:spcAft>
+          <a:spcPct val="0"/>
+        </a:spcAft>
+        <a:buChar char="»"/>
+        <a:defRPr sz="1600">
           <a:solidFill>
-            <a:schemeClr val="tx1"/>
+            <a:srgbClr val="000066"/>
           </a:solidFill>
           <a:latin typeface="+mn-lt"/>
-          <a:ea typeface="+mn-ea"/>
-          <a:cs typeface="+mn-cs"/>
         </a:defRPr>
       </a:lvl8pPr>
-      <a:lvl9pPr marL="3886200" indent="-228600" algn="l" defTabSz="457200" rtl="0" eaLnBrk="1" latinLnBrk="0" hangingPunct="1">
+      <a:lvl9pPr marL="3886200" indent="-228600" algn="l" rtl="0" fontAlgn="base">
         <a:spcBef>
           <a:spcPct val="20000"/>
         </a:spcBef>
-        <a:buFont typeface="Arial"/>
-        <a:buChar char="•"/>
-        <a:defRPr sz="2000" kern="1200">
+        <a:spcAft>
+          <a:spcPct val="0"/>
+        </a:spcAft>
+        <a:buChar char="»"/>
+        <a:defRPr sz="1600">
           <a:solidFill>
-            <a:schemeClr val="tx1"/>
+            <a:srgbClr val="000066"/>
           </a:solidFill>
           <a:latin typeface="+mn-lt"/>
-          <a:ea typeface="+mn-ea"/>
-          <a:cs typeface="+mn-cs"/>
         </a:defRPr>
       </a:lvl9pPr>
     </p:bodyStyle>
     <p:otherStyle>
       <a:defPPr>
-        <a:defRPr lang="en-US"/>
+        <a:defRPr lang="fr-FR"/>
       </a:defPPr>
-      <a:lvl1pPr marL="0" algn="l" defTabSz="457200" rtl="0" eaLnBrk="1" latinLnBrk="0" hangingPunct="1">
+      <a:lvl1pPr marL="0" algn="l" defTabSz="914400" rtl="0" eaLnBrk="1" latinLnBrk="0" hangingPunct="1">
         <a:defRPr sz="1800" kern="1200">
           <a:solidFill>
             <a:schemeClr val="tx1"/>
@@ -3077,7 +3591,7 @@
           <a:cs typeface="+mn-cs"/>
         </a:defRPr>
       </a:lvl1pPr>
-      <a:lvl2pPr marL="457200" algn="l" defTabSz="457200" rtl="0" eaLnBrk="1" latinLnBrk="0" hangingPunct="1">
+      <a:lvl2pPr marL="457200" algn="l" defTabSz="914400" rtl="0" eaLnBrk="1" latinLnBrk="0" hangingPunct="1">
         <a:defRPr sz="1800" kern="1200">
           <a:solidFill>
             <a:schemeClr val="tx1"/>
@@ -3087,7 +3601,7 @@
           <a:cs typeface="+mn-cs"/>
         </a:defRPr>
       </a:lvl2pPr>
-      <a:lvl3pPr marL="914400" algn="l" defTabSz="457200" rtl="0" eaLnBrk="1" latinLnBrk="0" hangingPunct="1">
+      <a:lvl3pPr marL="914400" algn="l" defTabSz="914400" rtl="0" eaLnBrk="1" latinLnBrk="0" hangingPunct="1">
         <a:defRPr sz="1800" kern="1200">
           <a:solidFill>
             <a:schemeClr val="tx1"/>
@@ -3097,7 +3611,7 @@
           <a:cs typeface="+mn-cs"/>
         </a:defRPr>
       </a:lvl3pPr>
-      <a:lvl4pPr marL="1371600" algn="l" defTabSz="457200" rtl="0" eaLnBrk="1" latinLnBrk="0" hangingPunct="1">
+      <a:lvl4pPr marL="1371600" algn="l" defTabSz="914400" rtl="0" eaLnBrk="1" latinLnBrk="0" hangingPunct="1">
         <a:defRPr sz="1800" kern="1200">
           <a:solidFill>
             <a:schemeClr val="tx1"/>
@@ -3107,7 +3621,7 @@
           <a:cs typeface="+mn-cs"/>
         </a:defRPr>
       </a:lvl4pPr>
-      <a:lvl5pPr marL="1828800" algn="l" defTabSz="457200" rtl="0" eaLnBrk="1" latinLnBrk="0" hangingPunct="1">
+      <a:lvl5pPr marL="1828800" algn="l" defTabSz="914400" rtl="0" eaLnBrk="1" latinLnBrk="0" hangingPunct="1">
         <a:defRPr sz="1800" kern="1200">
           <a:solidFill>
             <a:schemeClr val="tx1"/>
@@ -3117,7 +3631,7 @@
           <a:cs typeface="+mn-cs"/>
         </a:defRPr>
       </a:lvl5pPr>
-      <a:lvl6pPr marL="2286000" algn="l" defTabSz="457200" rtl="0" eaLnBrk="1" latinLnBrk="0" hangingPunct="1">
+      <a:lvl6pPr marL="2286000" algn="l" defTabSz="914400" rtl="0" eaLnBrk="1" latinLnBrk="0" hangingPunct="1">
         <a:defRPr sz="1800" kern="1200">
           <a:solidFill>
             <a:schemeClr val="tx1"/>
@@ -3127,7 +3641,7 @@
           <a:cs typeface="+mn-cs"/>
         </a:defRPr>
       </a:lvl6pPr>
-      <a:lvl7pPr marL="2743200" algn="l" defTabSz="457200" rtl="0" eaLnBrk="1" latinLnBrk="0" hangingPunct="1">
+      <a:lvl7pPr marL="2743200" algn="l" defTabSz="914400" rtl="0" eaLnBrk="1" latinLnBrk="0" hangingPunct="1">
         <a:defRPr sz="1800" kern="1200">
           <a:solidFill>
             <a:schemeClr val="tx1"/>
@@ -3137,7 +3651,7 @@
           <a:cs typeface="+mn-cs"/>
         </a:defRPr>
       </a:lvl7pPr>
-      <a:lvl8pPr marL="3200400" algn="l" defTabSz="457200" rtl="0" eaLnBrk="1" latinLnBrk="0" hangingPunct="1">
+      <a:lvl8pPr marL="3200400" algn="l" defTabSz="914400" rtl="0" eaLnBrk="1" latinLnBrk="0" hangingPunct="1">
         <a:defRPr sz="1800" kern="1200">
           <a:solidFill>
             <a:schemeClr val="tx1"/>
@@ -3147,7 +3661,7 @@
           <a:cs typeface="+mn-cs"/>
         </a:defRPr>
       </a:lvl8pPr>
-      <a:lvl9pPr marL="3657600" algn="l" defTabSz="457200" rtl="0" eaLnBrk="1" latinLnBrk="0" hangingPunct="1">
+      <a:lvl9pPr marL="3657600" algn="l" defTabSz="914400" rtl="0" eaLnBrk="1" latinLnBrk="0" hangingPunct="1">
         <a:defRPr sz="1800" kern="1200">
           <a:solidFill>
             <a:schemeClr val="tx1"/>
@@ -3162,117 +3676,887 @@
 </p:sldMaster>
 </file>
 
+<file path=ppt/slides/slide1.xml><?xml version="1.0" encoding="utf-8"?>
+<p:sld xmlns:a="http://schemas.openxmlformats.org/drawingml/2006/main" xmlns:r="http://schemas.openxmlformats.org/officeDocument/2006/relationships" xmlns:p="http://schemas.openxmlformats.org/presentationml/2006/main">
+  <p:cSld>
+    <p:spTree>
+      <p:nvGrpSpPr>
+        <p:cNvPr id="1" name=""/>
+        <p:cNvGrpSpPr/>
+        <p:nvPr/>
+      </p:nvGrpSpPr>
+      <p:grpSpPr>
+        <a:xfrm>
+          <a:off x="0" y="0"/>
+          <a:ext cx="0" cy="0"/>
+          <a:chOff x="0" y="0"/>
+          <a:chExt cx="0" cy="0"/>
+        </a:xfrm>
+      </p:grpSpPr>
+      <p:sp>
+        <p:nvSpPr>
+          <p:cNvPr id="3" name="Rectangle 2"/>
+          <p:cNvSpPr/>
+          <p:nvPr/>
+        </p:nvSpPr>
+        <p:spPr>
+          <a:xfrm>
+            <a:off x="767408" y="332656"/>
+            <a:ext cx="10513168" cy="4031873"/>
+          </a:xfrm>
+          <a:prstGeom prst="rect">
+            <a:avLst/>
+          </a:prstGeom>
+          <a:solidFill>
+            <a:schemeClr val="bg1"/>
+          </a:solidFill>
+        </p:spPr>
+        <p:txBody>
+          <a:bodyPr wrap="square">
+            <a:spAutoFit/>
+          </a:bodyPr>
+          <a:lstStyle/>
+          <a:p>
+            <a:pPr algn="ctr">
+              <a:defRPr/>
+            </a:pPr>
+            <a:endParaRPr lang="fr-FR" sz="3200" b="1" i="0" dirty="0">
+              <a:ln w="1905"/>
+              <a:gradFill>
+                <a:gsLst>
+                  <a:gs pos="0">
+                    <a:schemeClr val="accent6">
+                      <a:shade val="20000"/>
+                      <a:satMod val="200000"/>
+                    </a:schemeClr>
+                  </a:gs>
+                  <a:gs pos="78000">
+                    <a:schemeClr val="accent6">
+                      <a:tint val="90000"/>
+                      <a:shade val="89000"/>
+                      <a:satMod val="220000"/>
+                    </a:schemeClr>
+                  </a:gs>
+                  <a:gs pos="100000">
+                    <a:schemeClr val="accent6">
+                      <a:tint val="12000"/>
+                      <a:satMod val="255000"/>
+                    </a:schemeClr>
+                  </a:gs>
+                </a:gsLst>
+                <a:lin ang="5400000"/>
+              </a:gradFill>
+              <a:effectLst>
+                <a:innerShdw blurRad="69850" dist="43180" dir="5400000">
+                  <a:srgbClr val="000000">
+                    <a:alpha val="65000"/>
+                  </a:srgbClr>
+                </a:innerShdw>
+              </a:effectLst>
+            </a:endParaRPr>
+          </a:p>
+          <a:p>
+            <a:pPr algn="ctr">
+              <a:defRPr/>
+            </a:pPr>
+            <a:r>
+              <a:rPr lang="fr-FR" sz="4000" b="1" i="0" dirty="0">
+                <a:ln w="1905"/>
+                <a:gradFill>
+                  <a:gsLst>
+                    <a:gs pos="0">
+                      <a:schemeClr val="accent6">
+                        <a:shade val="20000"/>
+                        <a:satMod val="200000"/>
+                      </a:schemeClr>
+                    </a:gs>
+                    <a:gs pos="78000">
+                      <a:schemeClr val="accent6">
+                        <a:tint val="90000"/>
+                        <a:shade val="89000"/>
+                        <a:satMod val="220000"/>
+                      </a:schemeClr>
+                    </a:gs>
+                    <a:gs pos="100000">
+                      <a:schemeClr val="accent6">
+                        <a:tint val="12000"/>
+                        <a:satMod val="255000"/>
+                      </a:schemeClr>
+                    </a:gs>
+                  </a:gsLst>
+                  <a:lin ang="5400000"/>
+                </a:gradFill>
+                <a:effectLst>
+                  <a:innerShdw blurRad="69850" dist="43180" dir="5400000">
+                    <a:srgbClr val="000000">
+                      <a:alpha val="65000"/>
+                    </a:srgbClr>
+                  </a:innerShdw>
+                </a:effectLst>
+              </a:rPr>
+              <a:t>Item 224 – Hypertension artérielle de l'adulte : causes endocriniennes</a:t>
+            </a:r>
+          </a:p>
+          <a:p>
+            <a:pPr algn="ctr">
+              <a:defRPr/>
+            </a:pPr>
+            <a:br>
+              <a:rPr lang="fr-FR" sz="4000" b="1" i="0" dirty="0">
+                <a:ln w="1905"/>
+                <a:gradFill>
+                  <a:gsLst>
+                    <a:gs pos="0">
+                      <a:schemeClr val="accent6">
+                        <a:shade val="20000"/>
+                        <a:satMod val="200000"/>
+                      </a:schemeClr>
+                    </a:gs>
+                    <a:gs pos="78000">
+                      <a:schemeClr val="accent6">
+                        <a:tint val="90000"/>
+                        <a:shade val="89000"/>
+                        <a:satMod val="220000"/>
+                      </a:schemeClr>
+                    </a:gs>
+                    <a:gs pos="100000">
+                      <a:schemeClr val="accent6">
+                        <a:tint val="12000"/>
+                        <a:satMod val="255000"/>
+                      </a:schemeClr>
+                    </a:gs>
+                  </a:gsLst>
+                  <a:lin ang="5400000"/>
+                </a:gradFill>
+                <a:effectLst>
+                  <a:innerShdw blurRad="69850" dist="43180" dir="5400000">
+                    <a:srgbClr val="000000">
+                      <a:alpha val="65000"/>
+                    </a:srgbClr>
+                  </a:innerShdw>
+                </a:effectLst>
+              </a:rPr>
+            </a:br>
+            <a:r>
+              <a:rPr lang="fr-FR" sz="4000" b="1" i="0" dirty="0">
+                <a:ln w="1905"/>
+                <a:gradFill>
+                  <a:gsLst>
+                    <a:gs pos="0">
+                      <a:schemeClr val="accent6">
+                        <a:shade val="20000"/>
+                        <a:satMod val="200000"/>
+                      </a:schemeClr>
+                    </a:gs>
+                    <a:gs pos="78000">
+                      <a:schemeClr val="accent6">
+                        <a:tint val="90000"/>
+                        <a:shade val="89000"/>
+                        <a:satMod val="220000"/>
+                      </a:schemeClr>
+                    </a:gs>
+                    <a:gs pos="100000">
+                      <a:schemeClr val="accent6">
+                        <a:tint val="12000"/>
+                        <a:satMod val="255000"/>
+                      </a:schemeClr>
+                    </a:gs>
+                  </a:gsLst>
+                  <a:lin ang="5400000"/>
+                </a:gradFill>
+                <a:effectLst>
+                  <a:innerShdw blurRad="69850" dist="43180" dir="5400000">
+                    <a:srgbClr val="000000">
+                      <a:alpha val="65000"/>
+                    </a:srgbClr>
+                  </a:innerShdw>
+                </a:effectLst>
+              </a:rPr>
+              <a:t>Etudiants de DFASM2 </a:t>
+            </a:r>
+            <a:endParaRPr lang="fr-FR" sz="3200" b="1" i="0" dirty="0">
+              <a:ln w="1905"/>
+              <a:gradFill>
+                <a:gsLst>
+                  <a:gs pos="0">
+                    <a:schemeClr val="accent6">
+                      <a:shade val="20000"/>
+                      <a:satMod val="200000"/>
+                    </a:schemeClr>
+                  </a:gs>
+                  <a:gs pos="78000">
+                    <a:schemeClr val="accent6">
+                      <a:tint val="90000"/>
+                      <a:shade val="89000"/>
+                      <a:satMod val="220000"/>
+                    </a:schemeClr>
+                  </a:gs>
+                  <a:gs pos="100000">
+                    <a:schemeClr val="accent6">
+                      <a:tint val="12000"/>
+                      <a:satMod val="255000"/>
+                    </a:schemeClr>
+                  </a:gs>
+                </a:gsLst>
+                <a:lin ang="5400000"/>
+              </a:gradFill>
+              <a:effectLst>
+                <a:innerShdw blurRad="69850" dist="43180" dir="5400000">
+                  <a:srgbClr val="000000">
+                    <a:alpha val="65000"/>
+                  </a:srgbClr>
+                </a:innerShdw>
+              </a:effectLst>
+            </a:endParaRPr>
+          </a:p>
+          <a:p>
+            <a:pPr algn="ctr">
+              <a:defRPr/>
+            </a:pPr>
+            <a:endParaRPr lang="fr-FR" sz="3200" b="1" i="0" dirty="0">
+              <a:ln w="1905"/>
+              <a:gradFill>
+                <a:gsLst>
+                  <a:gs pos="0">
+                    <a:schemeClr val="accent6">
+                      <a:shade val="20000"/>
+                      <a:satMod val="200000"/>
+                    </a:schemeClr>
+                  </a:gs>
+                  <a:gs pos="78000">
+                    <a:schemeClr val="accent6">
+                      <a:tint val="90000"/>
+                      <a:shade val="89000"/>
+                      <a:satMod val="220000"/>
+                    </a:schemeClr>
+                  </a:gs>
+                  <a:gs pos="100000">
+                    <a:schemeClr val="accent6">
+                      <a:tint val="12000"/>
+                      <a:satMod val="255000"/>
+                    </a:schemeClr>
+                  </a:gs>
+                </a:gsLst>
+                <a:lin ang="5400000"/>
+              </a:gradFill>
+              <a:effectLst>
+                <a:innerShdw blurRad="69850" dist="43180" dir="5400000">
+                  <a:srgbClr val="000000">
+                    <a:alpha val="65000"/>
+                  </a:srgbClr>
+                </a:innerShdw>
+              </a:effectLst>
+            </a:endParaRPr>
+          </a:p>
+          <a:p>
+            <a:pPr algn="ctr">
+              <a:defRPr/>
+            </a:pPr>
+            <a:endParaRPr lang="fr-FR" sz="3200" b="1" i="0" dirty="0">
+              <a:ln w="1905"/>
+              <a:gradFill>
+                <a:gsLst>
+                  <a:gs pos="0">
+                    <a:schemeClr val="accent6">
+                      <a:shade val="20000"/>
+                      <a:satMod val="200000"/>
+                    </a:schemeClr>
+                  </a:gs>
+                  <a:gs pos="78000">
+                    <a:schemeClr val="accent6">
+                      <a:tint val="90000"/>
+                      <a:shade val="89000"/>
+                      <a:satMod val="220000"/>
+                    </a:schemeClr>
+                  </a:gs>
+                  <a:gs pos="100000">
+                    <a:schemeClr val="accent6">
+                      <a:tint val="12000"/>
+                      <a:satMod val="255000"/>
+                    </a:schemeClr>
+                  </a:gs>
+                </a:gsLst>
+                <a:lin ang="5400000"/>
+              </a:gradFill>
+              <a:effectLst>
+                <a:innerShdw blurRad="69850" dist="43180" dir="5400000">
+                  <a:srgbClr val="000000">
+                    <a:alpha val="65000"/>
+                  </a:srgbClr>
+                </a:innerShdw>
+              </a:effectLst>
+            </a:endParaRPr>
+          </a:p>
+        </p:txBody>
+      </p:sp>
+      <p:pic>
+        <p:nvPicPr>
+          <p:cNvPr id="15362" name="Picture 5" descr="http://www.math.univ-brest.fr/archives/recherche/presentation/UBO-Hor.jpg"/>
+          <p:cNvPicPr>
+            <a:picLocks noChangeAspect="1" noChangeArrowheads="1"/>
+          </p:cNvPicPr>
+          <p:nvPr/>
+        </p:nvPicPr>
+        <p:blipFill>
+          <a:blip r:embed="rId3" cstate="print">
+            <a:extLst>
+              <a:ext uri="{28A0092B-C50C-407E-A947-70E740481C1C}">
+                <a14:useLocalDpi xmlns:a14="http://schemas.microsoft.com/office/drawing/2010/main" val="0"/>
+              </a:ext>
+            </a:extLst>
+          </a:blip>
+          <a:srcRect t="8949"/>
+          <a:stretch>
+            <a:fillRect/>
+          </a:stretch>
+        </p:blipFill>
+        <p:spPr bwMode="auto">
+          <a:xfrm>
+            <a:off x="191344" y="5526345"/>
+            <a:ext cx="2165350" cy="1316037"/>
+          </a:xfrm>
+          <a:prstGeom prst="rect">
+            <a:avLst/>
+          </a:prstGeom>
+          <a:noFill/>
+          <a:ln>
+            <a:noFill/>
+          </a:ln>
+          <a:extLst>
+            <a:ext uri="{909E8E84-426E-40DD-AFC4-6F175D3DCCD1}">
+              <a14:hiddenFill xmlns:a14="http://schemas.microsoft.com/office/drawing/2010/main">
+                <a:solidFill>
+                  <a:srgbClr val="FFFFFF"/>
+                </a:solidFill>
+              </a14:hiddenFill>
+            </a:ext>
+            <a:ext uri="{91240B29-F687-4F45-9708-019B960494DF}">
+              <a14:hiddenLine xmlns:a14="http://schemas.microsoft.com/office/drawing/2010/main" w="9525">
+                <a:solidFill>
+                  <a:srgbClr val="000000"/>
+                </a:solidFill>
+                <a:miter lim="800000"/>
+                <a:headEnd/>
+                <a:tailEnd/>
+              </a14:hiddenLine>
+            </a:ext>
+          </a:extLst>
+        </p:spPr>
+      </p:pic>
+      <p:sp>
+        <p:nvSpPr>
+          <p:cNvPr id="2" name="Espace réservé du numéro de diapositive 1"/>
+          <p:cNvSpPr>
+            <a:spLocks noGrp="1"/>
+          </p:cNvSpPr>
+          <p:nvPr>
+            <p:ph type="sldNum" sz="quarter" idx="10"/>
+          </p:nvPr>
+        </p:nvSpPr>
+        <p:spPr/>
+        <p:txBody>
+          <a:bodyPr/>
+          <a:lstStyle/>
+          <a:p>
+            <a:pPr>
+              <a:defRPr/>
+            </a:pPr>
+            <a:fld id="{03CCA820-6AC9-4569-8BEF-19DC993619DE}" type="slidenum">
+              <a:rPr lang="fr-FR"/>
+              <a:pPr>
+                <a:defRPr/>
+              </a:pPr>
+              <a:t>1</a:t>
+            </a:fld>
+            <a:endParaRPr lang="fr-FR" dirty="0"/>
+          </a:p>
+        </p:txBody>
+      </p:sp>
+      <p:pic>
+        <p:nvPicPr>
+          <p:cNvPr id="78850" name="Picture 2" descr="Centre Hospitalier Régional et Universitaire de Brest - CHRU Brest"/>
+          <p:cNvPicPr>
+            <a:picLocks noChangeAspect="1" noChangeArrowheads="1"/>
+          </p:cNvPicPr>
+          <p:nvPr/>
+        </p:nvPicPr>
+        <p:blipFill>
+          <a:blip r:embed="rId4">
+            <a:extLst>
+              <a:ext uri="{28A0092B-C50C-407E-A947-70E740481C1C}">
+                <a14:useLocalDpi xmlns:a14="http://schemas.microsoft.com/office/drawing/2010/main" val="0"/>
+              </a:ext>
+            </a:extLst>
+          </a:blip>
+          <a:srcRect/>
+          <a:stretch>
+            <a:fillRect/>
+          </a:stretch>
+        </p:blipFill>
+        <p:spPr bwMode="auto">
+          <a:xfrm>
+            <a:off x="7961081" y="5717198"/>
+            <a:ext cx="4208391" cy="922387"/>
+          </a:xfrm>
+          <a:prstGeom prst="rect">
+            <a:avLst/>
+          </a:prstGeom>
+          <a:noFill/>
+          <a:extLst>
+            <a:ext uri="{909E8E84-426E-40DD-AFC4-6F175D3DCCD1}">
+              <a14:hiddenFill xmlns:a14="http://schemas.microsoft.com/office/drawing/2010/main">
+                <a:solidFill>
+                  <a:srgbClr val="FFFFFF"/>
+                </a:solidFill>
+              </a14:hiddenFill>
+            </a:ext>
+          </a:extLst>
+        </p:spPr>
+      </p:pic>
+      <p:sp>
+        <p:nvSpPr>
+          <p:cNvPr id="5" name="Rectangle 4"/>
+          <p:cNvSpPr/>
+          <p:nvPr/>
+        </p:nvSpPr>
+        <p:spPr>
+          <a:xfrm>
+            <a:off x="2135560" y="3789041"/>
+            <a:ext cx="7992888" cy="1938992"/>
+          </a:xfrm>
+          <a:prstGeom prst="rect">
+            <a:avLst/>
+          </a:prstGeom>
+        </p:spPr>
+        <p:txBody>
+          <a:bodyPr wrap="square">
+            <a:spAutoFit/>
+          </a:bodyPr>
+          <a:lstStyle/>
+          <a:p>
+            <a:pPr algn="ctr">
+              <a:defRPr/>
+            </a:pPr>
+            <a:r>
+              <a:rPr lang="fr-FR" sz="2000" b="1" i="0" dirty="0">
+                <a:ln w="1905"/>
+                <a:gradFill>
+                  <a:gsLst>
+                    <a:gs pos="0">
+                      <a:schemeClr val="accent6">
+                        <a:shade val="20000"/>
+                        <a:satMod val="200000"/>
+                      </a:schemeClr>
+                    </a:gs>
+                    <a:gs pos="78000">
+                      <a:schemeClr val="accent6">
+                        <a:tint val="90000"/>
+                        <a:shade val="89000"/>
+                        <a:satMod val="220000"/>
+                      </a:schemeClr>
+                    </a:gs>
+                    <a:gs pos="100000">
+                      <a:schemeClr val="accent6">
+                        <a:tint val="12000"/>
+                        <a:satMod val="255000"/>
+                      </a:schemeClr>
+                    </a:gs>
+                  </a:gsLst>
+                  <a:lin ang="5400000"/>
+                </a:gradFill>
+                <a:effectLst>
+                  <a:innerShdw blurRad="69850" dist="43180" dir="5400000">
+                    <a:srgbClr val="000000">
+                      <a:alpha val="65000"/>
+                    </a:srgbClr>
+                  </a:innerShdw>
+                </a:effectLst>
+              </a:rPr>
+              <a:t>THUILLIER PHILIPPE  (PU-PH)</a:t>
+            </a:r>
+          </a:p>
+          <a:p>
+            <a:pPr algn="ctr">
+              <a:defRPr/>
+            </a:pPr>
+            <a:endParaRPr lang="fr-FR" sz="2000" b="1" i="0" dirty="0">
+              <a:ln w="1905"/>
+              <a:gradFill>
+                <a:gsLst>
+                  <a:gs pos="0">
+                    <a:schemeClr val="accent6">
+                      <a:shade val="20000"/>
+                      <a:satMod val="200000"/>
+                    </a:schemeClr>
+                  </a:gs>
+                  <a:gs pos="78000">
+                    <a:schemeClr val="accent6">
+                      <a:tint val="90000"/>
+                      <a:shade val="89000"/>
+                      <a:satMod val="220000"/>
+                    </a:schemeClr>
+                  </a:gs>
+                  <a:gs pos="100000">
+                    <a:schemeClr val="accent6">
+                      <a:tint val="12000"/>
+                      <a:satMod val="255000"/>
+                    </a:schemeClr>
+                  </a:gs>
+                </a:gsLst>
+                <a:lin ang="5400000"/>
+              </a:gradFill>
+              <a:effectLst>
+                <a:innerShdw blurRad="69850" dist="43180" dir="5400000">
+                  <a:srgbClr val="000000">
+                    <a:alpha val="65000"/>
+                  </a:srgbClr>
+                </a:innerShdw>
+              </a:effectLst>
+            </a:endParaRPr>
+          </a:p>
+          <a:p>
+            <a:pPr algn="ctr">
+              <a:defRPr/>
+            </a:pPr>
+            <a:r>
+              <a:rPr lang="fr-FR" sz="2000" b="1" i="0" dirty="0">
+                <a:ln w="1905"/>
+                <a:gradFill>
+                  <a:gsLst>
+                    <a:gs pos="0">
+                      <a:schemeClr val="accent6">
+                        <a:shade val="20000"/>
+                        <a:satMod val="200000"/>
+                      </a:schemeClr>
+                    </a:gs>
+                    <a:gs pos="78000">
+                      <a:schemeClr val="accent6">
+                        <a:tint val="90000"/>
+                        <a:shade val="89000"/>
+                        <a:satMod val="220000"/>
+                      </a:schemeClr>
+                    </a:gs>
+                    <a:gs pos="100000">
+                      <a:schemeClr val="accent6">
+                        <a:tint val="12000"/>
+                        <a:satMod val="255000"/>
+                      </a:schemeClr>
+                    </a:gs>
+                  </a:gsLst>
+                  <a:lin ang="5400000"/>
+                </a:gradFill>
+                <a:effectLst>
+                  <a:innerShdw blurRad="69850" dist="43180" dir="5400000">
+                    <a:srgbClr val="000000">
+                      <a:alpha val="65000"/>
+                    </a:srgbClr>
+                  </a:innerShdw>
+                </a:effectLst>
+              </a:rPr>
+              <a:t>Service d’Endocrinologie, Diabétologie et Maladies Métaboliques du CHRU de Brest</a:t>
+            </a:r>
+          </a:p>
+          <a:p>
+            <a:pPr algn="ctr">
+              <a:defRPr/>
+            </a:pPr>
+            <a:endParaRPr lang="fr-FR" sz="2000" b="1" i="0" dirty="0">
+              <a:ln w="1905"/>
+              <a:gradFill>
+                <a:gsLst>
+                  <a:gs pos="0">
+                    <a:schemeClr val="accent6">
+                      <a:shade val="20000"/>
+                      <a:satMod val="200000"/>
+                    </a:schemeClr>
+                  </a:gs>
+                  <a:gs pos="78000">
+                    <a:schemeClr val="accent6">
+                      <a:tint val="90000"/>
+                      <a:shade val="89000"/>
+                      <a:satMod val="220000"/>
+                    </a:schemeClr>
+                  </a:gs>
+                  <a:gs pos="100000">
+                    <a:schemeClr val="accent6">
+                      <a:tint val="12000"/>
+                      <a:satMod val="255000"/>
+                    </a:schemeClr>
+                  </a:gs>
+                </a:gsLst>
+                <a:lin ang="5400000"/>
+              </a:gradFill>
+              <a:effectLst>
+                <a:innerShdw blurRad="69850" dist="43180" dir="5400000">
+                  <a:srgbClr val="000000">
+                    <a:alpha val="65000"/>
+                  </a:srgbClr>
+                </a:innerShdw>
+              </a:effectLst>
+            </a:endParaRPr>
+          </a:p>
+          <a:p>
+            <a:pPr algn="ctr">
+              <a:defRPr/>
+            </a:pPr>
+            <a:r>
+              <a:rPr lang="fr-FR" sz="2000" b="1" i="0" dirty="0">
+                <a:ln w="1905"/>
+                <a:gradFill>
+                  <a:gsLst>
+                    <a:gs pos="0">
+                      <a:schemeClr val="accent6">
+                        <a:shade val="20000"/>
+                        <a:satMod val="200000"/>
+                      </a:schemeClr>
+                    </a:gs>
+                    <a:gs pos="78000">
+                      <a:schemeClr val="accent6">
+                        <a:tint val="90000"/>
+                        <a:shade val="89000"/>
+                        <a:satMod val="220000"/>
+                      </a:schemeClr>
+                    </a:gs>
+                    <a:gs pos="100000">
+                      <a:schemeClr val="accent6">
+                        <a:tint val="12000"/>
+                        <a:satMod val="255000"/>
+                      </a:schemeClr>
+                    </a:gs>
+                  </a:gsLst>
+                  <a:lin ang="5400000"/>
+                </a:gradFill>
+                <a:effectLst>
+                  <a:innerShdw blurRad="69850" dist="43180" dir="5400000">
+                    <a:srgbClr val="000000">
+                      <a:alpha val="65000"/>
+                    </a:srgbClr>
+                  </a:innerShdw>
+                </a:effectLst>
+              </a:rPr>
+              <a:t>philippe.thuillier@chu-brest.fr</a:t>
+            </a:r>
+          </a:p>
+        </p:txBody>
+      </p:sp>
+    </p:spTree>
+  </p:cSld>
+  <p:clrMapOvr>
+    <a:masterClrMapping/>
+  </p:clrMapOvr>
+</p:sld>
+</file>
+
+<file path=ppt/slides/slide2.xml><?xml version="1.0" encoding="utf-8"?>
+<p:sld xmlns:a="http://schemas.openxmlformats.org/drawingml/2006/main" xmlns:r="http://schemas.openxmlformats.org/officeDocument/2006/relationships" xmlns:p="http://schemas.openxmlformats.org/presentationml/2006/main">
+  <p:cSld>
+    <p:spTree>
+      <p:nvGrpSpPr>
+        <p:cNvPr id="1" name=""/>
+        <p:cNvGrpSpPr/>
+        <p:nvPr/>
+      </p:nvGrpSpPr>
+      <p:grpSpPr>
+        <a:xfrm>
+          <a:off x="0" y="0"/>
+          <a:ext cx="0" cy="0"/>
+          <a:chOff x="0" y="0"/>
+          <a:chExt cx="0" cy="0"/>
+        </a:xfrm>
+      </p:grpSpPr>
+      <p:sp>
+        <p:nvSpPr>
+          <p:cNvPr id="2" name="Espace réservé du contenu 1">
+            <a:extLst>
+              <a:ext uri="{FF2B5EF4-FFF2-40B4-BE49-F238E27FC236}">
+                <a16:creationId xmlns:a16="http://schemas.microsoft.com/office/drawing/2014/main" id="{5A2AF792-83CB-433A-9684-E56BA17CA369}"/>
+              </a:ext>
+            </a:extLst>
+          </p:cNvPr>
+          <p:cNvSpPr>
+            <a:spLocks noGrp="1"/>
+          </p:cNvSpPr>
+          <p:nvPr>
+            <p:ph idx="1"/>
+          </p:nvPr>
+        </p:nvSpPr>
+        <p:spPr/>
+        <p:txBody>
+          <a:bodyPr/>
+          <a:lstStyle/>
+          <a:p>
+            <a:r>
+              <a:rPr lang="fr-FR" dirty="0"/>
+              <a:t>Quel bilan biologique réaliser dans un premier temps: cocher la(es) bonne(s) réponse(s) </a:t>
+            </a:r>
+          </a:p>
+          <a:p>
+            <a:pPr lvl="1"/>
+            <a:r>
+              <a:rPr lang="fr-FR" dirty="0"/>
+              <a:t>A SDHA</a:t>
+            </a:r>
+          </a:p>
+          <a:p>
+            <a:pPr lvl="1"/>
+            <a:r>
+              <a:rPr lang="fr-FR" b="1" dirty="0"/>
+              <a:t>B Testostérone</a:t>
+            </a:r>
+          </a:p>
+          <a:p>
+            <a:pPr lvl="1"/>
+            <a:r>
+              <a:rPr lang="fr-FR" b="1" dirty="0"/>
+              <a:t>C FSH, LH</a:t>
+            </a:r>
+          </a:p>
+          <a:p>
+            <a:pPr lvl="1"/>
+            <a:r>
+              <a:rPr lang="fr-FR" b="1" dirty="0"/>
+              <a:t>D Estradiol</a:t>
+            </a:r>
+          </a:p>
+          <a:p>
+            <a:pPr lvl="1"/>
+            <a:r>
+              <a:rPr lang="fr-FR" b="1" dirty="0"/>
+              <a:t>E HCG</a:t>
+            </a:r>
+          </a:p>
+          <a:p>
+            <a:endParaRPr lang="fr-FR" dirty="0"/>
+          </a:p>
+        </p:txBody>
+      </p:sp>
+      <p:sp>
+        <p:nvSpPr>
+          <p:cNvPr id="3" name="Titre 2">
+            <a:extLst>
+              <a:ext uri="{FF2B5EF4-FFF2-40B4-BE49-F238E27FC236}">
+                <a16:creationId xmlns:a16="http://schemas.microsoft.com/office/drawing/2014/main" id="{AE117AC1-B6FF-921D-54CC-205BA449E523}"/>
+              </a:ext>
+            </a:extLst>
+          </p:cNvPr>
+          <p:cNvSpPr>
+            <a:spLocks noGrp="1"/>
+          </p:cNvSpPr>
+          <p:nvPr>
+            <p:ph type="title"/>
+          </p:nvPr>
+        </p:nvSpPr>
+        <p:spPr/>
+        <p:txBody>
+          <a:bodyPr/>
+          <a:lstStyle/>
+          <a:p>
+            <a:r>
+              <a:rPr lang="fr-FR" dirty="0"/>
+              <a:t>Question</a:t>
+            </a:r>
+          </a:p>
+        </p:txBody>
+      </p:sp>
+      <p:sp>
+        <p:nvSpPr>
+          <p:cNvPr id="4" name="Espace réservé du numéro de diapositive 3">
+            <a:extLst>
+              <a:ext uri="{FF2B5EF4-FFF2-40B4-BE49-F238E27FC236}">
+                <a16:creationId xmlns:a16="http://schemas.microsoft.com/office/drawing/2014/main" id="{16FC8F0D-21CF-8E07-4F46-4953C23A81EA}"/>
+              </a:ext>
+            </a:extLst>
+          </p:cNvPr>
+          <p:cNvSpPr>
+            <a:spLocks noGrp="1"/>
+          </p:cNvSpPr>
+          <p:nvPr>
+            <p:ph type="sldNum" sz="quarter" idx="10"/>
+          </p:nvPr>
+        </p:nvSpPr>
+        <p:spPr/>
+        <p:txBody>
+          <a:bodyPr/>
+          <a:lstStyle/>
+          <a:p>
+            <a:pPr>
+              <a:defRPr/>
+            </a:pPr>
+            <a:fld id="{6BB614EE-82A8-47AD-879D-EF635CDEA14C}" type="slidenum">
+              <a:rPr lang="fr-FR" smtClean="0"/>
+              <a:pPr>
+                <a:defRPr/>
+              </a:pPr>
+              <a:t>2</a:t>
+            </a:fld>
+            <a:endParaRPr lang="fr-FR" dirty="0"/>
+          </a:p>
+        </p:txBody>
+      </p:sp>
+    </p:spTree>
+    <p:extLst>
+      <p:ext uri="{BB962C8B-B14F-4D97-AF65-F5344CB8AC3E}">
+        <p14:creationId xmlns:p14="http://schemas.microsoft.com/office/powerpoint/2010/main" val="351805304"/>
+      </p:ext>
+    </p:extLst>
+  </p:cSld>
+  <p:clrMapOvr>
+    <a:masterClrMapping/>
+  </p:clrMapOvr>
+</p:sld>
+</file>
+
 <file path=ppt/theme/theme1.xml><?xml version="1.0" encoding="utf-8"?>
-<a:theme xmlns:a="http://schemas.openxmlformats.org/drawingml/2006/main" name="Office Theme">
+<a:theme xmlns:a="http://schemas.openxmlformats.org/drawingml/2006/main" name="Conception personnalisée">
   <a:themeElements>
-    <a:clrScheme name="Office">
+    <a:clrScheme name="Conception personnalisée 1">
       <a:dk1>
-        <a:sysClr val="windowText" lastClr="000000"/>
+        <a:srgbClr val="000000"/>
       </a:dk1>
       <a:lt1>
-        <a:sysClr val="window" lastClr="FFFFFF"/>
+        <a:srgbClr val="FFFFFF"/>
       </a:lt1>
       <a:dk2>
-        <a:srgbClr val="1F497D"/>
+        <a:srgbClr val="000000"/>
       </a:dk2>
       <a:lt2>
-        <a:srgbClr val="EEECE1"/>
+        <a:srgbClr val="808080"/>
       </a:lt2>
       <a:accent1>
-        <a:srgbClr val="4F81BD"/>
+        <a:srgbClr val="BBE0E3"/>
       </a:accent1>
       <a:accent2>
-        <a:srgbClr val="C0504D"/>
+        <a:srgbClr val="333399"/>
       </a:accent2>
       <a:accent3>
-        <a:srgbClr val="9BBB59"/>
+        <a:srgbClr val="FFFFFF"/>
       </a:accent3>
       <a:accent4>
-        <a:srgbClr val="8064A2"/>
+        <a:srgbClr val="000000"/>
       </a:accent4>
       <a:accent5>
-        <a:srgbClr val="4BACC6"/>
+        <a:srgbClr val="DAEDEF"/>
       </a:accent5>
       <a:accent6>
-        <a:srgbClr val="F79646"/>
+        <a:srgbClr val="2D2D8A"/>
       </a:accent6>
       <a:hlink>
-        <a:srgbClr val="0000FF"/>
+        <a:srgbClr val="009999"/>
       </a:hlink>
       <a:folHlink>
-        <a:srgbClr val="800080"/>
+        <a:srgbClr val="99CC00"/>
       </a:folHlink>
     </a:clrScheme>
-    <a:fontScheme name="Office">
+    <a:fontScheme name="Conception personnalisée">
       <a:majorFont>
-        <a:latin typeface="Calibri"/>
+        <a:latin typeface="Arial"/>
         <a:ea typeface=""/>
         <a:cs typeface=""/>
-        <a:font script="Jpan" typeface="ＭＳ Ｐゴシック"/>
-        <a:font script="Hang" typeface="맑은 고딕"/>
-        <a:font script="Hans" typeface="宋体"/>
-        <a:font script="Hant" typeface="新細明體"/>
-        <a:font script="Arab" typeface="Times New Roman"/>
-        <a:font script="Hebr" typeface="Times New Roman"/>
-        <a:font script="Thai" typeface="Angsana New"/>
-        <a:font script="Ethi" typeface="Nyala"/>
-        <a:font script="Beng" typeface="Vrinda"/>
-        <a:font script="Gujr" typeface="Shruti"/>
-        <a:font script="Khmr" typeface="MoolBoran"/>
-        <a:font script="Knda" typeface="Tunga"/>
-        <a:font script="Guru" typeface="Raavi"/>
-        <a:font script="Cans" typeface="Euphemia"/>
-        <a:font script="Cher" typeface="Plantagenet Cherokee"/>
-        <a:font script="Yiii" typeface="Microsoft Yi Baiti"/>
-        <a:font script="Tibt" typeface="Microsoft Himalaya"/>
-        <a:font script="Thaa" typeface="MV Boli"/>
-        <a:font script="Deva" typeface="Mangal"/>
-        <a:font script="Telu" typeface="Gautami"/>
-        <a:font script="Taml" typeface="Latha"/>
-        <a:font script="Syrc" typeface="Estrangelo Edessa"/>
-        <a:font script="Orya" typeface="Kalinga"/>
-        <a:font script="Mlym" typeface="Kartika"/>
-        <a:font script="Laoo" typeface="DokChampa"/>
-        <a:font script="Sinh" typeface="Iskoola Pota"/>
-        <a:font script="Mong" typeface="Mongolian Baiti"/>
-        <a:font script="Viet" typeface="Times New Roman"/>
-        <a:font script="Uigh" typeface="Microsoft Uighur"/>
-        <a:font script="Geor" typeface="Sylfaen"/>
       </a:majorFont>
       <a:minorFont>
-        <a:latin typeface="Calibri"/>
+        <a:latin typeface="Arial"/>
         <a:ea typeface=""/>
         <a:cs typeface=""/>
-        <a:font script="Jpan" typeface="ＭＳ Ｐゴシック"/>
-        <a:font script="Hang" typeface="맑은 고딕"/>
-        <a:font script="Hans" typeface="宋体"/>
-        <a:font script="Hant" typeface="新細明體"/>
-        <a:font script="Arab" typeface="Arial"/>
-        <a:font script="Hebr" typeface="Arial"/>
-        <a:font script="Thai" typeface="Cordia New"/>
-        <a:font script="Ethi" typeface="Nyala"/>
-        <a:font script="Beng" typeface="Vrinda"/>
-        <a:font script="Gujr" typeface="Shruti"/>
-        <a:font script="Khmr" typeface="DaunPenh"/>
-        <a:font script="Knda" typeface="Tunga"/>
-        <a:font script="Guru" typeface="Raavi"/>
-        <a:font script="Cans" typeface="Euphemia"/>
-        <a:font script="Cher" typeface="Plantagenet Cherokee"/>
-        <a:font script="Yiii" typeface="Microsoft Yi Baiti"/>
-        <a:font script="Tibt" typeface="Microsoft Himalaya"/>
-        <a:font script="Thaa" typeface="MV Boli"/>
-        <a:font script="Deva" typeface="Mangal"/>
-        <a:font script="Telu" typeface="Gautami"/>
-        <a:font script="Taml" typeface="Latha"/>
-        <a:font script="Syrc" typeface="Estrangelo Edessa"/>
-        <a:font script="Orya" typeface="Kalinga"/>
-        <a:font script="Mlym" typeface="Kartika"/>
-        <a:font script="Laoo" typeface="DokChampa"/>
-        <a:font script="Sinh" typeface="Iskoola Pota"/>
-        <a:font script="Mong" typeface="Mongolian Baiti"/>
-        <a:font script="Viet" typeface="Arial"/>
-        <a:font script="Uigh" typeface="Microsoft Uighur"/>
-        <a:font script="Geor" typeface="Sylfaen"/>
       </a:minorFont>
     </a:fontScheme>
     <a:fmtScheme name="Office">
@@ -3307,16 +4591,20 @@
           <a:gsLst>
             <a:gs pos="0">
               <a:schemeClr val="phClr">
-                <a:tint val="100000"/>
-                <a:shade val="100000"/>
+                <a:shade val="51000"/>
+                <a:satMod val="130000"/>
+              </a:schemeClr>
+            </a:gs>
+            <a:gs pos="80000">
+              <a:schemeClr val="phClr">
+                <a:shade val="93000"/>
                 <a:satMod val="130000"/>
               </a:schemeClr>
             </a:gs>
             <a:gs pos="100000">
               <a:schemeClr val="phClr">
-                <a:tint val="50000"/>
-                <a:shade val="100000"/>
-                <a:satMod val="350000"/>
+                <a:shade val="94000"/>
+                <a:satMod val="135000"/>
               </a:schemeClr>
             </a:gs>
           </a:gsLst>
@@ -3438,46 +4726,1066 @@
       </a:bgFillStyleLst>
     </a:fmtScheme>
   </a:themeElements>
-  <a:objectDefaults>
-    <a:spDef>
-      <a:spPr/>
-      <a:bodyPr/>
-      <a:lstStyle/>
-      <a:style>
-        <a:lnRef idx="1">
-          <a:schemeClr val="accent1"/>
-        </a:lnRef>
-        <a:fillRef idx="3">
-          <a:schemeClr val="accent1"/>
-        </a:fillRef>
-        <a:effectRef idx="2">
-          <a:schemeClr val="accent1"/>
-        </a:effectRef>
-        <a:fontRef idx="minor">
-          <a:schemeClr val="lt1"/>
-        </a:fontRef>
-      </a:style>
-    </a:spDef>
-    <a:lnDef>
-      <a:spPr/>
-      <a:bodyPr/>
-      <a:lstStyle/>
-      <a:style>
-        <a:lnRef idx="2">
-          <a:schemeClr val="accent1"/>
-        </a:lnRef>
-        <a:fillRef idx="0">
-          <a:schemeClr val="accent1"/>
-        </a:fillRef>
-        <a:effectRef idx="1">
-          <a:schemeClr val="accent1"/>
-        </a:effectRef>
-        <a:fontRef idx="minor">
-          <a:schemeClr val="tx1"/>
-        </a:fontRef>
-      </a:style>
-    </a:lnDef>
-  </a:objectDefaults>
+  <a:objectDefaults/>
+  <a:extraClrSchemeLst>
+    <a:extraClrScheme>
+      <a:clrScheme name="Conception personnalisée 1">
+        <a:dk1>
+          <a:srgbClr val="000000"/>
+        </a:dk1>
+        <a:lt1>
+          <a:srgbClr val="FFFFFF"/>
+        </a:lt1>
+        <a:dk2>
+          <a:srgbClr val="000000"/>
+        </a:dk2>
+        <a:lt2>
+          <a:srgbClr val="808080"/>
+        </a:lt2>
+        <a:accent1>
+          <a:srgbClr val="BBE0E3"/>
+        </a:accent1>
+        <a:accent2>
+          <a:srgbClr val="333399"/>
+        </a:accent2>
+        <a:accent3>
+          <a:srgbClr val="FFFFFF"/>
+        </a:accent3>
+        <a:accent4>
+          <a:srgbClr val="000000"/>
+        </a:accent4>
+        <a:accent5>
+          <a:srgbClr val="DAEDEF"/>
+        </a:accent5>
+        <a:accent6>
+          <a:srgbClr val="2D2D8A"/>
+        </a:accent6>
+        <a:hlink>
+          <a:srgbClr val="009999"/>
+        </a:hlink>
+        <a:folHlink>
+          <a:srgbClr val="99CC00"/>
+        </a:folHlink>
+      </a:clrScheme>
+      <a:clrMap bg1="lt1" tx1="dk1" bg2="lt2" tx2="dk2" accent1="accent1" accent2="accent2" accent3="accent3" accent4="accent4" accent5="accent5" accent6="accent6" hlink="hlink" folHlink="folHlink"/>
+    </a:extraClrScheme>
+    <a:extraClrScheme>
+      <a:clrScheme name="Conception personnalisée 2">
+        <a:dk1>
+          <a:srgbClr val="000000"/>
+        </a:dk1>
+        <a:lt1>
+          <a:srgbClr val="FFFFFF"/>
+        </a:lt1>
+        <a:dk2>
+          <a:srgbClr val="000000"/>
+        </a:dk2>
+        <a:lt2>
+          <a:srgbClr val="969696"/>
+        </a:lt2>
+        <a:accent1>
+          <a:srgbClr val="FBDF53"/>
+        </a:accent1>
+        <a:accent2>
+          <a:srgbClr val="FF9966"/>
+        </a:accent2>
+        <a:accent3>
+          <a:srgbClr val="FFFFFF"/>
+        </a:accent3>
+        <a:accent4>
+          <a:srgbClr val="000000"/>
+        </a:accent4>
+        <a:accent5>
+          <a:srgbClr val="FDECB3"/>
+        </a:accent5>
+        <a:accent6>
+          <a:srgbClr val="E78A5C"/>
+        </a:accent6>
+        <a:hlink>
+          <a:srgbClr val="CC3300"/>
+        </a:hlink>
+        <a:folHlink>
+          <a:srgbClr val="996600"/>
+        </a:folHlink>
+      </a:clrScheme>
+      <a:clrMap bg1="lt1" tx1="dk1" bg2="lt2" tx2="dk2" accent1="accent1" accent2="accent2" accent3="accent3" accent4="accent4" accent5="accent5" accent6="accent6" hlink="hlink" folHlink="folHlink"/>
+    </a:extraClrScheme>
+    <a:extraClrScheme>
+      <a:clrScheme name="Conception personnalisée 3">
+        <a:dk1>
+          <a:srgbClr val="000000"/>
+        </a:dk1>
+        <a:lt1>
+          <a:srgbClr val="FFFFFF"/>
+        </a:lt1>
+        <a:dk2>
+          <a:srgbClr val="000000"/>
+        </a:dk2>
+        <a:lt2>
+          <a:srgbClr val="808080"/>
+        </a:lt2>
+        <a:accent1>
+          <a:srgbClr val="99CCFF"/>
+        </a:accent1>
+        <a:accent2>
+          <a:srgbClr val="CCCCFF"/>
+        </a:accent2>
+        <a:accent3>
+          <a:srgbClr val="FFFFFF"/>
+        </a:accent3>
+        <a:accent4>
+          <a:srgbClr val="000000"/>
+        </a:accent4>
+        <a:accent5>
+          <a:srgbClr val="CAE2FF"/>
+        </a:accent5>
+        <a:accent6>
+          <a:srgbClr val="B9B9E7"/>
+        </a:accent6>
+        <a:hlink>
+          <a:srgbClr val="3333CC"/>
+        </a:hlink>
+        <a:folHlink>
+          <a:srgbClr val="AF67FF"/>
+        </a:folHlink>
+      </a:clrScheme>
+      <a:clrMap bg1="lt1" tx1="dk1" bg2="lt2" tx2="dk2" accent1="accent1" accent2="accent2" accent3="accent3" accent4="accent4" accent5="accent5" accent6="accent6" hlink="hlink" folHlink="folHlink"/>
+    </a:extraClrScheme>
+    <a:extraClrScheme>
+      <a:clrScheme name="Conception personnalisée 4">
+        <a:dk1>
+          <a:srgbClr val="000000"/>
+        </a:dk1>
+        <a:lt1>
+          <a:srgbClr val="DEF6F1"/>
+        </a:lt1>
+        <a:dk2>
+          <a:srgbClr val="000000"/>
+        </a:dk2>
+        <a:lt2>
+          <a:srgbClr val="969696"/>
+        </a:lt2>
+        <a:accent1>
+          <a:srgbClr val="FFFFFF"/>
+        </a:accent1>
+        <a:accent2>
+          <a:srgbClr val="8DC6FF"/>
+        </a:accent2>
+        <a:accent3>
+          <a:srgbClr val="ECFAF7"/>
+        </a:accent3>
+        <a:accent4>
+          <a:srgbClr val="000000"/>
+        </a:accent4>
+        <a:accent5>
+          <a:srgbClr val="FFFFFF"/>
+        </a:accent5>
+        <a:accent6>
+          <a:srgbClr val="7FB3E7"/>
+        </a:accent6>
+        <a:hlink>
+          <a:srgbClr val="0066CC"/>
+        </a:hlink>
+        <a:folHlink>
+          <a:srgbClr val="00A800"/>
+        </a:folHlink>
+      </a:clrScheme>
+      <a:clrMap bg1="lt1" tx1="dk1" bg2="lt2" tx2="dk2" accent1="accent1" accent2="accent2" accent3="accent3" accent4="accent4" accent5="accent5" accent6="accent6" hlink="hlink" folHlink="folHlink"/>
+    </a:extraClrScheme>
+    <a:extraClrScheme>
+      <a:clrScheme name="Conception personnalisée 5">
+        <a:dk1>
+          <a:srgbClr val="000000"/>
+        </a:dk1>
+        <a:lt1>
+          <a:srgbClr val="FFFFD9"/>
+        </a:lt1>
+        <a:dk2>
+          <a:srgbClr val="000000"/>
+        </a:dk2>
+        <a:lt2>
+          <a:srgbClr val="777777"/>
+        </a:lt2>
+        <a:accent1>
+          <a:srgbClr val="FFFFF7"/>
+        </a:accent1>
+        <a:accent2>
+          <a:srgbClr val="33CCCC"/>
+        </a:accent2>
+        <a:accent3>
+          <a:srgbClr val="FFFFE9"/>
+        </a:accent3>
+        <a:accent4>
+          <a:srgbClr val="000000"/>
+        </a:accent4>
+        <a:accent5>
+          <a:srgbClr val="FFFFFA"/>
+        </a:accent5>
+        <a:accent6>
+          <a:srgbClr val="2DB9B9"/>
+        </a:accent6>
+        <a:hlink>
+          <a:srgbClr val="FF5050"/>
+        </a:hlink>
+        <a:folHlink>
+          <a:srgbClr val="FF9900"/>
+        </a:folHlink>
+      </a:clrScheme>
+      <a:clrMap bg1="lt1" tx1="dk1" bg2="lt2" tx2="dk2" accent1="accent1" accent2="accent2" accent3="accent3" accent4="accent4" accent5="accent5" accent6="accent6" hlink="hlink" folHlink="folHlink"/>
+    </a:extraClrScheme>
+    <a:extraClrScheme>
+      <a:clrScheme name="Conception personnalisée 6">
+        <a:dk1>
+          <a:srgbClr val="005A58"/>
+        </a:dk1>
+        <a:lt1>
+          <a:srgbClr val="FFFFFF"/>
+        </a:lt1>
+        <a:dk2>
+          <a:srgbClr val="008080"/>
+        </a:dk2>
+        <a:lt2>
+          <a:srgbClr val="FFFF99"/>
+        </a:lt2>
+        <a:accent1>
+          <a:srgbClr val="006462"/>
+        </a:accent1>
+        <a:accent2>
+          <a:srgbClr val="6D6FC7"/>
+        </a:accent2>
+        <a:accent3>
+          <a:srgbClr val="AAC0C0"/>
+        </a:accent3>
+        <a:accent4>
+          <a:srgbClr val="DADADA"/>
+        </a:accent4>
+        <a:accent5>
+          <a:srgbClr val="AAB8B7"/>
+        </a:accent5>
+        <a:accent6>
+          <a:srgbClr val="6264B4"/>
+        </a:accent6>
+        <a:hlink>
+          <a:srgbClr val="00FFFF"/>
+        </a:hlink>
+        <a:folHlink>
+          <a:srgbClr val="00FF00"/>
+        </a:folHlink>
+      </a:clrScheme>
+      <a:clrMap bg1="dk2" tx1="lt1" bg2="dk1" tx2="lt2" accent1="accent1" accent2="accent2" accent3="accent3" accent4="accent4" accent5="accent5" accent6="accent6" hlink="hlink" folHlink="folHlink"/>
+    </a:extraClrScheme>
+    <a:extraClrScheme>
+      <a:clrScheme name="Conception personnalisée 7">
+        <a:dk1>
+          <a:srgbClr val="5C1F00"/>
+        </a:dk1>
+        <a:lt1>
+          <a:srgbClr val="FFFFFF"/>
+        </a:lt1>
+        <a:dk2>
+          <a:srgbClr val="800000"/>
+        </a:dk2>
+        <a:lt2>
+          <a:srgbClr val="DFD293"/>
+        </a:lt2>
+        <a:accent1>
+          <a:srgbClr val="CC3300"/>
+        </a:accent1>
+        <a:accent2>
+          <a:srgbClr val="BE7960"/>
+        </a:accent2>
+        <a:accent3>
+          <a:srgbClr val="C0AAAA"/>
+        </a:accent3>
+        <a:accent4>
+          <a:srgbClr val="DADADA"/>
+        </a:accent4>
+        <a:accent5>
+          <a:srgbClr val="E2ADAA"/>
+        </a:accent5>
+        <a:accent6>
+          <a:srgbClr val="AC6D56"/>
+        </a:accent6>
+        <a:hlink>
+          <a:srgbClr val="FFFF99"/>
+        </a:hlink>
+        <a:folHlink>
+          <a:srgbClr val="D3A219"/>
+        </a:folHlink>
+      </a:clrScheme>
+      <a:clrMap bg1="dk2" tx1="lt1" bg2="dk1" tx2="lt2" accent1="accent1" accent2="accent2" accent3="accent3" accent4="accent4" accent5="accent5" accent6="accent6" hlink="hlink" folHlink="folHlink"/>
+    </a:extraClrScheme>
+    <a:extraClrScheme>
+      <a:clrScheme name="Conception personnalisée 8">
+        <a:dk1>
+          <a:srgbClr val="003366"/>
+        </a:dk1>
+        <a:lt1>
+          <a:srgbClr val="FFFFFF"/>
+        </a:lt1>
+        <a:dk2>
+          <a:srgbClr val="000099"/>
+        </a:dk2>
+        <a:lt2>
+          <a:srgbClr val="CCFFFF"/>
+        </a:lt2>
+        <a:accent1>
+          <a:srgbClr val="3366CC"/>
+        </a:accent1>
+        <a:accent2>
+          <a:srgbClr val="00B000"/>
+        </a:accent2>
+        <a:accent3>
+          <a:srgbClr val="AAAACA"/>
+        </a:accent3>
+        <a:accent4>
+          <a:srgbClr val="DADADA"/>
+        </a:accent4>
+        <a:accent5>
+          <a:srgbClr val="ADB8E2"/>
+        </a:accent5>
+        <a:accent6>
+          <a:srgbClr val="009F00"/>
+        </a:accent6>
+        <a:hlink>
+          <a:srgbClr val="66CCFF"/>
+        </a:hlink>
+        <a:folHlink>
+          <a:srgbClr val="FFE701"/>
+        </a:folHlink>
+      </a:clrScheme>
+      <a:clrMap bg1="dk2" tx1="lt1" bg2="dk1" tx2="lt2" accent1="accent1" accent2="accent2" accent3="accent3" accent4="accent4" accent5="accent5" accent6="accent6" hlink="hlink" folHlink="folHlink"/>
+    </a:extraClrScheme>
+    <a:extraClrScheme>
+      <a:clrScheme name="Conception personnalisée 9">
+        <a:dk1>
+          <a:srgbClr val="336699"/>
+        </a:dk1>
+        <a:lt1>
+          <a:srgbClr val="FFFFFF"/>
+        </a:lt1>
+        <a:dk2>
+          <a:srgbClr val="000000"/>
+        </a:dk2>
+        <a:lt2>
+          <a:srgbClr val="E3EBF1"/>
+        </a:lt2>
+        <a:accent1>
+          <a:srgbClr val="003399"/>
+        </a:accent1>
+        <a:accent2>
+          <a:srgbClr val="468A4B"/>
+        </a:accent2>
+        <a:accent3>
+          <a:srgbClr val="AAAAAA"/>
+        </a:accent3>
+        <a:accent4>
+          <a:srgbClr val="DADADA"/>
+        </a:accent4>
+        <a:accent5>
+          <a:srgbClr val="AAADCA"/>
+        </a:accent5>
+        <a:accent6>
+          <a:srgbClr val="3F7D43"/>
+        </a:accent6>
+        <a:hlink>
+          <a:srgbClr val="66CCFF"/>
+        </a:hlink>
+        <a:folHlink>
+          <a:srgbClr val="F0E500"/>
+        </a:folHlink>
+      </a:clrScheme>
+      <a:clrMap bg1="dk2" tx1="lt1" bg2="dk1" tx2="lt2" accent1="accent1" accent2="accent2" accent3="accent3" accent4="accent4" accent5="accent5" accent6="accent6" hlink="hlink" folHlink="folHlink"/>
+    </a:extraClrScheme>
+    <a:extraClrScheme>
+      <a:clrScheme name="Conception personnalisée 10">
+        <a:dk1>
+          <a:srgbClr val="777777"/>
+        </a:dk1>
+        <a:lt1>
+          <a:srgbClr val="FFFFFF"/>
+        </a:lt1>
+        <a:dk2>
+          <a:srgbClr val="686B5D"/>
+        </a:dk2>
+        <a:lt2>
+          <a:srgbClr val="D1D1CB"/>
+        </a:lt2>
+        <a:accent1>
+          <a:srgbClr val="909082"/>
+        </a:accent1>
+        <a:accent2>
+          <a:srgbClr val="809EA8"/>
+        </a:accent2>
+        <a:accent3>
+          <a:srgbClr val="B9BAB6"/>
+        </a:accent3>
+        <a:accent4>
+          <a:srgbClr val="DADADA"/>
+        </a:accent4>
+        <a:accent5>
+          <a:srgbClr val="C6C6C1"/>
+        </a:accent5>
+        <a:accent6>
+          <a:srgbClr val="738F98"/>
+        </a:accent6>
+        <a:hlink>
+          <a:srgbClr val="FFCC66"/>
+        </a:hlink>
+        <a:folHlink>
+          <a:srgbClr val="E9DCB9"/>
+        </a:folHlink>
+      </a:clrScheme>
+      <a:clrMap bg1="dk2" tx1="lt1" bg2="dk1" tx2="lt2" accent1="accent1" accent2="accent2" accent3="accent3" accent4="accent4" accent5="accent5" accent6="accent6" hlink="hlink" folHlink="folHlink"/>
+    </a:extraClrScheme>
+    <a:extraClrScheme>
+      <a:clrScheme name="Conception personnalisée 11">
+        <a:dk1>
+          <a:srgbClr val="3E3E5C"/>
+        </a:dk1>
+        <a:lt1>
+          <a:srgbClr val="FFFFFF"/>
+        </a:lt1>
+        <a:dk2>
+          <a:srgbClr val="666699"/>
+        </a:dk2>
+        <a:lt2>
+          <a:srgbClr val="FFFFFF"/>
+        </a:lt2>
+        <a:accent1>
+          <a:srgbClr val="60597B"/>
+        </a:accent1>
+        <a:accent2>
+          <a:srgbClr val="6666FF"/>
+        </a:accent2>
+        <a:accent3>
+          <a:srgbClr val="B8B8CA"/>
+        </a:accent3>
+        <a:accent4>
+          <a:srgbClr val="DADADA"/>
+        </a:accent4>
+        <a:accent5>
+          <a:srgbClr val="B6B5BF"/>
+        </a:accent5>
+        <a:accent6>
+          <a:srgbClr val="5C5CE7"/>
+        </a:accent6>
+        <a:hlink>
+          <a:srgbClr val="99CCFF"/>
+        </a:hlink>
+        <a:folHlink>
+          <a:srgbClr val="FFFF99"/>
+        </a:folHlink>
+      </a:clrScheme>
+      <a:clrMap bg1="dk2" tx1="lt1" bg2="dk1" tx2="lt2" accent1="accent1" accent2="accent2" accent3="accent3" accent4="accent4" accent5="accent5" accent6="accent6" hlink="hlink" folHlink="folHlink"/>
+    </a:extraClrScheme>
+    <a:extraClrScheme>
+      <a:clrScheme name="Conception personnalisée 12">
+        <a:dk1>
+          <a:srgbClr val="2D2015"/>
+        </a:dk1>
+        <a:lt1>
+          <a:srgbClr val="FFFFFF"/>
+        </a:lt1>
+        <a:dk2>
+          <a:srgbClr val="523E26"/>
+        </a:dk2>
+        <a:lt2>
+          <a:srgbClr val="DFC08D"/>
+        </a:lt2>
+        <a:accent1>
+          <a:srgbClr val="8C7B70"/>
+        </a:accent1>
+        <a:accent2>
+          <a:srgbClr val="8F5F2F"/>
+        </a:accent2>
+        <a:accent3>
+          <a:srgbClr val="B3AFAC"/>
+        </a:accent3>
+        <a:accent4>
+          <a:srgbClr val="DADADA"/>
+        </a:accent4>
+        <a:accent5>
+          <a:srgbClr val="C5BFBB"/>
+        </a:accent5>
+        <a:accent6>
+          <a:srgbClr val="81552A"/>
+        </a:accent6>
+        <a:hlink>
+          <a:srgbClr val="CCB400"/>
+        </a:hlink>
+        <a:folHlink>
+          <a:srgbClr val="8C9EA0"/>
+        </a:folHlink>
+      </a:clrScheme>
+      <a:clrMap bg1="dk2" tx1="lt1" bg2="dk1" tx2="lt2" accent1="accent1" accent2="accent2" accent3="accent3" accent4="accent4" accent5="accent5" accent6="accent6" hlink="hlink" folHlink="folHlink"/>
+    </a:extraClrScheme>
+  </a:extraClrSchemeLst>
+</a:theme>
+</file>
+
+<file path=ppt/theme/theme2.xml><?xml version="1.0" encoding="utf-8"?>
+<a:theme xmlns:a="http://schemas.openxmlformats.org/drawingml/2006/main" name="Thème Office">
+  <a:themeElements>
+    <a:clrScheme name="Office">
+      <a:dk1>
+        <a:sysClr val="windowText" lastClr="000000"/>
+      </a:dk1>
+      <a:lt1>
+        <a:sysClr val="window" lastClr="FFFFFF"/>
+      </a:lt1>
+      <a:dk2>
+        <a:srgbClr val="1F497D"/>
+      </a:dk2>
+      <a:lt2>
+        <a:srgbClr val="EEECE1"/>
+      </a:lt2>
+      <a:accent1>
+        <a:srgbClr val="4F81BD"/>
+      </a:accent1>
+      <a:accent2>
+        <a:srgbClr val="C0504D"/>
+      </a:accent2>
+      <a:accent3>
+        <a:srgbClr val="9BBB59"/>
+      </a:accent3>
+      <a:accent4>
+        <a:srgbClr val="8064A2"/>
+      </a:accent4>
+      <a:accent5>
+        <a:srgbClr val="4BACC6"/>
+      </a:accent5>
+      <a:accent6>
+        <a:srgbClr val="F79646"/>
+      </a:accent6>
+      <a:hlink>
+        <a:srgbClr val="0000FF"/>
+      </a:hlink>
+      <a:folHlink>
+        <a:srgbClr val="800080"/>
+      </a:folHlink>
+    </a:clrScheme>
+    <a:fontScheme name="Office">
+      <a:majorFont>
+        <a:latin typeface="Calibri"/>
+        <a:ea typeface=""/>
+        <a:cs typeface=""/>
+        <a:font script="Jpan" typeface="ＭＳ Ｐゴシック"/>
+        <a:font script="Hang" typeface="맑은 고딕"/>
+        <a:font script="Hans" typeface="宋体"/>
+        <a:font script="Hant" typeface="新細明體"/>
+        <a:font script="Arab" typeface="Times New Roman"/>
+        <a:font script="Hebr" typeface="Times New Roman"/>
+        <a:font script="Thai" typeface="Angsana New"/>
+        <a:font script="Ethi" typeface="Nyala"/>
+        <a:font script="Beng" typeface="Vrinda"/>
+        <a:font script="Gujr" typeface="Shruti"/>
+        <a:font script="Khmr" typeface="MoolBoran"/>
+        <a:font script="Knda" typeface="Tunga"/>
+        <a:font script="Guru" typeface="Raavi"/>
+        <a:font script="Cans" typeface="Euphemia"/>
+        <a:font script="Cher" typeface="Plantagenet Cherokee"/>
+        <a:font script="Yiii" typeface="Microsoft Yi Baiti"/>
+        <a:font script="Tibt" typeface="Microsoft Himalaya"/>
+        <a:font script="Thaa" typeface="MV Boli"/>
+        <a:font script="Deva" typeface="Mangal"/>
+        <a:font script="Telu" typeface="Gautami"/>
+        <a:font script="Taml" typeface="Latha"/>
+        <a:font script="Syrc" typeface="Estrangelo Edessa"/>
+        <a:font script="Orya" typeface="Kalinga"/>
+        <a:font script="Mlym" typeface="Kartika"/>
+        <a:font script="Laoo" typeface="DokChampa"/>
+        <a:font script="Sinh" typeface="Iskoola Pota"/>
+        <a:font script="Mong" typeface="Mongolian Baiti"/>
+        <a:font script="Viet" typeface="Times New Roman"/>
+        <a:font script="Uigh" typeface="Microsoft Uighur"/>
+      </a:majorFont>
+      <a:minorFont>
+        <a:latin typeface="Calibri"/>
+        <a:ea typeface=""/>
+        <a:cs typeface=""/>
+        <a:font script="Jpan" typeface="ＭＳ Ｐゴシック"/>
+        <a:font script="Hang" typeface="맑은 고딕"/>
+        <a:font script="Hans" typeface="宋体"/>
+        <a:font script="Hant" typeface="新細明體"/>
+        <a:font script="Arab" typeface="Arial"/>
+        <a:font script="Hebr" typeface="Arial"/>
+        <a:font script="Thai" typeface="Cordia New"/>
+        <a:font script="Ethi" typeface="Nyala"/>
+        <a:font script="Beng" typeface="Vrinda"/>
+        <a:font script="Gujr" typeface="Shruti"/>
+        <a:font script="Khmr" typeface="DaunPenh"/>
+        <a:font script="Knda" typeface="Tunga"/>
+        <a:font script="Guru" typeface="Raavi"/>
+        <a:font script="Cans" typeface="Euphemia"/>
+        <a:font script="Cher" typeface="Plantagenet Cherokee"/>
+        <a:font script="Yiii" typeface="Microsoft Yi Baiti"/>
+        <a:font script="Tibt" typeface="Microsoft Himalaya"/>
+        <a:font script="Thaa" typeface="MV Boli"/>
+        <a:font script="Deva" typeface="Mangal"/>
+        <a:font script="Telu" typeface="Gautami"/>
+        <a:font script="Taml" typeface="Latha"/>
+        <a:font script="Syrc" typeface="Estrangelo Edessa"/>
+        <a:font script="Orya" typeface="Kalinga"/>
+        <a:font script="Mlym" typeface="Kartika"/>
+        <a:font script="Laoo" typeface="DokChampa"/>
+        <a:font script="Sinh" typeface="Iskoola Pota"/>
+        <a:font script="Mong" typeface="Mongolian Baiti"/>
+        <a:font script="Viet" typeface="Arial"/>
+        <a:font script="Uigh" typeface="Microsoft Uighur"/>
+      </a:minorFont>
+    </a:fontScheme>
+    <a:fmtScheme name="Office">
+      <a:fillStyleLst>
+        <a:solidFill>
+          <a:schemeClr val="phClr"/>
+        </a:solidFill>
+        <a:gradFill rotWithShape="1">
+          <a:gsLst>
+            <a:gs pos="0">
+              <a:schemeClr val="phClr">
+                <a:tint val="50000"/>
+                <a:satMod val="300000"/>
+              </a:schemeClr>
+            </a:gs>
+            <a:gs pos="35000">
+              <a:schemeClr val="phClr">
+                <a:tint val="37000"/>
+                <a:satMod val="300000"/>
+              </a:schemeClr>
+            </a:gs>
+            <a:gs pos="100000">
+              <a:schemeClr val="phClr">
+                <a:tint val="15000"/>
+                <a:satMod val="350000"/>
+              </a:schemeClr>
+            </a:gs>
+          </a:gsLst>
+          <a:lin ang="16200000" scaled="1"/>
+        </a:gradFill>
+        <a:gradFill rotWithShape="1">
+          <a:gsLst>
+            <a:gs pos="0">
+              <a:schemeClr val="phClr">
+                <a:shade val="51000"/>
+                <a:satMod val="130000"/>
+              </a:schemeClr>
+            </a:gs>
+            <a:gs pos="80000">
+              <a:schemeClr val="phClr">
+                <a:shade val="93000"/>
+                <a:satMod val="130000"/>
+              </a:schemeClr>
+            </a:gs>
+            <a:gs pos="100000">
+              <a:schemeClr val="phClr">
+                <a:shade val="94000"/>
+                <a:satMod val="135000"/>
+              </a:schemeClr>
+            </a:gs>
+          </a:gsLst>
+          <a:lin ang="16200000" scaled="0"/>
+        </a:gradFill>
+      </a:fillStyleLst>
+      <a:lnStyleLst>
+        <a:ln w="9525" cap="flat" cmpd="sng" algn="ctr">
+          <a:solidFill>
+            <a:schemeClr val="phClr">
+              <a:shade val="95000"/>
+              <a:satMod val="105000"/>
+            </a:schemeClr>
+          </a:solidFill>
+          <a:prstDash val="solid"/>
+        </a:ln>
+        <a:ln w="25400" cap="flat" cmpd="sng" algn="ctr">
+          <a:solidFill>
+            <a:schemeClr val="phClr"/>
+          </a:solidFill>
+          <a:prstDash val="solid"/>
+        </a:ln>
+        <a:ln w="38100" cap="flat" cmpd="sng" algn="ctr">
+          <a:solidFill>
+            <a:schemeClr val="phClr"/>
+          </a:solidFill>
+          <a:prstDash val="solid"/>
+        </a:ln>
+      </a:lnStyleLst>
+      <a:effectStyleLst>
+        <a:effectStyle>
+          <a:effectLst>
+            <a:outerShdw blurRad="40000" dist="20000" dir="5400000" rotWithShape="0">
+              <a:srgbClr val="000000">
+                <a:alpha val="38000"/>
+              </a:srgbClr>
+            </a:outerShdw>
+          </a:effectLst>
+        </a:effectStyle>
+        <a:effectStyle>
+          <a:effectLst>
+            <a:outerShdw blurRad="40000" dist="23000" dir="5400000" rotWithShape="0">
+              <a:srgbClr val="000000">
+                <a:alpha val="35000"/>
+              </a:srgbClr>
+            </a:outerShdw>
+          </a:effectLst>
+        </a:effectStyle>
+        <a:effectStyle>
+          <a:effectLst>
+            <a:outerShdw blurRad="40000" dist="23000" dir="5400000" rotWithShape="0">
+              <a:srgbClr val="000000">
+                <a:alpha val="35000"/>
+              </a:srgbClr>
+            </a:outerShdw>
+          </a:effectLst>
+          <a:scene3d>
+            <a:camera prst="orthographicFront">
+              <a:rot lat="0" lon="0" rev="0"/>
+            </a:camera>
+            <a:lightRig rig="threePt" dir="t">
+              <a:rot lat="0" lon="0" rev="1200000"/>
+            </a:lightRig>
+          </a:scene3d>
+          <a:sp3d>
+            <a:bevelT w="63500" h="25400"/>
+          </a:sp3d>
+        </a:effectStyle>
+      </a:effectStyleLst>
+      <a:bgFillStyleLst>
+        <a:solidFill>
+          <a:schemeClr val="phClr"/>
+        </a:solidFill>
+        <a:gradFill rotWithShape="1">
+          <a:gsLst>
+            <a:gs pos="0">
+              <a:schemeClr val="phClr">
+                <a:tint val="40000"/>
+                <a:satMod val="350000"/>
+              </a:schemeClr>
+            </a:gs>
+            <a:gs pos="40000">
+              <a:schemeClr val="phClr">
+                <a:tint val="45000"/>
+                <a:shade val="99000"/>
+                <a:satMod val="350000"/>
+              </a:schemeClr>
+            </a:gs>
+            <a:gs pos="100000">
+              <a:schemeClr val="phClr">
+                <a:shade val="20000"/>
+                <a:satMod val="255000"/>
+              </a:schemeClr>
+            </a:gs>
+          </a:gsLst>
+          <a:path path="circle">
+            <a:fillToRect l="50000" t="-80000" r="50000" b="180000"/>
+          </a:path>
+        </a:gradFill>
+        <a:gradFill rotWithShape="1">
+          <a:gsLst>
+            <a:gs pos="0">
+              <a:schemeClr val="phClr">
+                <a:tint val="80000"/>
+                <a:satMod val="300000"/>
+              </a:schemeClr>
+            </a:gs>
+            <a:gs pos="100000">
+              <a:schemeClr val="phClr">
+                <a:shade val="30000"/>
+                <a:satMod val="200000"/>
+              </a:schemeClr>
+            </a:gs>
+          </a:gsLst>
+          <a:path path="circle">
+            <a:fillToRect l="50000" t="50000" r="50000" b="50000"/>
+          </a:path>
+        </a:gradFill>
+      </a:bgFillStyleLst>
+    </a:fmtScheme>
+  </a:themeElements>
+  <a:objectDefaults/>
+  <a:extraClrSchemeLst/>
+</a:theme>
+</file>
+
+<file path=ppt/theme/theme3.xml><?xml version="1.0" encoding="utf-8"?>
+<a:theme xmlns:a="http://schemas.openxmlformats.org/drawingml/2006/main" name="Thème Office">
+  <a:themeElements>
+    <a:clrScheme name="Office">
+      <a:dk1>
+        <a:sysClr val="windowText" lastClr="000000"/>
+      </a:dk1>
+      <a:lt1>
+        <a:sysClr val="window" lastClr="FFFFFF"/>
+      </a:lt1>
+      <a:dk2>
+        <a:srgbClr val="1F497D"/>
+      </a:dk2>
+      <a:lt2>
+        <a:srgbClr val="EEECE1"/>
+      </a:lt2>
+      <a:accent1>
+        <a:srgbClr val="4F81BD"/>
+      </a:accent1>
+      <a:accent2>
+        <a:srgbClr val="C0504D"/>
+      </a:accent2>
+      <a:accent3>
+        <a:srgbClr val="9BBB59"/>
+      </a:accent3>
+      <a:accent4>
+        <a:srgbClr val="8064A2"/>
+      </a:accent4>
+      <a:accent5>
+        <a:srgbClr val="4BACC6"/>
+      </a:accent5>
+      <a:accent6>
+        <a:srgbClr val="F79646"/>
+      </a:accent6>
+      <a:hlink>
+        <a:srgbClr val="0000FF"/>
+      </a:hlink>
+      <a:folHlink>
+        <a:srgbClr val="800080"/>
+      </a:folHlink>
+    </a:clrScheme>
+    <a:fontScheme name="Office">
+      <a:majorFont>
+        <a:latin typeface="Calibri"/>
+        <a:ea typeface=""/>
+        <a:cs typeface=""/>
+        <a:font script="Jpan" typeface="ＭＳ Ｐゴシック"/>
+        <a:font script="Hang" typeface="맑은 고딕"/>
+        <a:font script="Hans" typeface="宋体"/>
+        <a:font script="Hant" typeface="新細明體"/>
+        <a:font script="Arab" typeface="Times New Roman"/>
+        <a:font script="Hebr" typeface="Times New Roman"/>
+        <a:font script="Thai" typeface="Angsana New"/>
+        <a:font script="Ethi" typeface="Nyala"/>
+        <a:font script="Beng" typeface="Vrinda"/>
+        <a:font script="Gujr" typeface="Shruti"/>
+        <a:font script="Khmr" typeface="MoolBoran"/>
+        <a:font script="Knda" typeface="Tunga"/>
+        <a:font script="Guru" typeface="Raavi"/>
+        <a:font script="Cans" typeface="Euphemia"/>
+        <a:font script="Cher" typeface="Plantagenet Cherokee"/>
+        <a:font script="Yiii" typeface="Microsoft Yi Baiti"/>
+        <a:font script="Tibt" typeface="Microsoft Himalaya"/>
+        <a:font script="Thaa" typeface="MV Boli"/>
+        <a:font script="Deva" typeface="Mangal"/>
+        <a:font script="Telu" typeface="Gautami"/>
+        <a:font script="Taml" typeface="Latha"/>
+        <a:font script="Syrc" typeface="Estrangelo Edessa"/>
+        <a:font script="Orya" typeface="Kalinga"/>
+        <a:font script="Mlym" typeface="Kartika"/>
+        <a:font script="Laoo" typeface="DokChampa"/>
+        <a:font script="Sinh" typeface="Iskoola Pota"/>
+        <a:font script="Mong" typeface="Mongolian Baiti"/>
+        <a:font script="Viet" typeface="Times New Roman"/>
+        <a:font script="Uigh" typeface="Microsoft Uighur"/>
+      </a:majorFont>
+      <a:minorFont>
+        <a:latin typeface="Calibri"/>
+        <a:ea typeface=""/>
+        <a:cs typeface=""/>
+        <a:font script="Jpan" typeface="ＭＳ Ｐゴシック"/>
+        <a:font script="Hang" typeface="맑은 고딕"/>
+        <a:font script="Hans" typeface="宋体"/>
+        <a:font script="Hant" typeface="新細明體"/>
+        <a:font script="Arab" typeface="Arial"/>
+        <a:font script="Hebr" typeface="Arial"/>
+        <a:font script="Thai" typeface="Cordia New"/>
+        <a:font script="Ethi" typeface="Nyala"/>
+        <a:font script="Beng" typeface="Vrinda"/>
+        <a:font script="Gujr" typeface="Shruti"/>
+        <a:font script="Khmr" typeface="DaunPenh"/>
+        <a:font script="Knda" typeface="Tunga"/>
+        <a:font script="Guru" typeface="Raavi"/>
+        <a:font script="Cans" typeface="Euphemia"/>
+        <a:font script="Cher" typeface="Plantagenet Cherokee"/>
+        <a:font script="Yiii" typeface="Microsoft Yi Baiti"/>
+        <a:font script="Tibt" typeface="Microsoft Himalaya"/>
+        <a:font script="Thaa" typeface="MV Boli"/>
+        <a:font script="Deva" typeface="Mangal"/>
+        <a:font script="Telu" typeface="Gautami"/>
+        <a:font script="Taml" typeface="Latha"/>
+        <a:font script="Syrc" typeface="Estrangelo Edessa"/>
+        <a:font script="Orya" typeface="Kalinga"/>
+        <a:font script="Mlym" typeface="Kartika"/>
+        <a:font script="Laoo" typeface="DokChampa"/>
+        <a:font script="Sinh" typeface="Iskoola Pota"/>
+        <a:font script="Mong" typeface="Mongolian Baiti"/>
+        <a:font script="Viet" typeface="Arial"/>
+        <a:font script="Uigh" typeface="Microsoft Uighur"/>
+      </a:minorFont>
+    </a:fontScheme>
+    <a:fmtScheme name="Office">
+      <a:fillStyleLst>
+        <a:solidFill>
+          <a:schemeClr val="phClr"/>
+        </a:solidFill>
+        <a:gradFill rotWithShape="1">
+          <a:gsLst>
+            <a:gs pos="0">
+              <a:schemeClr val="phClr">
+                <a:tint val="50000"/>
+                <a:satMod val="300000"/>
+              </a:schemeClr>
+            </a:gs>
+            <a:gs pos="35000">
+              <a:schemeClr val="phClr">
+                <a:tint val="37000"/>
+                <a:satMod val="300000"/>
+              </a:schemeClr>
+            </a:gs>
+            <a:gs pos="100000">
+              <a:schemeClr val="phClr">
+                <a:tint val="15000"/>
+                <a:satMod val="350000"/>
+              </a:schemeClr>
+            </a:gs>
+          </a:gsLst>
+          <a:lin ang="16200000" scaled="1"/>
+        </a:gradFill>
+        <a:gradFill rotWithShape="1">
+          <a:gsLst>
+            <a:gs pos="0">
+              <a:schemeClr val="phClr">
+                <a:shade val="51000"/>
+                <a:satMod val="130000"/>
+              </a:schemeClr>
+            </a:gs>
+            <a:gs pos="80000">
+              <a:schemeClr val="phClr">
+                <a:shade val="93000"/>
+                <a:satMod val="130000"/>
+              </a:schemeClr>
+            </a:gs>
+            <a:gs pos="100000">
+              <a:schemeClr val="phClr">
+                <a:shade val="94000"/>
+                <a:satMod val="135000"/>
+              </a:schemeClr>
+            </a:gs>
+          </a:gsLst>
+          <a:lin ang="16200000" scaled="0"/>
+        </a:gradFill>
+      </a:fillStyleLst>
+      <a:lnStyleLst>
+        <a:ln w="9525" cap="flat" cmpd="sng" algn="ctr">
+          <a:solidFill>
+            <a:schemeClr val="phClr">
+              <a:shade val="95000"/>
+              <a:satMod val="105000"/>
+            </a:schemeClr>
+          </a:solidFill>
+          <a:prstDash val="solid"/>
+        </a:ln>
+        <a:ln w="25400" cap="flat" cmpd="sng" algn="ctr">
+          <a:solidFill>
+            <a:schemeClr val="phClr"/>
+          </a:solidFill>
+          <a:prstDash val="solid"/>
+        </a:ln>
+        <a:ln w="38100" cap="flat" cmpd="sng" algn="ctr">
+          <a:solidFill>
+            <a:schemeClr val="phClr"/>
+          </a:solidFill>
+          <a:prstDash val="solid"/>
+        </a:ln>
+      </a:lnStyleLst>
+      <a:effectStyleLst>
+        <a:effectStyle>
+          <a:effectLst>
+            <a:outerShdw blurRad="40000" dist="20000" dir="5400000" rotWithShape="0">
+              <a:srgbClr val="000000">
+                <a:alpha val="38000"/>
+              </a:srgbClr>
+            </a:outerShdw>
+          </a:effectLst>
+        </a:effectStyle>
+        <a:effectStyle>
+          <a:effectLst>
+            <a:outerShdw blurRad="40000" dist="23000" dir="5400000" rotWithShape="0">
+              <a:srgbClr val="000000">
+                <a:alpha val="35000"/>
+              </a:srgbClr>
+            </a:outerShdw>
+          </a:effectLst>
+        </a:effectStyle>
+        <a:effectStyle>
+          <a:effectLst>
+            <a:outerShdw blurRad="40000" dist="23000" dir="5400000" rotWithShape="0">
+              <a:srgbClr val="000000">
+                <a:alpha val="35000"/>
+              </a:srgbClr>
+            </a:outerShdw>
+          </a:effectLst>
+          <a:scene3d>
+            <a:camera prst="orthographicFront">
+              <a:rot lat="0" lon="0" rev="0"/>
+            </a:camera>
+            <a:lightRig rig="threePt" dir="t">
+              <a:rot lat="0" lon="0" rev="1200000"/>
+            </a:lightRig>
+          </a:scene3d>
+          <a:sp3d>
+            <a:bevelT w="63500" h="25400"/>
+          </a:sp3d>
+        </a:effectStyle>
+      </a:effectStyleLst>
+      <a:bgFillStyleLst>
+        <a:solidFill>
+          <a:schemeClr val="phClr"/>
+        </a:solidFill>
+        <a:gradFill rotWithShape="1">
+          <a:gsLst>
+            <a:gs pos="0">
+              <a:schemeClr val="phClr">
+                <a:tint val="40000"/>
+                <a:satMod val="350000"/>
+              </a:schemeClr>
+            </a:gs>
+            <a:gs pos="40000">
+              <a:schemeClr val="phClr">
+                <a:tint val="45000"/>
+                <a:shade val="99000"/>
+                <a:satMod val="350000"/>
+              </a:schemeClr>
+            </a:gs>
+            <a:gs pos="100000">
+              <a:schemeClr val="phClr">
+                <a:shade val="20000"/>
+                <a:satMod val="255000"/>
+              </a:schemeClr>
+            </a:gs>
+          </a:gsLst>
+          <a:path path="circle">
+            <a:fillToRect l="50000" t="-80000" r="50000" b="180000"/>
+          </a:path>
+        </a:gradFill>
+        <a:gradFill rotWithShape="1">
+          <a:gsLst>
+            <a:gs pos="0">
+              <a:schemeClr val="phClr">
+                <a:tint val="80000"/>
+                <a:satMod val="300000"/>
+              </a:schemeClr>
+            </a:gs>
+            <a:gs pos="100000">
+              <a:schemeClr val="phClr">
+                <a:shade val="30000"/>
+                <a:satMod val="200000"/>
+              </a:schemeClr>
+            </a:gs>
+          </a:gsLst>
+          <a:path path="circle">
+            <a:fillToRect l="50000" t="50000" r="50000" b="50000"/>
+          </a:path>
+        </a:gradFill>
+      </a:bgFillStyleLst>
+    </a:fmtScheme>
+  </a:themeElements>
+  <a:objectDefaults/>
   <a:extraClrSchemeLst/>
 </a:theme>
 </file>